--- a/Проект Угадай число.pptx
+++ b/Проект Угадай число.pptx
@@ -11507,7 +11507,7 @@
                 <a:hlinkClick r:id="rId2">
                   <a:extLst>
                     <a:ext uri="{A12FA001-AC4F-418D-AE19-62706E023703}">
-                      <ahyp:hlinkClr xmlns:ahyp="http://schemas.microsoft.com/office/drawing/2018/hyperlinkcolor" xmlns:p15="http://schemas.microsoft.com/office/powerpoint/2012/main" xmlns:p14="http://schemas.microsoft.com/office/powerpoint/2010/main" xmlns:com="http://schemas.openxmlformats.org/drawingml/2006/compatibility" xmlns:pvml="urn:schemas-microsoft-com:office:powerpoint" xmlns:v="urn:schemas-microsoft-com:vml" xmlns:o="urn:schemas-microsoft-com:office:office" xmlns:dgm="http://schemas.openxmlformats.org/drawingml/2006/diagram" xmlns:c="http://schemas.openxmlformats.org/drawingml/2006/chart" xmlns:mv="urn:schemas-microsoft-com:mac:vml" xmlns:mc="http://schemas.openxmlformats.org/markup-compatibility/2006" xmlns="" val="tx"/>
+                      <ahyp:hlinkClr xmlns="" xmlns:mc="http://schemas.openxmlformats.org/markup-compatibility/2006" xmlns:mv="urn:schemas-microsoft-com:mac:vml" xmlns:c="http://schemas.openxmlformats.org/drawingml/2006/chart" xmlns:dgm="http://schemas.openxmlformats.org/drawingml/2006/diagram" xmlns:o="urn:schemas-microsoft-com:office:office" xmlns:v="urn:schemas-microsoft-com:vml" xmlns:pvml="urn:schemas-microsoft-com:office:powerpoint" xmlns:com="http://schemas.openxmlformats.org/drawingml/2006/compatibility" xmlns:p14="http://schemas.microsoft.com/office/powerpoint/2010/main" xmlns:p15="http://schemas.microsoft.com/office/powerpoint/2012/main" xmlns:ahyp="http://schemas.microsoft.com/office/drawing/2018/hyperlinkcolor" val="tx"/>
                     </a:ext>
                   </a:extLst>
                 </a:hlinkClick>
@@ -11541,7 +11541,7 @@
                 <a:hlinkClick r:id="rId3">
                   <a:extLst>
                     <a:ext uri="{A12FA001-AC4F-418D-AE19-62706E023703}">
-                      <ahyp:hlinkClr xmlns:ahyp="http://schemas.microsoft.com/office/drawing/2018/hyperlinkcolor" xmlns:p15="http://schemas.microsoft.com/office/powerpoint/2012/main" xmlns:p14="http://schemas.microsoft.com/office/powerpoint/2010/main" xmlns:com="http://schemas.openxmlformats.org/drawingml/2006/compatibility" xmlns:pvml="urn:schemas-microsoft-com:office:powerpoint" xmlns:v="urn:schemas-microsoft-com:vml" xmlns:o="urn:schemas-microsoft-com:office:office" xmlns:dgm="http://schemas.openxmlformats.org/drawingml/2006/diagram" xmlns:c="http://schemas.openxmlformats.org/drawingml/2006/chart" xmlns:mv="urn:schemas-microsoft-com:mac:vml" xmlns:mc="http://schemas.openxmlformats.org/markup-compatibility/2006" xmlns="" val="tx"/>
+                      <ahyp:hlinkClr xmlns="" xmlns:mc="http://schemas.openxmlformats.org/markup-compatibility/2006" xmlns:mv="urn:schemas-microsoft-com:mac:vml" xmlns:c="http://schemas.openxmlformats.org/drawingml/2006/chart" xmlns:dgm="http://schemas.openxmlformats.org/drawingml/2006/diagram" xmlns:o="urn:schemas-microsoft-com:office:office" xmlns:v="urn:schemas-microsoft-com:vml" xmlns:pvml="urn:schemas-microsoft-com:office:powerpoint" xmlns:com="http://schemas.openxmlformats.org/drawingml/2006/compatibility" xmlns:p14="http://schemas.microsoft.com/office/powerpoint/2010/main" xmlns:p15="http://schemas.microsoft.com/office/powerpoint/2012/main" xmlns:ahyp="http://schemas.microsoft.com/office/drawing/2018/hyperlinkcolor" val="tx"/>
                     </a:ext>
                   </a:extLst>
                 </a:hlinkClick>
@@ -11575,7 +11575,7 @@
                 <a:hlinkClick r:id="rId4">
                   <a:extLst>
                     <a:ext uri="{A12FA001-AC4F-418D-AE19-62706E023703}">
-                      <ahyp:hlinkClr xmlns:ahyp="http://schemas.microsoft.com/office/drawing/2018/hyperlinkcolor" xmlns:p15="http://schemas.microsoft.com/office/powerpoint/2012/main" xmlns:p14="http://schemas.microsoft.com/office/powerpoint/2010/main" xmlns:com="http://schemas.openxmlformats.org/drawingml/2006/compatibility" xmlns:pvml="urn:schemas-microsoft-com:office:powerpoint" xmlns:v="urn:schemas-microsoft-com:vml" xmlns:o="urn:schemas-microsoft-com:office:office" xmlns:dgm="http://schemas.openxmlformats.org/drawingml/2006/diagram" xmlns:c="http://schemas.openxmlformats.org/drawingml/2006/chart" xmlns:mv="urn:schemas-microsoft-com:mac:vml" xmlns:mc="http://schemas.openxmlformats.org/markup-compatibility/2006" xmlns="" val="tx"/>
+                      <ahyp:hlinkClr xmlns="" xmlns:mc="http://schemas.openxmlformats.org/markup-compatibility/2006" xmlns:mv="urn:schemas-microsoft-com:mac:vml" xmlns:c="http://schemas.openxmlformats.org/drawingml/2006/chart" xmlns:dgm="http://schemas.openxmlformats.org/drawingml/2006/diagram" xmlns:o="urn:schemas-microsoft-com:office:office" xmlns:v="urn:schemas-microsoft-com:vml" xmlns:pvml="urn:schemas-microsoft-com:office:powerpoint" xmlns:com="http://schemas.openxmlformats.org/drawingml/2006/compatibility" xmlns:p14="http://schemas.microsoft.com/office/powerpoint/2010/main" xmlns:p15="http://schemas.microsoft.com/office/powerpoint/2012/main" xmlns:ahyp="http://schemas.microsoft.com/office/drawing/2018/hyperlinkcolor" val="tx"/>
                     </a:ext>
                   </a:extLst>
                 </a:hlinkClick>
@@ -14958,18 +14958,26 @@
                   <a:schemeClr val="accent3"/>
                 </a:solidFill>
               </a:rPr>
-              <a:t>Цель: разработать приложение используя </a:t>
-            </a:r>
-            <a:r>
-              <a:rPr lang="ru-RU" sz="1400" b="1" dirty="0" smtClean="0">
+              <a:t>Цель: разработать приложение </a:t>
+            </a:r>
+            <a:r>
+              <a:rPr lang="ru-RU" sz="1400" smtClean="0">
+                <a:solidFill>
+                  <a:schemeClr val="accent3"/>
+                </a:solidFill>
+              </a:rPr>
+              <a:t>используя </a:t>
+            </a:r>
+            <a:r>
+              <a:rPr lang="ru-RU" sz="1400" b="1" smtClean="0">
                 <a:solidFill>
                   <a:srgbClr val="FF5858"/>
                 </a:solidFill>
               </a:rPr>
-              <a:t>процессы</a:t>
-            </a:r>
-            <a:r>
-              <a:rPr lang="ru-RU" sz="1400" dirty="0" smtClean="0">
+              <a:t>указатели</a:t>
+            </a:r>
+            <a:r>
+              <a:rPr lang="ru-RU" sz="1400" smtClean="0">
                 <a:solidFill>
                   <a:schemeClr val="accent3"/>
                 </a:solidFill>
@@ -15008,11 +15016,6 @@
               </a:rPr>
               <a:t>.</a:t>
             </a:r>
-            <a:endParaRPr lang="ru-RU" sz="1400" dirty="0" smtClean="0">
-              <a:solidFill>
-                <a:schemeClr val="accent3"/>
-              </a:solidFill>
-            </a:endParaRPr>
           </a:p>
           <a:p>
             <a:pPr marL="0" lvl="0" indent="0" algn="l" rtl="0">
@@ -15585,15 +15588,7 @@
                   <a:schemeClr val="accent3"/>
                 </a:solidFill>
               </a:rPr>
-              <a:t>о</a:t>
-            </a:r>
-            <a:r>
-              <a:rPr lang="ru-RU" dirty="0" smtClean="0">
-                <a:solidFill>
-                  <a:schemeClr val="accent3"/>
-                </a:solidFill>
-              </a:rPr>
-              <a:t>тправляет предположения и получает подсказки (</a:t>
+              <a:t>отправляет предположения и получает подсказки (</a:t>
             </a:r>
             <a:r>
               <a:rPr lang="en-US" dirty="0" smtClean="0">
@@ -17847,11 +17842,7 @@
             </a:r>
             <a:r>
               <a:rPr lang="ru-RU" sz="1400" dirty="0" smtClean="0"/>
-              <a:t>. </a:t>
-            </a:r>
-            <a:r>
-              <a:rPr lang="ru-RU" sz="1400" dirty="0" smtClean="0"/>
-              <a:t>Функция принимает числа от клиента, сравнивает их с загаданным </a:t>
+              <a:t>. Функция принимает числа от клиента, сравнивает их с загаданным </a:t>
             </a:r>
             <a:r>
               <a:rPr lang="ru-RU" sz="1400" dirty="0" err="1" smtClean="0"/>
@@ -18245,11 +18236,7 @@
             </a:r>
             <a:r>
               <a:rPr lang="ru-RU" sz="1400" dirty="0" smtClean="0"/>
-              <a:t>: инициализирует сеть, загадывает число и бесконечно принимает новых клиентов, запуская для каждого отдельный </a:t>
-            </a:r>
-            <a:r>
-              <a:rPr lang="ru-RU" sz="1400" dirty="0" smtClean="0"/>
-              <a:t>поток.</a:t>
+              <a:t>: инициализирует сеть, загадывает число и бесконечно принимает новых клиентов, запуская для каждого отдельный поток.</a:t>
             </a:r>
             <a:r>
               <a:rPr lang="en-US" sz="1400" dirty="0" smtClean="0"/>
@@ -18261,11 +18248,7 @@
             </a:r>
             <a:r>
               <a:rPr lang="ru-RU" sz="1400" dirty="0" smtClean="0"/>
-              <a:t> </a:t>
-            </a:r>
-            <a:r>
-              <a:rPr lang="ru-RU" sz="1400" dirty="0" smtClean="0"/>
-              <a:t>генерируется </a:t>
+              <a:t> генерируется </a:t>
             </a:r>
             <a:r>
               <a:rPr lang="ru-RU" sz="1400" b="1" dirty="0" smtClean="0"/>
@@ -18905,15 +18888,7 @@
             </a:r>
             <a:r>
               <a:rPr lang="ru-RU" dirty="0" smtClean="0"/>
-              <a:t>разберем ее работу. </a:t>
-            </a:r>
-            <a:r>
-              <a:rPr lang="ru-RU" dirty="0" smtClean="0"/>
-              <a:t>Клиент подключается к серверу, в цикле отправляет числа пользователя, получает текстовые подсказки и завершает игру при получении WIN: или разрыве соединения.</a:t>
-            </a:r>
-            <a:r>
-              <a:rPr lang="ru-RU" dirty="0" smtClean="0"/>
-              <a:t> </a:t>
+              <a:t>разберем ее работу. Клиент подключается к серверу, в цикле отправляет числа пользователя, получает текстовые подсказки и завершает игру при получении WIN: или разрыве соединения. </a:t>
             </a:r>
             <a:r>
               <a:rPr lang="en" dirty="0" smtClean="0"/>
@@ -19719,51 +19694,7 @@
                 <a:ea typeface="Fira Code" charset="0"/>
                 <a:cs typeface="Fira Code" charset="0"/>
               </a:rPr>
-              <a:t>Преимущественно автоматическая (</a:t>
-            </a:r>
-            <a:r>
-              <a:rPr lang="ru-RU" dirty="0" smtClean="0">
-                <a:solidFill>
-                  <a:schemeClr val="accent6"/>
-                </a:solidFill>
-                <a:latin typeface="Fira Code" charset="0"/>
-                <a:ea typeface="Fira Code" charset="0"/>
-                <a:cs typeface="Fira Code" charset="0"/>
-              </a:rPr>
-              <a:t>стек</a:t>
-            </a:r>
-            <a:r>
-              <a:rPr lang="ru-RU" dirty="0" smtClean="0">
-                <a:solidFill>
-                  <a:schemeClr val="accent6"/>
-                </a:solidFill>
-                <a:latin typeface="Fira Code" charset="0"/>
-                <a:ea typeface="Fira Code" charset="0"/>
-                <a:cs typeface="Fira Code" charset="0"/>
-              </a:rPr>
-              <a:t>)</a:t>
-            </a:r>
-            <a:r>
-              <a:rPr lang="ru-RU" dirty="0" smtClean="0">
-                <a:solidFill>
-                  <a:schemeClr val="accent6"/>
-                </a:solidFill>
-                <a:latin typeface="Fira Code" charset="0"/>
-                <a:ea typeface="Fira Code" charset="0"/>
-                <a:cs typeface="Fira Code" charset="0"/>
-              </a:rPr>
-              <a:t>, </a:t>
-            </a:r>
-            <a:r>
-              <a:rPr lang="ru-RU" dirty="0" smtClean="0">
-                <a:solidFill>
-                  <a:schemeClr val="accent6"/>
-                </a:solidFill>
-                <a:latin typeface="Fira Code" charset="0"/>
-                <a:ea typeface="Fira Code" charset="0"/>
-                <a:cs typeface="Fira Code" charset="0"/>
-              </a:rPr>
-              <a:t>вручную освобождались только служебные сетевые структуры.</a:t>
+              <a:t>Преимущественно автоматическая (стек), вручную освобождались только служебные сетевые структуры.</a:t>
             </a:r>
             <a:endParaRPr dirty="0">
               <a:solidFill>

--- a/Проект Угадай число.pptx
+++ b/Проект Угадай число.pptx
@@ -5,25 +5,29 @@
     <p:sldMasterId id="2147483672" r:id="rId1"/>
   </p:sldMasterIdLst>
   <p:notesMasterIdLst>
-    <p:notesMasterId r:id="rId10"/>
+    <p:notesMasterId r:id="rId14"/>
   </p:notesMasterIdLst>
   <p:sldIdLst>
     <p:sldId id="256" r:id="rId2"/>
     <p:sldId id="257" r:id="rId3"/>
     <p:sldId id="266" r:id="rId4"/>
-    <p:sldId id="301" r:id="rId5"/>
-    <p:sldId id="300" r:id="rId6"/>
-    <p:sldId id="303" r:id="rId7"/>
-    <p:sldId id="263" r:id="rId8"/>
-    <p:sldId id="302" r:id="rId9"/>
+    <p:sldId id="304" r:id="rId5"/>
+    <p:sldId id="305" r:id="rId6"/>
+    <p:sldId id="306" r:id="rId7"/>
+    <p:sldId id="307" r:id="rId8"/>
+    <p:sldId id="301" r:id="rId9"/>
+    <p:sldId id="300" r:id="rId10"/>
+    <p:sldId id="303" r:id="rId11"/>
+    <p:sldId id="263" r:id="rId12"/>
+    <p:sldId id="302" r:id="rId13"/>
   </p:sldIdLst>
   <p:sldSz cx="9144000" cy="5143500" type="screen16x9"/>
   <p:notesSz cx="6858000" cy="9144000"/>
   <p:embeddedFontLst>
     <p:embeddedFont>
       <p:font typeface="Fira Code" charset="0"/>
-      <p:regular r:id="rId11"/>
-      <p:bold r:id="rId12"/>
+      <p:regular r:id="rId15"/>
+      <p:bold r:id="rId16"/>
     </p:embeddedFont>
   </p:embeddedFontLst>
   <p:defaultTextStyle>
@@ -803,6 +807,318 @@
 </p:notes>
 </file>
 
+<file path=ppt/notesSlides/notesSlide10.xml><?xml version="1.0" encoding="utf-8"?>
+<p:notes xmlns:a="http://schemas.openxmlformats.org/drawingml/2006/main" xmlns:r="http://schemas.openxmlformats.org/officeDocument/2006/relationships" xmlns:p="http://schemas.openxmlformats.org/presentationml/2006/main" showMasterSp="0" showMasterPhAnim="0">
+  <p:cSld>
+    <p:spTree>
+      <p:nvGrpSpPr>
+        <p:cNvPr id="1" name="Shape 848"/>
+        <p:cNvGrpSpPr/>
+        <p:nvPr/>
+      </p:nvGrpSpPr>
+      <p:grpSpPr>
+        <a:xfrm>
+          <a:off x="0" y="0"/>
+          <a:ext cx="0" cy="0"/>
+          <a:chOff x="0" y="0"/>
+          <a:chExt cx="0" cy="0"/>
+        </a:xfrm>
+      </p:grpSpPr>
+      <p:sp>
+        <p:nvSpPr>
+          <p:cNvPr id="849" name="Google Shape;849;ge7f9c668d6_0_1028:notes"/>
+          <p:cNvSpPr>
+            <a:spLocks noGrp="1" noRot="1" noChangeAspect="1"/>
+          </p:cNvSpPr>
+          <p:nvPr>
+            <p:ph type="sldImg" idx="2"/>
+          </p:nvPr>
+        </p:nvSpPr>
+        <p:spPr>
+          <a:xfrm>
+            <a:off x="381000" y="685800"/>
+            <a:ext cx="6096000" cy="3429000"/>
+          </a:xfrm>
+          <a:custGeom>
+            <a:avLst/>
+            <a:gdLst/>
+            <a:ahLst/>
+            <a:cxnLst/>
+            <a:rect l="l" t="t" r="r" b="b"/>
+            <a:pathLst>
+              <a:path w="120000" h="120000" extrusionOk="0">
+                <a:moveTo>
+                  <a:pt x="0" y="0"/>
+                </a:moveTo>
+                <a:lnTo>
+                  <a:pt x="120000" y="0"/>
+                </a:lnTo>
+                <a:lnTo>
+                  <a:pt x="120000" y="120000"/>
+                </a:lnTo>
+                <a:lnTo>
+                  <a:pt x="0" y="120000"/>
+                </a:lnTo>
+                <a:close/>
+              </a:path>
+            </a:pathLst>
+          </a:custGeom>
+        </p:spPr>
+      </p:sp>
+      <p:sp>
+        <p:nvSpPr>
+          <p:cNvPr id="850" name="Google Shape;850;ge7f9c668d6_0_1028:notes"/>
+          <p:cNvSpPr txBox="1">
+            <a:spLocks noGrp="1"/>
+          </p:cNvSpPr>
+          <p:nvPr>
+            <p:ph type="body" idx="1"/>
+          </p:nvPr>
+        </p:nvSpPr>
+        <p:spPr>
+          <a:xfrm>
+            <a:off x="685800" y="4343400"/>
+            <a:ext cx="5486400" cy="4114800"/>
+          </a:xfrm>
+          <a:prstGeom prst="rect">
+            <a:avLst/>
+          </a:prstGeom>
+        </p:spPr>
+        <p:txBody>
+          <a:bodyPr spcFirstLastPara="1" wrap="square" lIns="91425" tIns="91425" rIns="91425" bIns="91425" anchor="t" anchorCtr="0">
+            <a:noAutofit/>
+          </a:bodyPr>
+          <a:lstStyle/>
+          <a:p>
+            <a:pPr marL="0" lvl="0" indent="0" algn="l" rtl="0">
+              <a:spcBef>
+                <a:spcPts val="0"/>
+              </a:spcBef>
+              <a:spcAft>
+                <a:spcPts val="0"/>
+              </a:spcAft>
+              <a:buNone/>
+            </a:pPr>
+            <a:endParaRPr/>
+          </a:p>
+        </p:txBody>
+      </p:sp>
+    </p:spTree>
+  </p:cSld>
+  <p:clrMapOvr>
+    <a:masterClrMapping/>
+  </p:clrMapOvr>
+</p:notes>
+</file>
+
+<file path=ppt/notesSlides/notesSlide11.xml><?xml version="1.0" encoding="utf-8"?>
+<p:notes xmlns:a="http://schemas.openxmlformats.org/drawingml/2006/main" xmlns:r="http://schemas.openxmlformats.org/officeDocument/2006/relationships" xmlns:p="http://schemas.openxmlformats.org/presentationml/2006/main" showMasterSp="0" showMasterPhAnim="0">
+  <p:cSld>
+    <p:spTree>
+      <p:nvGrpSpPr>
+        <p:cNvPr id="1" name="Shape 630"/>
+        <p:cNvGrpSpPr/>
+        <p:nvPr/>
+      </p:nvGrpSpPr>
+      <p:grpSpPr>
+        <a:xfrm>
+          <a:off x="0" y="0"/>
+          <a:ext cx="0" cy="0"/>
+          <a:chOff x="0" y="0"/>
+          <a:chExt cx="0" cy="0"/>
+        </a:xfrm>
+      </p:grpSpPr>
+      <p:sp>
+        <p:nvSpPr>
+          <p:cNvPr id="631" name="Google Shape;631;ge7f9c668d6_0_28:notes"/>
+          <p:cNvSpPr>
+            <a:spLocks noGrp="1" noRot="1" noChangeAspect="1"/>
+          </p:cNvSpPr>
+          <p:nvPr>
+            <p:ph type="sldImg" idx="2"/>
+          </p:nvPr>
+        </p:nvSpPr>
+        <p:spPr>
+          <a:xfrm>
+            <a:off x="381000" y="685800"/>
+            <a:ext cx="6096000" cy="3429000"/>
+          </a:xfrm>
+          <a:custGeom>
+            <a:avLst/>
+            <a:gdLst/>
+            <a:ahLst/>
+            <a:cxnLst/>
+            <a:rect l="l" t="t" r="r" b="b"/>
+            <a:pathLst>
+              <a:path w="120000" h="120000" extrusionOk="0">
+                <a:moveTo>
+                  <a:pt x="0" y="0"/>
+                </a:moveTo>
+                <a:lnTo>
+                  <a:pt x="120000" y="0"/>
+                </a:lnTo>
+                <a:lnTo>
+                  <a:pt x="120000" y="120000"/>
+                </a:lnTo>
+                <a:lnTo>
+                  <a:pt x="0" y="120000"/>
+                </a:lnTo>
+                <a:close/>
+              </a:path>
+            </a:pathLst>
+          </a:custGeom>
+        </p:spPr>
+      </p:sp>
+      <p:sp>
+        <p:nvSpPr>
+          <p:cNvPr id="632" name="Google Shape;632;ge7f9c668d6_0_28:notes"/>
+          <p:cNvSpPr txBox="1">
+            <a:spLocks noGrp="1"/>
+          </p:cNvSpPr>
+          <p:nvPr>
+            <p:ph type="body" idx="1"/>
+          </p:nvPr>
+        </p:nvSpPr>
+        <p:spPr>
+          <a:xfrm>
+            <a:off x="685800" y="4343400"/>
+            <a:ext cx="5486400" cy="4114800"/>
+          </a:xfrm>
+          <a:prstGeom prst="rect">
+            <a:avLst/>
+          </a:prstGeom>
+        </p:spPr>
+        <p:txBody>
+          <a:bodyPr spcFirstLastPara="1" wrap="square" lIns="91425" tIns="91425" rIns="91425" bIns="91425" anchor="t" anchorCtr="0">
+            <a:noAutofit/>
+          </a:bodyPr>
+          <a:lstStyle/>
+          <a:p>
+            <a:pPr marL="0" lvl="0" indent="0" algn="l" rtl="0">
+              <a:spcBef>
+                <a:spcPts val="0"/>
+              </a:spcBef>
+              <a:spcAft>
+                <a:spcPts val="0"/>
+              </a:spcAft>
+              <a:buNone/>
+            </a:pPr>
+            <a:endParaRPr/>
+          </a:p>
+        </p:txBody>
+      </p:sp>
+    </p:spTree>
+  </p:cSld>
+  <p:clrMapOvr>
+    <a:masterClrMapping/>
+  </p:clrMapOvr>
+</p:notes>
+</file>
+
+<file path=ppt/notesSlides/notesSlide12.xml><?xml version="1.0" encoding="utf-8"?>
+<p:notes xmlns:a="http://schemas.openxmlformats.org/drawingml/2006/main" xmlns:r="http://schemas.openxmlformats.org/officeDocument/2006/relationships" xmlns:p="http://schemas.openxmlformats.org/presentationml/2006/main" showMasterSp="0" showMasterPhAnim="0">
+  <p:cSld>
+    <p:spTree>
+      <p:nvGrpSpPr>
+        <p:cNvPr id="1" name="Shape 2540"/>
+        <p:cNvGrpSpPr/>
+        <p:nvPr/>
+      </p:nvGrpSpPr>
+      <p:grpSpPr>
+        <a:xfrm>
+          <a:off x="0" y="0"/>
+          <a:ext cx="0" cy="0"/>
+          <a:chOff x="0" y="0"/>
+          <a:chExt cx="0" cy="0"/>
+        </a:xfrm>
+      </p:grpSpPr>
+      <p:sp>
+        <p:nvSpPr>
+          <p:cNvPr id="2541" name="Google Shape;2541;ge7b3cc9d39_0_15:notes"/>
+          <p:cNvSpPr>
+            <a:spLocks noGrp="1" noRot="1" noChangeAspect="1"/>
+          </p:cNvSpPr>
+          <p:nvPr>
+            <p:ph type="sldImg" idx="2"/>
+          </p:nvPr>
+        </p:nvSpPr>
+        <p:spPr>
+          <a:xfrm>
+            <a:off x="381000" y="685800"/>
+            <a:ext cx="6096000" cy="3429000"/>
+          </a:xfrm>
+          <a:custGeom>
+            <a:avLst/>
+            <a:gdLst/>
+            <a:ahLst/>
+            <a:cxnLst/>
+            <a:rect l="l" t="t" r="r" b="b"/>
+            <a:pathLst>
+              <a:path w="120000" h="120000" extrusionOk="0">
+                <a:moveTo>
+                  <a:pt x="0" y="0"/>
+                </a:moveTo>
+                <a:lnTo>
+                  <a:pt x="120000" y="0"/>
+                </a:lnTo>
+                <a:lnTo>
+                  <a:pt x="120000" y="120000"/>
+                </a:lnTo>
+                <a:lnTo>
+                  <a:pt x="0" y="120000"/>
+                </a:lnTo>
+                <a:close/>
+              </a:path>
+            </a:pathLst>
+          </a:custGeom>
+        </p:spPr>
+      </p:sp>
+      <p:sp>
+        <p:nvSpPr>
+          <p:cNvPr id="2542" name="Google Shape;2542;ge7b3cc9d39_0_15:notes"/>
+          <p:cNvSpPr txBox="1">
+            <a:spLocks noGrp="1"/>
+          </p:cNvSpPr>
+          <p:nvPr>
+            <p:ph type="body" idx="1"/>
+          </p:nvPr>
+        </p:nvSpPr>
+        <p:spPr>
+          <a:xfrm>
+            <a:off x="685800" y="4343400"/>
+            <a:ext cx="5486400" cy="4114800"/>
+          </a:xfrm>
+          <a:prstGeom prst="rect">
+            <a:avLst/>
+          </a:prstGeom>
+        </p:spPr>
+        <p:txBody>
+          <a:bodyPr spcFirstLastPara="1" wrap="square" lIns="91425" tIns="91425" rIns="91425" bIns="91425" anchor="t" anchorCtr="0">
+            <a:noAutofit/>
+          </a:bodyPr>
+          <a:lstStyle/>
+          <a:p>
+            <a:pPr marL="0" lvl="0" indent="0" algn="l" rtl="0">
+              <a:spcBef>
+                <a:spcPts val="0"/>
+              </a:spcBef>
+              <a:spcAft>
+                <a:spcPts val="0"/>
+              </a:spcAft>
+              <a:buNone/>
+            </a:pPr>
+            <a:endParaRPr/>
+          </a:p>
+        </p:txBody>
+      </p:sp>
+    </p:spTree>
+  </p:cSld>
+  <p:clrMapOvr>
+    <a:masterClrMapping/>
+  </p:clrMapOvr>
+</p:notes>
+</file>
+
 <file path=ppt/notesSlides/notesSlide2.xml><?xml version="1.0" encoding="utf-8"?>
 <p:notes xmlns:a="http://schemas.openxmlformats.org/drawingml/2006/main" xmlns:r="http://schemas.openxmlformats.org/officeDocument/2006/relationships" xmlns:p="http://schemas.openxmlformats.org/presentationml/2006/main" showMasterSp="0" showMasterPhAnim="0">
   <p:cSld>
@@ -1120,6 +1436,110 @@
   <p:cSld>
     <p:spTree>
       <p:nvGrpSpPr>
+        <p:cNvPr id="1" name="Shape 848"/>
+        <p:cNvGrpSpPr/>
+        <p:nvPr/>
+      </p:nvGrpSpPr>
+      <p:grpSpPr>
+        <a:xfrm>
+          <a:off x="0" y="0"/>
+          <a:ext cx="0" cy="0"/>
+          <a:chOff x="0" y="0"/>
+          <a:chExt cx="0" cy="0"/>
+        </a:xfrm>
+      </p:grpSpPr>
+      <p:sp>
+        <p:nvSpPr>
+          <p:cNvPr id="849" name="Google Shape;849;ge7f9c668d6_0_1028:notes"/>
+          <p:cNvSpPr>
+            <a:spLocks noGrp="1" noRot="1" noChangeAspect="1"/>
+          </p:cNvSpPr>
+          <p:nvPr>
+            <p:ph type="sldImg" idx="2"/>
+          </p:nvPr>
+        </p:nvSpPr>
+        <p:spPr>
+          <a:xfrm>
+            <a:off x="381000" y="685800"/>
+            <a:ext cx="6096000" cy="3429000"/>
+          </a:xfrm>
+          <a:custGeom>
+            <a:avLst/>
+            <a:gdLst/>
+            <a:ahLst/>
+            <a:cxnLst/>
+            <a:rect l="l" t="t" r="r" b="b"/>
+            <a:pathLst>
+              <a:path w="120000" h="120000" extrusionOk="0">
+                <a:moveTo>
+                  <a:pt x="0" y="0"/>
+                </a:moveTo>
+                <a:lnTo>
+                  <a:pt x="120000" y="0"/>
+                </a:lnTo>
+                <a:lnTo>
+                  <a:pt x="120000" y="120000"/>
+                </a:lnTo>
+                <a:lnTo>
+                  <a:pt x="0" y="120000"/>
+                </a:lnTo>
+                <a:close/>
+              </a:path>
+            </a:pathLst>
+          </a:custGeom>
+        </p:spPr>
+      </p:sp>
+      <p:sp>
+        <p:nvSpPr>
+          <p:cNvPr id="850" name="Google Shape;850;ge7f9c668d6_0_1028:notes"/>
+          <p:cNvSpPr txBox="1">
+            <a:spLocks noGrp="1"/>
+          </p:cNvSpPr>
+          <p:nvPr>
+            <p:ph type="body" idx="1"/>
+          </p:nvPr>
+        </p:nvSpPr>
+        <p:spPr>
+          <a:xfrm>
+            <a:off x="685800" y="4343400"/>
+            <a:ext cx="5486400" cy="4114800"/>
+          </a:xfrm>
+          <a:prstGeom prst="rect">
+            <a:avLst/>
+          </a:prstGeom>
+        </p:spPr>
+        <p:txBody>
+          <a:bodyPr spcFirstLastPara="1" wrap="square" lIns="91425" tIns="91425" rIns="91425" bIns="91425" anchor="t" anchorCtr="0">
+            <a:noAutofit/>
+          </a:bodyPr>
+          <a:lstStyle/>
+          <a:p>
+            <a:pPr marL="0" lvl="0" indent="0" algn="l" rtl="0">
+              <a:spcBef>
+                <a:spcPts val="0"/>
+              </a:spcBef>
+              <a:spcAft>
+                <a:spcPts val="0"/>
+              </a:spcAft>
+              <a:buNone/>
+            </a:pPr>
+            <a:endParaRPr/>
+          </a:p>
+        </p:txBody>
+      </p:sp>
+    </p:spTree>
+  </p:cSld>
+  <p:clrMapOvr>
+    <a:masterClrMapping/>
+  </p:clrMapOvr>
+</p:notes>
+</file>
+
+<file path=ppt/notesSlides/notesSlide6.xml><?xml version="1.0" encoding="utf-8"?>
+<p:notes xmlns:a="http://schemas.openxmlformats.org/drawingml/2006/main" xmlns:r="http://schemas.openxmlformats.org/officeDocument/2006/relationships" xmlns:p="http://schemas.openxmlformats.org/presentationml/2006/main" showMasterSp="0" showMasterPhAnim="0">
+  <p:cSld>
+    <p:spTree>
+      <p:nvGrpSpPr>
         <p:cNvPr id="1" name="Shape 454"/>
         <p:cNvGrpSpPr/>
         <p:nvPr/>
@@ -1219,12 +1639,12 @@
 </p:notes>
 </file>
 
-<file path=ppt/notesSlides/notesSlide6.xml><?xml version="1.0" encoding="utf-8"?>
+<file path=ppt/notesSlides/notesSlide7.xml><?xml version="1.0" encoding="utf-8"?>
 <p:notes xmlns:a="http://schemas.openxmlformats.org/drawingml/2006/main" xmlns:r="http://schemas.openxmlformats.org/officeDocument/2006/relationships" xmlns:p="http://schemas.openxmlformats.org/presentationml/2006/main" showMasterSp="0" showMasterPhAnim="0">
   <p:cSld>
     <p:spTree>
       <p:nvGrpSpPr>
-        <p:cNvPr id="1" name="Shape 848"/>
+        <p:cNvPr id="1" name="Shape 454"/>
         <p:cNvGrpSpPr/>
         <p:nvPr/>
       </p:nvGrpSpPr>
@@ -1238,7 +1658,7 @@
       </p:grpSpPr>
       <p:sp>
         <p:nvSpPr>
-          <p:cNvPr id="849" name="Google Shape;849;ge7f9c668d6_0_1028:notes"/>
+          <p:cNvPr id="455" name="Google Shape;455;ge7b5133482_0_0:notes"/>
           <p:cNvSpPr>
             <a:spLocks noGrp="1" noRot="1" noChangeAspect="1"/>
           </p:cNvSpPr>
@@ -1279,7 +1699,7 @@
       </p:sp>
       <p:sp>
         <p:nvSpPr>
-          <p:cNvPr id="850" name="Google Shape;850;ge7f9c668d6_0_1028:notes"/>
+          <p:cNvPr id="456" name="Google Shape;456;ge7b5133482_0_0:notes"/>
           <p:cNvSpPr txBox="1">
             <a:spLocks noGrp="1"/>
           </p:cNvSpPr>
@@ -1323,12 +1743,12 @@
 </p:notes>
 </file>
 
-<file path=ppt/notesSlides/notesSlide7.xml><?xml version="1.0" encoding="utf-8"?>
+<file path=ppt/notesSlides/notesSlide8.xml><?xml version="1.0" encoding="utf-8"?>
 <p:notes xmlns:a="http://schemas.openxmlformats.org/drawingml/2006/main" xmlns:r="http://schemas.openxmlformats.org/officeDocument/2006/relationships" xmlns:p="http://schemas.openxmlformats.org/presentationml/2006/main" showMasterSp="0" showMasterPhAnim="0">
   <p:cSld>
     <p:spTree>
       <p:nvGrpSpPr>
-        <p:cNvPr id="1" name="Shape 630"/>
+        <p:cNvPr id="1" name="Shape 454"/>
         <p:cNvGrpSpPr/>
         <p:nvPr/>
       </p:nvGrpSpPr>
@@ -1342,7 +1762,7 @@
       </p:grpSpPr>
       <p:sp>
         <p:nvSpPr>
-          <p:cNvPr id="631" name="Google Shape;631;ge7f9c668d6_0_28:notes"/>
+          <p:cNvPr id="455" name="Google Shape;455;ge7b5133482_0_0:notes"/>
           <p:cNvSpPr>
             <a:spLocks noGrp="1" noRot="1" noChangeAspect="1"/>
           </p:cNvSpPr>
@@ -1383,7 +1803,7 @@
       </p:sp>
       <p:sp>
         <p:nvSpPr>
-          <p:cNvPr id="632" name="Google Shape;632;ge7f9c668d6_0_28:notes"/>
+          <p:cNvPr id="456" name="Google Shape;456;ge7b5133482_0_0:notes"/>
           <p:cNvSpPr txBox="1">
             <a:spLocks noGrp="1"/>
           </p:cNvSpPr>
@@ -1427,12 +1847,12 @@
 </p:notes>
 </file>
 
-<file path=ppt/notesSlides/notesSlide8.xml><?xml version="1.0" encoding="utf-8"?>
+<file path=ppt/notesSlides/notesSlide9.xml><?xml version="1.0" encoding="utf-8"?>
 <p:notes xmlns:a="http://schemas.openxmlformats.org/drawingml/2006/main" xmlns:r="http://schemas.openxmlformats.org/officeDocument/2006/relationships" xmlns:p="http://schemas.openxmlformats.org/presentationml/2006/main" showMasterSp="0" showMasterPhAnim="0">
   <p:cSld>
     <p:spTree>
       <p:nvGrpSpPr>
-        <p:cNvPr id="1" name="Shape 2540"/>
+        <p:cNvPr id="1" name="Shape 454"/>
         <p:cNvGrpSpPr/>
         <p:nvPr/>
       </p:nvGrpSpPr>
@@ -1446,7 +1866,7 @@
       </p:grpSpPr>
       <p:sp>
         <p:nvSpPr>
-          <p:cNvPr id="2541" name="Google Shape;2541;ge7b3cc9d39_0_15:notes"/>
+          <p:cNvPr id="455" name="Google Shape;455;ge7b5133482_0_0:notes"/>
           <p:cNvSpPr>
             <a:spLocks noGrp="1" noRot="1" noChangeAspect="1"/>
           </p:cNvSpPr>
@@ -1487,7 +1907,7 @@
       </p:sp>
       <p:sp>
         <p:nvSpPr>
-          <p:cNvPr id="2542" name="Google Shape;2542;ge7b3cc9d39_0_15:notes"/>
+          <p:cNvPr id="456" name="Google Shape;456;ge7b5133482_0_0:notes"/>
           <p:cNvSpPr txBox="1">
             <a:spLocks noGrp="1"/>
           </p:cNvSpPr>
@@ -11507,7 +11927,7 @@
                 <a:hlinkClick r:id="rId2">
                   <a:extLst>
                     <a:ext uri="{A12FA001-AC4F-418D-AE19-62706E023703}">
-                      <ahyp:hlinkClr xmlns="" xmlns:mc="http://schemas.openxmlformats.org/markup-compatibility/2006" xmlns:mv="urn:schemas-microsoft-com:mac:vml" xmlns:c="http://schemas.openxmlformats.org/drawingml/2006/chart" xmlns:dgm="http://schemas.openxmlformats.org/drawingml/2006/diagram" xmlns:o="urn:schemas-microsoft-com:office:office" xmlns:v="urn:schemas-microsoft-com:vml" xmlns:pvml="urn:schemas-microsoft-com:office:powerpoint" xmlns:com="http://schemas.openxmlformats.org/drawingml/2006/compatibility" xmlns:p14="http://schemas.microsoft.com/office/powerpoint/2010/main" xmlns:p15="http://schemas.microsoft.com/office/powerpoint/2012/main" xmlns:ahyp="http://schemas.microsoft.com/office/drawing/2018/hyperlinkcolor" val="tx"/>
+                      <ahyp:hlinkClr xmlns:ahyp="http://schemas.microsoft.com/office/drawing/2018/hyperlinkcolor" xmlns:p15="http://schemas.microsoft.com/office/powerpoint/2012/main" xmlns:p14="http://schemas.microsoft.com/office/powerpoint/2010/main" xmlns:com="http://schemas.openxmlformats.org/drawingml/2006/compatibility" xmlns:pvml="urn:schemas-microsoft-com:office:powerpoint" xmlns:v="urn:schemas-microsoft-com:vml" xmlns:o="urn:schemas-microsoft-com:office:office" xmlns:dgm="http://schemas.openxmlformats.org/drawingml/2006/diagram" xmlns:c="http://schemas.openxmlformats.org/drawingml/2006/chart" xmlns:mv="urn:schemas-microsoft-com:mac:vml" xmlns:mc="http://schemas.openxmlformats.org/markup-compatibility/2006" xmlns="" val="tx"/>
                     </a:ext>
                   </a:extLst>
                 </a:hlinkClick>
@@ -11541,7 +11961,7 @@
                 <a:hlinkClick r:id="rId3">
                   <a:extLst>
                     <a:ext uri="{A12FA001-AC4F-418D-AE19-62706E023703}">
-                      <ahyp:hlinkClr xmlns="" xmlns:mc="http://schemas.openxmlformats.org/markup-compatibility/2006" xmlns:mv="urn:schemas-microsoft-com:mac:vml" xmlns:c="http://schemas.openxmlformats.org/drawingml/2006/chart" xmlns:dgm="http://schemas.openxmlformats.org/drawingml/2006/diagram" xmlns:o="urn:schemas-microsoft-com:office:office" xmlns:v="urn:schemas-microsoft-com:vml" xmlns:pvml="urn:schemas-microsoft-com:office:powerpoint" xmlns:com="http://schemas.openxmlformats.org/drawingml/2006/compatibility" xmlns:p14="http://schemas.microsoft.com/office/powerpoint/2010/main" xmlns:p15="http://schemas.microsoft.com/office/powerpoint/2012/main" xmlns:ahyp="http://schemas.microsoft.com/office/drawing/2018/hyperlinkcolor" val="tx"/>
+                      <ahyp:hlinkClr xmlns:ahyp="http://schemas.microsoft.com/office/drawing/2018/hyperlinkcolor" xmlns:p15="http://schemas.microsoft.com/office/powerpoint/2012/main" xmlns:p14="http://schemas.microsoft.com/office/powerpoint/2010/main" xmlns:com="http://schemas.openxmlformats.org/drawingml/2006/compatibility" xmlns:pvml="urn:schemas-microsoft-com:office:powerpoint" xmlns:v="urn:schemas-microsoft-com:vml" xmlns:o="urn:schemas-microsoft-com:office:office" xmlns:dgm="http://schemas.openxmlformats.org/drawingml/2006/diagram" xmlns:c="http://schemas.openxmlformats.org/drawingml/2006/chart" xmlns:mv="urn:schemas-microsoft-com:mac:vml" xmlns:mc="http://schemas.openxmlformats.org/markup-compatibility/2006" xmlns="" val="tx"/>
                     </a:ext>
                   </a:extLst>
                 </a:hlinkClick>
@@ -11575,7 +11995,7 @@
                 <a:hlinkClick r:id="rId4">
                   <a:extLst>
                     <a:ext uri="{A12FA001-AC4F-418D-AE19-62706E023703}">
-                      <ahyp:hlinkClr xmlns="" xmlns:mc="http://schemas.openxmlformats.org/markup-compatibility/2006" xmlns:mv="urn:schemas-microsoft-com:mac:vml" xmlns:c="http://schemas.openxmlformats.org/drawingml/2006/chart" xmlns:dgm="http://schemas.openxmlformats.org/drawingml/2006/diagram" xmlns:o="urn:schemas-microsoft-com:office:office" xmlns:v="urn:schemas-microsoft-com:vml" xmlns:pvml="urn:schemas-microsoft-com:office:powerpoint" xmlns:com="http://schemas.openxmlformats.org/drawingml/2006/compatibility" xmlns:p14="http://schemas.microsoft.com/office/powerpoint/2010/main" xmlns:p15="http://schemas.microsoft.com/office/powerpoint/2012/main" xmlns:ahyp="http://schemas.microsoft.com/office/drawing/2018/hyperlinkcolor" val="tx"/>
+                      <ahyp:hlinkClr xmlns:ahyp="http://schemas.microsoft.com/office/drawing/2018/hyperlinkcolor" xmlns:p15="http://schemas.microsoft.com/office/powerpoint/2012/main" xmlns:p14="http://schemas.microsoft.com/office/powerpoint/2010/main" xmlns:com="http://schemas.openxmlformats.org/drawingml/2006/compatibility" xmlns:pvml="urn:schemas-microsoft-com:office:powerpoint" xmlns:v="urn:schemas-microsoft-com:vml" xmlns:o="urn:schemas-microsoft-com:office:office" xmlns:dgm="http://schemas.openxmlformats.org/drawingml/2006/diagram" xmlns:c="http://schemas.openxmlformats.org/drawingml/2006/chart" xmlns:mv="urn:schemas-microsoft-com:mac:vml" xmlns:mc="http://schemas.openxmlformats.org/markup-compatibility/2006" xmlns="" val="tx"/>
                     </a:ext>
                   </a:extLst>
                 </a:hlinkClick>
@@ -14861,3895 +15281,7 @@
 </p:sld>
 </file>
 
-<file path=ppt/slides/slide2.xml><?xml version="1.0" encoding="utf-8"?>
-<p:sld xmlns:a="http://schemas.openxmlformats.org/drawingml/2006/main" xmlns:r="http://schemas.openxmlformats.org/officeDocument/2006/relationships" xmlns:p="http://schemas.openxmlformats.org/presentationml/2006/main">
-  <p:cSld>
-    <p:spTree>
-      <p:nvGrpSpPr>
-        <p:cNvPr id="1" name="Shape 470"/>
-        <p:cNvGrpSpPr/>
-        <p:nvPr/>
-      </p:nvGrpSpPr>
-      <p:grpSpPr>
-        <a:xfrm>
-          <a:off x="0" y="0"/>
-          <a:ext cx="0" cy="0"/>
-          <a:chOff x="0" y="0"/>
-          <a:chExt cx="0" cy="0"/>
-        </a:xfrm>
-      </p:grpSpPr>
-      <p:sp>
-        <p:nvSpPr>
-          <p:cNvPr id="471" name="Google Shape;471;p28"/>
-          <p:cNvSpPr txBox="1">
-            <a:spLocks noGrp="1"/>
-          </p:cNvSpPr>
-          <p:nvPr>
-            <p:ph type="title"/>
-          </p:nvPr>
-        </p:nvSpPr>
-        <p:spPr>
-          <a:xfrm>
-            <a:off x="1143250" y="582700"/>
-            <a:ext cx="7290600" cy="541200"/>
-          </a:xfrm>
-          <a:prstGeom prst="rect">
-            <a:avLst/>
-          </a:prstGeom>
-        </p:spPr>
-        <p:txBody>
-          <a:bodyPr spcFirstLastPara="1" wrap="square" lIns="91425" tIns="91425" rIns="91425" bIns="91425" anchor="t" anchorCtr="0">
-            <a:noAutofit/>
-          </a:bodyPr>
-          <a:lstStyle/>
-          <a:p>
-            <a:pPr marL="0" lvl="0" indent="0" algn="l" rtl="0">
-              <a:spcBef>
-                <a:spcPts val="0"/>
-              </a:spcBef>
-              <a:spcAft>
-                <a:spcPts val="0"/>
-              </a:spcAft>
-              <a:buNone/>
-            </a:pPr>
-            <a:r>
-              <a:rPr lang="ru-RU" dirty="0" smtClean="0"/>
-              <a:t>Цели и задачи проекта</a:t>
-            </a:r>
-            <a:endParaRPr dirty="0">
-              <a:solidFill>
-                <a:schemeClr val="accent2"/>
-              </a:solidFill>
-            </a:endParaRPr>
-          </a:p>
-        </p:txBody>
-      </p:sp>
-      <p:sp>
-        <p:nvSpPr>
-          <p:cNvPr id="472" name="Google Shape;472;p28"/>
-          <p:cNvSpPr txBox="1">
-            <a:spLocks noGrp="1"/>
-          </p:cNvSpPr>
-          <p:nvPr>
-            <p:ph type="body" idx="1"/>
-          </p:nvPr>
-        </p:nvSpPr>
-        <p:spPr>
-          <a:xfrm>
-            <a:off x="1464250" y="1063175"/>
-            <a:ext cx="6969600" cy="3416400"/>
-          </a:xfrm>
-          <a:prstGeom prst="rect">
-            <a:avLst/>
-          </a:prstGeom>
-        </p:spPr>
-        <p:txBody>
-          <a:bodyPr spcFirstLastPara="1" wrap="square" lIns="91425" tIns="91425" rIns="91425" bIns="91425" anchor="ctr" anchorCtr="0">
-            <a:noAutofit/>
-          </a:bodyPr>
-          <a:lstStyle/>
-          <a:p>
-            <a:pPr marL="0" indent="0">
-              <a:buNone/>
-            </a:pPr>
-            <a:r>
-              <a:rPr lang="ru-RU" sz="1400" dirty="0" smtClean="0">
-                <a:solidFill>
-                  <a:schemeClr val="accent3"/>
-                </a:solidFill>
-              </a:rPr>
-              <a:t>Цель: разработать приложение </a:t>
-            </a:r>
-            <a:r>
-              <a:rPr lang="ru-RU" sz="1400" smtClean="0">
-                <a:solidFill>
-                  <a:schemeClr val="accent3"/>
-                </a:solidFill>
-              </a:rPr>
-              <a:t>используя </a:t>
-            </a:r>
-            <a:r>
-              <a:rPr lang="ru-RU" sz="1400" b="1" smtClean="0">
-                <a:solidFill>
-                  <a:srgbClr val="FF5858"/>
-                </a:solidFill>
-              </a:rPr>
-              <a:t>указатели</a:t>
-            </a:r>
-            <a:r>
-              <a:rPr lang="ru-RU" sz="1400" smtClean="0">
-                <a:solidFill>
-                  <a:schemeClr val="accent3"/>
-                </a:solidFill>
-              </a:rPr>
-              <a:t>, </a:t>
-            </a:r>
-            <a:r>
-              <a:rPr lang="ru-RU" sz="1400" b="1" dirty="0" smtClean="0">
-                <a:solidFill>
-                  <a:srgbClr val="FF5858"/>
-                </a:solidFill>
-              </a:rPr>
-              <a:t>потоки</a:t>
-            </a:r>
-            <a:r>
-              <a:rPr lang="ru-RU" sz="1400" dirty="0" smtClean="0">
-                <a:solidFill>
-                  <a:schemeClr val="accent3"/>
-                </a:solidFill>
-              </a:rPr>
-              <a:t> и </a:t>
-            </a:r>
-            <a:r>
-              <a:rPr lang="ru-RU" sz="1400" b="1" dirty="0" smtClean="0">
-                <a:solidFill>
-                  <a:srgbClr val="FF5858"/>
-                </a:solidFill>
-              </a:rPr>
-              <a:t>сокеты</a:t>
-            </a:r>
-            <a:r>
-              <a:rPr lang="ru-RU" sz="1400" dirty="0" smtClean="0">
-                <a:solidFill>
-                  <a:schemeClr val="accent3"/>
-                </a:solidFill>
-              </a:rPr>
-              <a:t>.</a:t>
-            </a:r>
-          </a:p>
-          <a:p>
-            <a:pPr marL="0" lvl="0" indent="0" algn="l" rtl="0">
-              <a:spcBef>
-                <a:spcPts val="0"/>
-              </a:spcBef>
-              <a:spcAft>
-                <a:spcPts val="0"/>
-              </a:spcAft>
-              <a:buNone/>
-            </a:pPr>
-            <a:r>
-              <a:rPr lang="ru-RU" sz="1400" dirty="0" smtClean="0">
-                <a:solidFill>
-                  <a:schemeClr val="accent3"/>
-                </a:solidFill>
-              </a:rPr>
-              <a:t>Задачи</a:t>
-            </a:r>
-            <a:r>
-              <a:rPr lang="en" sz="1400" dirty="0" smtClean="0">
-                <a:solidFill>
-                  <a:schemeClr val="accent3"/>
-                </a:solidFill>
-              </a:rPr>
-              <a:t>: </a:t>
-            </a:r>
-            <a:endParaRPr sz="1400" dirty="0">
-              <a:solidFill>
-                <a:schemeClr val="accent3"/>
-              </a:solidFill>
-            </a:endParaRPr>
-          </a:p>
-          <a:p>
-            <a:pPr marL="457200" lvl="0" indent="-292100" algn="l" rtl="0">
-              <a:spcBef>
-                <a:spcPts val="0"/>
-              </a:spcBef>
-              <a:spcAft>
-                <a:spcPts val="0"/>
-              </a:spcAft>
-              <a:buClr>
-                <a:schemeClr val="accent3"/>
-              </a:buClr>
-              <a:buSzPts val="1000"/>
-              <a:buChar char="∗"/>
-            </a:pPr>
-            <a:r>
-              <a:rPr lang="ru-RU" sz="1400" dirty="0" smtClean="0">
-                <a:solidFill>
-                  <a:schemeClr val="accent3"/>
-                </a:solidFill>
-              </a:rPr>
-              <a:t>Изучить работу с </a:t>
-            </a:r>
-            <a:r>
-              <a:rPr lang="ru-RU" sz="1400" b="1" dirty="0" smtClean="0">
-                <a:solidFill>
-                  <a:srgbClr val="FF5858"/>
-                </a:solidFill>
-                <a:uFill>
-                  <a:noFill/>
-                </a:uFill>
-              </a:rPr>
-              <a:t>сокетами</a:t>
-            </a:r>
-            <a:r>
-              <a:rPr lang="en" sz="1400" dirty="0" smtClean="0">
-                <a:solidFill>
-                  <a:schemeClr val="accent3"/>
-                </a:solidFill>
-              </a:rPr>
-              <a:t>.</a:t>
-            </a:r>
-            <a:endParaRPr sz="1400" dirty="0">
-              <a:solidFill>
-                <a:schemeClr val="accent3"/>
-              </a:solidFill>
-            </a:endParaRPr>
-          </a:p>
-          <a:p>
-            <a:pPr marL="457200" lvl="0" indent="-292100" algn="l" rtl="0">
-              <a:spcBef>
-                <a:spcPts val="0"/>
-              </a:spcBef>
-              <a:spcAft>
-                <a:spcPts val="0"/>
-              </a:spcAft>
-              <a:buClr>
-                <a:schemeClr val="accent3"/>
-              </a:buClr>
-              <a:buSzPts val="1000"/>
-              <a:buChar char="∗"/>
-            </a:pPr>
-            <a:r>
-              <a:rPr lang="ru-RU" sz="1400" dirty="0" smtClean="0">
-                <a:solidFill>
-                  <a:schemeClr val="accent3"/>
-                </a:solidFill>
-              </a:rPr>
-              <a:t>Реализовать управление </a:t>
-            </a:r>
-            <a:r>
-              <a:rPr lang="ru-RU" sz="1400" b="1" dirty="0" smtClean="0">
-                <a:solidFill>
-                  <a:srgbClr val="FF5858"/>
-                </a:solidFill>
-              </a:rPr>
-              <a:t>памятью</a:t>
-            </a:r>
-            <a:r>
-              <a:rPr lang="en" sz="1400" dirty="0" smtClean="0">
-                <a:solidFill>
-                  <a:schemeClr val="accent3"/>
-                </a:solidFill>
-              </a:rPr>
-              <a:t>.</a:t>
-            </a:r>
-            <a:endParaRPr sz="1400" dirty="0">
-              <a:solidFill>
-                <a:schemeClr val="accent3"/>
-              </a:solidFill>
-            </a:endParaRPr>
-          </a:p>
-          <a:p>
-            <a:pPr marL="457200" lvl="0" indent="-292100" algn="l" rtl="0">
-              <a:spcBef>
-                <a:spcPts val="0"/>
-              </a:spcBef>
-              <a:spcAft>
-                <a:spcPts val="0"/>
-              </a:spcAft>
-              <a:buClr>
-                <a:schemeClr val="accent3"/>
-              </a:buClr>
-              <a:buSzPts val="1000"/>
-              <a:buChar char="∗"/>
-            </a:pPr>
-            <a:r>
-              <a:rPr lang="ru-RU" sz="1400" dirty="0" smtClean="0">
-                <a:solidFill>
-                  <a:schemeClr val="accent3"/>
-                </a:solidFill>
-              </a:rPr>
-              <a:t>Осуществить работу с </a:t>
-            </a:r>
-            <a:r>
-              <a:rPr lang="ru-RU" sz="1400" b="1" dirty="0" smtClean="0">
-                <a:solidFill>
-                  <a:srgbClr val="FF5858"/>
-                </a:solidFill>
-              </a:rPr>
-              <a:t>указателями</a:t>
-            </a:r>
-            <a:r>
-              <a:rPr lang="ru-RU" sz="1400" dirty="0" smtClean="0">
-                <a:solidFill>
-                  <a:schemeClr val="accent3"/>
-                </a:solidFill>
-              </a:rPr>
-              <a:t>.</a:t>
-            </a:r>
-          </a:p>
-          <a:p>
-            <a:pPr marL="457200" lvl="0" indent="-292100" algn="l" rtl="0">
-              <a:spcBef>
-                <a:spcPts val="0"/>
-              </a:spcBef>
-              <a:spcAft>
-                <a:spcPts val="0"/>
-              </a:spcAft>
-              <a:buClr>
-                <a:schemeClr val="accent3"/>
-              </a:buClr>
-              <a:buSzPts val="1000"/>
-              <a:buChar char="∗"/>
-            </a:pPr>
-            <a:r>
-              <a:rPr lang="ru-RU" sz="1400" dirty="0" smtClean="0">
-                <a:solidFill>
-                  <a:schemeClr val="accent3"/>
-                </a:solidFill>
-              </a:rPr>
-              <a:t>Использовать </a:t>
-            </a:r>
-            <a:r>
-              <a:rPr lang="ru-RU" sz="1400" b="1" dirty="0" smtClean="0">
-                <a:solidFill>
-                  <a:srgbClr val="FF5858"/>
-                </a:solidFill>
-              </a:rPr>
-              <a:t>многопоточность</a:t>
-            </a:r>
-            <a:r>
-              <a:rPr lang="ru-RU" sz="1400" dirty="0" smtClean="0">
-                <a:solidFill>
-                  <a:schemeClr val="accent3"/>
-                </a:solidFill>
-              </a:rPr>
-              <a:t>.</a:t>
-            </a:r>
-            <a:endParaRPr sz="1400" dirty="0">
-              <a:solidFill>
-                <a:schemeClr val="accent3"/>
-              </a:solidFill>
-            </a:endParaRPr>
-          </a:p>
-          <a:p>
-            <a:pPr marL="0" lvl="0" indent="0" algn="l" rtl="0">
-              <a:spcBef>
-                <a:spcPts val="0"/>
-              </a:spcBef>
-              <a:spcAft>
-                <a:spcPts val="0"/>
-              </a:spcAft>
-              <a:buNone/>
-            </a:pPr>
-            <a:r>
-              <a:rPr lang="ru-RU" sz="1400" dirty="0" smtClean="0">
-                <a:solidFill>
-                  <a:schemeClr val="accent3"/>
-                </a:solidFill>
-              </a:rPr>
-              <a:t>Основная цель проекта – не просто написать игру, а понять, как программы общаются друг с другом по сети.</a:t>
-            </a:r>
-            <a:endParaRPr sz="1400" dirty="0">
-              <a:solidFill>
-                <a:schemeClr val="accent3"/>
-              </a:solidFill>
-            </a:endParaRPr>
-          </a:p>
-        </p:txBody>
-      </p:sp>
-      <p:sp>
-        <p:nvSpPr>
-          <p:cNvPr id="474" name="Google Shape;474;p28"/>
-          <p:cNvSpPr txBox="1">
-            <a:spLocks noGrp="1"/>
-          </p:cNvSpPr>
-          <p:nvPr>
-            <p:ph type="subTitle" idx="4294967295"/>
-          </p:nvPr>
-        </p:nvSpPr>
-        <p:spPr>
-          <a:xfrm>
-            <a:off x="-5975" y="91525"/>
-            <a:ext cx="4572000" cy="357300"/>
-          </a:xfrm>
-          <a:prstGeom prst="rect">
-            <a:avLst/>
-          </a:prstGeom>
-        </p:spPr>
-        <p:txBody>
-          <a:bodyPr spcFirstLastPara="1" wrap="square" lIns="91425" tIns="91425" rIns="91425" bIns="91425" anchor="ctr" anchorCtr="0">
-            <a:noAutofit/>
-          </a:bodyPr>
-          <a:lstStyle/>
-          <a:p>
-            <a:pPr marL="0" lvl="0" indent="0" algn="ctr" rtl="0">
-              <a:spcBef>
-                <a:spcPts val="0"/>
-              </a:spcBef>
-              <a:spcAft>
-                <a:spcPts val="0"/>
-              </a:spcAft>
-              <a:buNone/>
-            </a:pPr>
-            <a:r>
-              <a:rPr lang="en" sz="1400" dirty="0" smtClean="0">
-                <a:solidFill>
-                  <a:schemeClr val="accent3"/>
-                </a:solidFill>
-              </a:rPr>
-              <a:t>server.cpp</a:t>
-            </a:r>
-            <a:endParaRPr sz="1400" dirty="0">
-              <a:solidFill>
-                <a:schemeClr val="accent3"/>
-              </a:solidFill>
-            </a:endParaRPr>
-          </a:p>
-        </p:txBody>
-      </p:sp>
-      <p:sp>
-        <p:nvSpPr>
-          <p:cNvPr id="475" name="Google Shape;475;p28"/>
-          <p:cNvSpPr txBox="1">
-            <a:spLocks noGrp="1"/>
-          </p:cNvSpPr>
-          <p:nvPr>
-            <p:ph type="subTitle" idx="4294967295"/>
-          </p:nvPr>
-        </p:nvSpPr>
-        <p:spPr>
-          <a:xfrm>
-            <a:off x="4572000" y="91525"/>
-            <a:ext cx="4572000" cy="357300"/>
-          </a:xfrm>
-          <a:prstGeom prst="rect">
-            <a:avLst/>
-          </a:prstGeom>
-        </p:spPr>
-        <p:txBody>
-          <a:bodyPr spcFirstLastPara="1" wrap="square" lIns="91425" tIns="91425" rIns="91425" bIns="91425" anchor="ctr" anchorCtr="0">
-            <a:noAutofit/>
-          </a:bodyPr>
-          <a:lstStyle/>
-          <a:p>
-            <a:pPr marL="0" lvl="0" indent="0" algn="ctr" rtl="0">
-              <a:spcBef>
-                <a:spcPts val="0"/>
-              </a:spcBef>
-              <a:spcAft>
-                <a:spcPts val="0"/>
-              </a:spcAft>
-              <a:buNone/>
-            </a:pPr>
-            <a:r>
-              <a:rPr lang="en" sz="1400" dirty="0" smtClean="0">
-                <a:solidFill>
-                  <a:schemeClr val="accent3"/>
-                </a:solidFill>
-              </a:rPr>
-              <a:t>client.cpp</a:t>
-            </a:r>
-            <a:endParaRPr sz="1400" dirty="0">
-              <a:solidFill>
-                <a:schemeClr val="accent3"/>
-              </a:solidFill>
-            </a:endParaRPr>
-          </a:p>
-        </p:txBody>
-      </p:sp>
-    </p:spTree>
-  </p:cSld>
-  <p:clrMapOvr>
-    <a:masterClrMapping/>
-  </p:clrMapOvr>
-  <p:transition>
-    <p:split/>
-  </p:transition>
-  <p:timing>
-    <p:tnLst>
-      <p:par>
-        <p:cTn id="1" dur="indefinite" restart="never" nodeType="tmRoot"/>
-      </p:par>
-    </p:tnLst>
-  </p:timing>
-</p:sld>
-</file>
-
-<file path=ppt/slides/slide3.xml><?xml version="1.0" encoding="utf-8"?>
-<p:sld xmlns:a="http://schemas.openxmlformats.org/drawingml/2006/main" xmlns:r="http://schemas.openxmlformats.org/officeDocument/2006/relationships" xmlns:p="http://schemas.openxmlformats.org/presentationml/2006/main">
-  <p:cSld>
-    <p:spTree>
-      <p:nvGrpSpPr>
-        <p:cNvPr id="1" name="Shape 781"/>
-        <p:cNvGrpSpPr/>
-        <p:nvPr/>
-      </p:nvGrpSpPr>
-      <p:grpSpPr>
-        <a:xfrm>
-          <a:off x="0" y="0"/>
-          <a:ext cx="0" cy="0"/>
-          <a:chOff x="0" y="0"/>
-          <a:chExt cx="0" cy="0"/>
-        </a:xfrm>
-      </p:grpSpPr>
-      <p:sp>
-        <p:nvSpPr>
-          <p:cNvPr id="782" name="Google Shape;782;p37"/>
-          <p:cNvSpPr txBox="1">
-            <a:spLocks noGrp="1"/>
-          </p:cNvSpPr>
-          <p:nvPr>
-            <p:ph type="body" idx="1"/>
-          </p:nvPr>
-        </p:nvSpPr>
-        <p:spPr>
-          <a:xfrm>
-            <a:off x="3306200" y="2227588"/>
-            <a:ext cx="4694400" cy="751800"/>
-          </a:xfrm>
-          <a:prstGeom prst="rect">
-            <a:avLst/>
-          </a:prstGeom>
-        </p:spPr>
-        <p:txBody>
-          <a:bodyPr spcFirstLastPara="1" wrap="square" lIns="91425" tIns="91425" rIns="91425" bIns="91425" anchor="ctr" anchorCtr="0">
-            <a:noAutofit/>
-          </a:bodyPr>
-          <a:lstStyle/>
-          <a:p>
-            <a:pPr marL="341342" lvl="0" indent="-265184" algn="l" rtl="0">
-              <a:spcBef>
-                <a:spcPts val="0"/>
-              </a:spcBef>
-              <a:spcAft>
-                <a:spcPts val="0"/>
-              </a:spcAft>
-              <a:buSzPts val="1200"/>
-              <a:buNone/>
-            </a:pPr>
-            <a:r>
-              <a:rPr lang="en-US" dirty="0" smtClean="0">
-                <a:solidFill>
-                  <a:schemeClr val="accent3"/>
-                </a:solidFill>
-              </a:rPr>
-              <a:t>Server: </a:t>
-            </a:r>
-            <a:r>
-              <a:rPr lang="ru-RU" dirty="0" smtClean="0">
-                <a:solidFill>
-                  <a:schemeClr val="accent3"/>
-                </a:solidFill>
-              </a:rPr>
-              <a:t>генерирует число, хранит состояние игры, обрабатывает запросы клиентов</a:t>
-            </a:r>
-            <a:endParaRPr dirty="0">
-              <a:solidFill>
-                <a:schemeClr val="accent3"/>
-              </a:solidFill>
-            </a:endParaRPr>
-          </a:p>
-        </p:txBody>
-      </p:sp>
-      <p:sp>
-        <p:nvSpPr>
-          <p:cNvPr id="783" name="Google Shape;783;p37"/>
-          <p:cNvSpPr txBox="1">
-            <a:spLocks noGrp="1"/>
-          </p:cNvSpPr>
-          <p:nvPr>
-            <p:ph type="title"/>
-          </p:nvPr>
-        </p:nvSpPr>
-        <p:spPr>
-          <a:xfrm>
-            <a:off x="1143250" y="582700"/>
-            <a:ext cx="7290600" cy="541200"/>
-          </a:xfrm>
-          <a:prstGeom prst="rect">
-            <a:avLst/>
-          </a:prstGeom>
-        </p:spPr>
-        <p:txBody>
-          <a:bodyPr spcFirstLastPara="1" wrap="square" lIns="91425" tIns="91425" rIns="91425" bIns="91425" anchor="t" anchorCtr="0">
-            <a:noAutofit/>
-          </a:bodyPr>
-          <a:lstStyle/>
-          <a:p>
-            <a:pPr marL="0" lvl="0" indent="0" algn="l" rtl="0">
-              <a:spcBef>
-                <a:spcPts val="0"/>
-              </a:spcBef>
-              <a:spcAft>
-                <a:spcPts val="0"/>
-              </a:spcAft>
-              <a:buNone/>
-            </a:pPr>
-            <a:r>
-              <a:rPr lang="ru-RU" dirty="0" smtClean="0"/>
-              <a:t>Архитектура приложения </a:t>
-            </a:r>
-            <a:r>
-              <a:rPr lang="en" dirty="0" smtClean="0">
-                <a:solidFill>
-                  <a:schemeClr val="accent6"/>
-                </a:solidFill>
-              </a:rPr>
-              <a:t>{</a:t>
-            </a:r>
-            <a:endParaRPr dirty="0">
-              <a:solidFill>
-                <a:schemeClr val="accent6"/>
-              </a:solidFill>
-            </a:endParaRPr>
-          </a:p>
-        </p:txBody>
-      </p:sp>
-      <p:sp>
-        <p:nvSpPr>
-          <p:cNvPr id="784" name="Google Shape;784;p37"/>
-          <p:cNvSpPr txBox="1">
-            <a:spLocks noGrp="1"/>
-          </p:cNvSpPr>
-          <p:nvPr>
-            <p:ph type="title" idx="2"/>
-          </p:nvPr>
-        </p:nvSpPr>
-        <p:spPr>
-          <a:xfrm flipH="1">
-            <a:off x="2091200" y="2372263"/>
-            <a:ext cx="1215000" cy="462300"/>
-          </a:xfrm>
-          <a:prstGeom prst="rect">
-            <a:avLst/>
-          </a:prstGeom>
-        </p:spPr>
-        <p:txBody>
-          <a:bodyPr spcFirstLastPara="1" wrap="square" lIns="91425" tIns="91425" rIns="91425" bIns="91425" anchor="ctr" anchorCtr="0">
-            <a:noAutofit/>
-          </a:bodyPr>
-          <a:lstStyle/>
-          <a:p>
-            <a:pPr marL="0" lvl="0" indent="0" algn="l" rtl="0">
-              <a:spcBef>
-                <a:spcPts val="0"/>
-              </a:spcBef>
-              <a:spcAft>
-                <a:spcPts val="0"/>
-              </a:spcAft>
-              <a:buNone/>
-            </a:pPr>
-            <a:r>
-              <a:rPr lang="en"/>
-              <a:t>&lt; /1 &gt;</a:t>
-            </a:r>
-            <a:endParaRPr/>
-          </a:p>
-        </p:txBody>
-      </p:sp>
-      <p:sp>
-        <p:nvSpPr>
-          <p:cNvPr id="785" name="Google Shape;785;p37"/>
-          <p:cNvSpPr txBox="1">
-            <a:spLocks noGrp="1"/>
-          </p:cNvSpPr>
-          <p:nvPr>
-            <p:ph type="body" idx="3"/>
-          </p:nvPr>
-        </p:nvSpPr>
-        <p:spPr>
-          <a:xfrm>
-            <a:off x="3739600" y="3164425"/>
-            <a:ext cx="4694400" cy="751800"/>
-          </a:xfrm>
-          <a:prstGeom prst="rect">
-            <a:avLst/>
-          </a:prstGeom>
-        </p:spPr>
-        <p:txBody>
-          <a:bodyPr spcFirstLastPara="1" wrap="square" lIns="91425" tIns="91425" rIns="91425" bIns="91425" anchor="ctr" anchorCtr="0">
-            <a:noAutofit/>
-          </a:bodyPr>
-          <a:lstStyle/>
-          <a:p>
-            <a:pPr marL="341342" lvl="0" indent="-265184" algn="l" rtl="0">
-              <a:spcBef>
-                <a:spcPts val="0"/>
-              </a:spcBef>
-              <a:spcAft>
-                <a:spcPts val="0"/>
-              </a:spcAft>
-              <a:buSzPts val="1200"/>
-              <a:buNone/>
-            </a:pPr>
-            <a:r>
-              <a:rPr lang="en-US" dirty="0" smtClean="0">
-                <a:solidFill>
-                  <a:schemeClr val="accent3"/>
-                </a:solidFill>
-              </a:rPr>
-              <a:t>Client: </a:t>
-            </a:r>
-            <a:r>
-              <a:rPr lang="ru-RU" dirty="0" smtClean="0">
-                <a:solidFill>
-                  <a:schemeClr val="accent3"/>
-                </a:solidFill>
-              </a:rPr>
-              <a:t>отправляет предположения и получает подсказки (</a:t>
-            </a:r>
-            <a:r>
-              <a:rPr lang="en-US" dirty="0" smtClean="0">
-                <a:solidFill>
-                  <a:schemeClr val="accent3"/>
-                </a:solidFill>
-              </a:rPr>
-              <a:t>“</a:t>
-            </a:r>
-            <a:r>
-              <a:rPr lang="ru-RU" dirty="0" smtClean="0">
-                <a:solidFill>
-                  <a:schemeClr val="accent3"/>
-                </a:solidFill>
-              </a:rPr>
-              <a:t>Больше</a:t>
-            </a:r>
-            <a:r>
-              <a:rPr lang="en-US" dirty="0" smtClean="0">
-                <a:solidFill>
-                  <a:schemeClr val="accent3"/>
-                </a:solidFill>
-              </a:rPr>
-              <a:t>”, “</a:t>
-            </a:r>
-            <a:r>
-              <a:rPr lang="ru-RU" dirty="0" smtClean="0">
-                <a:solidFill>
-                  <a:schemeClr val="accent3"/>
-                </a:solidFill>
-              </a:rPr>
-              <a:t>Меньше</a:t>
-            </a:r>
-            <a:r>
-              <a:rPr lang="en-US" dirty="0" smtClean="0">
-                <a:solidFill>
-                  <a:schemeClr val="accent3"/>
-                </a:solidFill>
-              </a:rPr>
-              <a:t>”, “</a:t>
-            </a:r>
-            <a:r>
-              <a:rPr lang="ru-RU" dirty="0" smtClean="0">
-                <a:solidFill>
-                  <a:schemeClr val="accent3"/>
-                </a:solidFill>
-              </a:rPr>
-              <a:t>Победа</a:t>
-            </a:r>
-            <a:r>
-              <a:rPr lang="en-US" dirty="0" smtClean="0">
-                <a:solidFill>
-                  <a:schemeClr val="accent3"/>
-                </a:solidFill>
-              </a:rPr>
-              <a:t>”) </a:t>
-            </a:r>
-            <a:endParaRPr dirty="0">
-              <a:solidFill>
-                <a:schemeClr val="accent3"/>
-              </a:solidFill>
-            </a:endParaRPr>
-          </a:p>
-        </p:txBody>
-      </p:sp>
-      <p:sp>
-        <p:nvSpPr>
-          <p:cNvPr id="786" name="Google Shape;786;p37"/>
-          <p:cNvSpPr txBox="1">
-            <a:spLocks noGrp="1"/>
-          </p:cNvSpPr>
-          <p:nvPr>
-            <p:ph type="title" idx="4"/>
-          </p:nvPr>
-        </p:nvSpPr>
-        <p:spPr>
-          <a:xfrm flipH="1">
-            <a:off x="2524600" y="3309175"/>
-            <a:ext cx="1215000" cy="462300"/>
-          </a:xfrm>
-          <a:prstGeom prst="rect">
-            <a:avLst/>
-          </a:prstGeom>
-        </p:spPr>
-        <p:txBody>
-          <a:bodyPr spcFirstLastPara="1" wrap="square" lIns="91425" tIns="91425" rIns="91425" bIns="91425" anchor="ctr" anchorCtr="0">
-            <a:noAutofit/>
-          </a:bodyPr>
-          <a:lstStyle/>
-          <a:p>
-            <a:pPr marL="0" lvl="0" indent="0" algn="l" rtl="0">
-              <a:spcBef>
-                <a:spcPts val="0"/>
-              </a:spcBef>
-              <a:spcAft>
-                <a:spcPts val="0"/>
-              </a:spcAft>
-              <a:buNone/>
-            </a:pPr>
-            <a:r>
-              <a:rPr lang="en"/>
-              <a:t>&lt; /2 &gt;</a:t>
-            </a:r>
-            <a:endParaRPr/>
-          </a:p>
-        </p:txBody>
-      </p:sp>
-      <p:sp>
-        <p:nvSpPr>
-          <p:cNvPr id="787" name="Google Shape;787;p37"/>
-          <p:cNvSpPr txBox="1">
-            <a:spLocks noGrp="1"/>
-          </p:cNvSpPr>
-          <p:nvPr>
-            <p:ph type="subTitle" idx="5"/>
-          </p:nvPr>
-        </p:nvSpPr>
-        <p:spPr>
-          <a:xfrm>
-            <a:off x="1672200" y="1245150"/>
-            <a:ext cx="5922000" cy="541200"/>
-          </a:xfrm>
-          <a:prstGeom prst="rect">
-            <a:avLst/>
-          </a:prstGeom>
-        </p:spPr>
-        <p:txBody>
-          <a:bodyPr spcFirstLastPara="1" wrap="square" lIns="91425" tIns="91425" rIns="91425" bIns="91425" anchor="ctr" anchorCtr="0">
-            <a:noAutofit/>
-          </a:bodyPr>
-          <a:lstStyle/>
-          <a:p>
-            <a:pPr marL="0" lvl="0" indent="0" algn="l" rtl="0">
-              <a:spcBef>
-                <a:spcPts val="0"/>
-              </a:spcBef>
-              <a:spcAft>
-                <a:spcPts val="0"/>
-              </a:spcAft>
-              <a:buNone/>
-            </a:pPr>
-            <a:r>
-              <a:rPr lang="en" dirty="0"/>
-              <a:t>&lt; </a:t>
-            </a:r>
-            <a:r>
-              <a:rPr lang="ru-RU" dirty="0" smtClean="0"/>
-              <a:t>Модель: </a:t>
-            </a:r>
-            <a:r>
-              <a:rPr lang="en-US" dirty="0" smtClean="0"/>
-              <a:t>Client-Server</a:t>
-            </a:r>
-            <a:r>
-              <a:rPr lang="en" dirty="0" smtClean="0"/>
-              <a:t> </a:t>
-            </a:r>
-            <a:r>
-              <a:rPr lang="en" dirty="0"/>
-              <a:t>&gt;</a:t>
-            </a:r>
-            <a:endParaRPr dirty="0"/>
-          </a:p>
-        </p:txBody>
-      </p:sp>
-      <p:sp>
-        <p:nvSpPr>
-          <p:cNvPr id="789" name="Google Shape;789;p37"/>
-          <p:cNvSpPr txBox="1">
-            <a:spLocks noGrp="1"/>
-          </p:cNvSpPr>
-          <p:nvPr>
-            <p:ph type="subTitle" idx="5"/>
-          </p:nvPr>
-        </p:nvSpPr>
-        <p:spPr>
-          <a:xfrm>
-            <a:off x="-5975" y="91525"/>
-            <a:ext cx="4572000" cy="357300"/>
-          </a:xfrm>
-          <a:prstGeom prst="rect">
-            <a:avLst/>
-          </a:prstGeom>
-        </p:spPr>
-        <p:txBody>
-          <a:bodyPr spcFirstLastPara="1" wrap="square" lIns="91425" tIns="91425" rIns="91425" bIns="91425" anchor="ctr" anchorCtr="0">
-            <a:noAutofit/>
-          </a:bodyPr>
-          <a:lstStyle/>
-          <a:p>
-            <a:pPr marL="0" lvl="0" indent="0" algn="ctr" rtl="0">
-              <a:spcBef>
-                <a:spcPts val="0"/>
-              </a:spcBef>
-              <a:spcAft>
-                <a:spcPts val="0"/>
-              </a:spcAft>
-              <a:buNone/>
-            </a:pPr>
-            <a:r>
-              <a:rPr lang="en" sz="1400" dirty="0" smtClean="0">
-                <a:solidFill>
-                  <a:schemeClr val="accent3"/>
-                </a:solidFill>
-              </a:rPr>
-              <a:t>server.cpp</a:t>
-            </a:r>
-            <a:endParaRPr sz="1400" dirty="0">
-              <a:solidFill>
-                <a:schemeClr val="accent3"/>
-              </a:solidFill>
-            </a:endParaRPr>
-          </a:p>
-        </p:txBody>
-      </p:sp>
-      <p:sp>
-        <p:nvSpPr>
-          <p:cNvPr id="790" name="Google Shape;790;p37"/>
-          <p:cNvSpPr txBox="1">
-            <a:spLocks noGrp="1"/>
-          </p:cNvSpPr>
-          <p:nvPr>
-            <p:ph type="subTitle" idx="5"/>
-          </p:nvPr>
-        </p:nvSpPr>
-        <p:spPr>
-          <a:xfrm>
-            <a:off x="4572000" y="91525"/>
-            <a:ext cx="4572000" cy="357300"/>
-          </a:xfrm>
-          <a:prstGeom prst="rect">
-            <a:avLst/>
-          </a:prstGeom>
-        </p:spPr>
-        <p:txBody>
-          <a:bodyPr spcFirstLastPara="1" wrap="square" lIns="91425" tIns="91425" rIns="91425" bIns="91425" anchor="ctr" anchorCtr="0">
-            <a:noAutofit/>
-          </a:bodyPr>
-          <a:lstStyle/>
-          <a:p>
-            <a:pPr marL="0" lvl="0" indent="0" algn="ctr" rtl="0">
-              <a:spcBef>
-                <a:spcPts val="0"/>
-              </a:spcBef>
-              <a:spcAft>
-                <a:spcPts val="0"/>
-              </a:spcAft>
-              <a:buNone/>
-            </a:pPr>
-            <a:r>
-              <a:rPr lang="en" sz="1400" dirty="0" smtClean="0">
-                <a:solidFill>
-                  <a:schemeClr val="accent3"/>
-                </a:solidFill>
-              </a:rPr>
-              <a:t>client.cpp</a:t>
-            </a:r>
-            <a:endParaRPr sz="1400" dirty="0">
-              <a:solidFill>
-                <a:schemeClr val="accent3"/>
-              </a:solidFill>
-            </a:endParaRPr>
-          </a:p>
-        </p:txBody>
-      </p:sp>
-      <p:grpSp>
-        <p:nvGrpSpPr>
-          <p:cNvPr id="791" name="Google Shape;791;p37"/>
-          <p:cNvGrpSpPr/>
-          <p:nvPr/>
-        </p:nvGrpSpPr>
-        <p:grpSpPr>
-          <a:xfrm>
-            <a:off x="1084825" y="1152525"/>
-            <a:ext cx="506100" cy="3417500"/>
-            <a:chOff x="1084825" y="1152525"/>
-            <a:chExt cx="506100" cy="3417500"/>
-          </a:xfrm>
-        </p:grpSpPr>
-        <p:sp>
-          <p:nvSpPr>
-            <p:cNvPr id="792" name="Google Shape;792;p37"/>
-            <p:cNvSpPr txBox="1"/>
-            <p:nvPr/>
-          </p:nvSpPr>
-          <p:spPr>
-            <a:xfrm>
-              <a:off x="1084825" y="3954425"/>
-              <a:ext cx="506100" cy="615600"/>
-            </a:xfrm>
-            <a:prstGeom prst="rect">
-              <a:avLst/>
-            </a:prstGeom>
-            <a:noFill/>
-            <a:ln>
-              <a:noFill/>
-            </a:ln>
-          </p:spPr>
-          <p:txBody>
-            <a:bodyPr spcFirstLastPara="1" wrap="square" lIns="91425" tIns="91425" rIns="91425" bIns="91425" anchor="t" anchorCtr="0">
-              <a:spAutoFit/>
-            </a:bodyPr>
-            <a:lstStyle/>
-            <a:p>
-              <a:pPr marL="0" lvl="0" indent="0" algn="ctr" rtl="0">
-                <a:spcBef>
-                  <a:spcPts val="0"/>
-                </a:spcBef>
-                <a:spcAft>
-                  <a:spcPts val="0"/>
-                </a:spcAft>
-                <a:buNone/>
-              </a:pPr>
-              <a:r>
-                <a:rPr lang="en" sz="2800">
-                  <a:solidFill>
-                    <a:schemeClr val="accent6"/>
-                  </a:solidFill>
-                  <a:latin typeface="Fira Code"/>
-                  <a:ea typeface="Fira Code"/>
-                  <a:cs typeface="Fira Code"/>
-                  <a:sym typeface="Fira Code"/>
-                </a:rPr>
-                <a:t>}</a:t>
-              </a:r>
-              <a:endParaRPr sz="2800">
-                <a:solidFill>
-                  <a:schemeClr val="accent6"/>
-                </a:solidFill>
-                <a:latin typeface="Fira Code"/>
-                <a:ea typeface="Fira Code"/>
-                <a:cs typeface="Fira Code"/>
-                <a:sym typeface="Fira Code"/>
-              </a:endParaRPr>
-            </a:p>
-          </p:txBody>
-        </p:sp>
-        <p:cxnSp>
-          <p:nvCxnSpPr>
-            <p:cNvPr id="793" name="Google Shape;793;p37"/>
-            <p:cNvCxnSpPr/>
-            <p:nvPr/>
-          </p:nvCxnSpPr>
-          <p:spPr>
-            <a:xfrm>
-              <a:off x="1337875" y="1152525"/>
-              <a:ext cx="0" cy="2781000"/>
-            </a:xfrm>
-            <a:prstGeom prst="straightConnector1">
-              <a:avLst/>
-            </a:prstGeom>
-            <a:noFill/>
-            <a:ln w="9525" cap="flat" cmpd="sng">
-              <a:solidFill>
-                <a:schemeClr val="accent4"/>
-              </a:solidFill>
-              <a:prstDash val="solid"/>
-              <a:round/>
-              <a:headEnd type="none" w="med" len="med"/>
-              <a:tailEnd type="none" w="med" len="med"/>
-            </a:ln>
-          </p:spPr>
-        </p:cxnSp>
-      </p:grpSp>
-      <p:grpSp>
-        <p:nvGrpSpPr>
-          <p:cNvPr id="15" name="Google Shape;11405;p63"/>
-          <p:cNvGrpSpPr/>
-          <p:nvPr/>
-        </p:nvGrpSpPr>
-        <p:grpSpPr>
-          <a:xfrm>
-            <a:off x="7812361" y="699542"/>
-            <a:ext cx="720080" cy="648072"/>
-            <a:chOff x="1958520" y="2302574"/>
-            <a:chExt cx="359213" cy="327807"/>
-          </a:xfrm>
-        </p:grpSpPr>
-        <p:sp>
-          <p:nvSpPr>
-            <p:cNvPr id="16" name="Google Shape;11406;p63"/>
-            <p:cNvSpPr/>
-            <p:nvPr/>
-          </p:nvSpPr>
-          <p:spPr>
-            <a:xfrm>
-              <a:off x="1958520" y="2302574"/>
-              <a:ext cx="359213" cy="327807"/>
-            </a:xfrm>
-            <a:custGeom>
-              <a:avLst/>
-              <a:gdLst/>
-              <a:ahLst/>
-              <a:cxnLst/>
-              <a:rect l="l" t="t" r="r" b="b"/>
-              <a:pathLst>
-                <a:path w="11312" h="10323" extrusionOk="0">
-                  <a:moveTo>
-                    <a:pt x="7168" y="8132"/>
-                  </a:moveTo>
-                  <a:lnTo>
-                    <a:pt x="7501" y="9204"/>
-                  </a:lnTo>
-                  <a:lnTo>
-                    <a:pt x="3799" y="9204"/>
-                  </a:lnTo>
-                  <a:lnTo>
-                    <a:pt x="4120" y="8132"/>
-                  </a:lnTo>
-                  <a:close/>
-                  <a:moveTo>
-                    <a:pt x="8466" y="9537"/>
-                  </a:moveTo>
-                  <a:cubicBezTo>
-                    <a:pt x="8597" y="9537"/>
-                    <a:pt x="8704" y="9656"/>
-                    <a:pt x="8704" y="9775"/>
-                  </a:cubicBezTo>
-                  <a:cubicBezTo>
-                    <a:pt x="8704" y="9906"/>
-                    <a:pt x="8597" y="10013"/>
-                    <a:pt x="8466" y="10013"/>
-                  </a:cubicBezTo>
-                  <a:lnTo>
-                    <a:pt x="2810" y="10013"/>
-                  </a:lnTo>
-                  <a:cubicBezTo>
-                    <a:pt x="2679" y="10013"/>
-                    <a:pt x="2572" y="9906"/>
-                    <a:pt x="2572" y="9775"/>
-                  </a:cubicBezTo>
-                  <a:cubicBezTo>
-                    <a:pt x="2572" y="9644"/>
-                    <a:pt x="2679" y="9537"/>
-                    <a:pt x="2810" y="9537"/>
-                  </a:cubicBezTo>
-                  <a:close/>
-                  <a:moveTo>
-                    <a:pt x="1072" y="0"/>
-                  </a:moveTo>
-                  <a:cubicBezTo>
-                    <a:pt x="477" y="0"/>
-                    <a:pt x="0" y="476"/>
-                    <a:pt x="0" y="1072"/>
-                  </a:cubicBezTo>
-                  <a:lnTo>
-                    <a:pt x="0" y="7049"/>
-                  </a:lnTo>
-                  <a:cubicBezTo>
-                    <a:pt x="0" y="7644"/>
-                    <a:pt x="477" y="8120"/>
-                    <a:pt x="1072" y="8120"/>
-                  </a:cubicBezTo>
-                  <a:lnTo>
-                    <a:pt x="3763" y="8120"/>
-                  </a:lnTo>
-                  <a:lnTo>
-                    <a:pt x="3441" y="9192"/>
-                  </a:lnTo>
-                  <a:lnTo>
-                    <a:pt x="2822" y="9192"/>
-                  </a:lnTo>
-                  <a:cubicBezTo>
-                    <a:pt x="2513" y="9192"/>
-                    <a:pt x="2263" y="9442"/>
-                    <a:pt x="2263" y="9751"/>
-                  </a:cubicBezTo>
-                  <a:cubicBezTo>
-                    <a:pt x="2263" y="10073"/>
-                    <a:pt x="2513" y="10323"/>
-                    <a:pt x="2822" y="10323"/>
-                  </a:cubicBezTo>
-                  <a:lnTo>
-                    <a:pt x="8478" y="10323"/>
-                  </a:lnTo>
-                  <a:cubicBezTo>
-                    <a:pt x="8799" y="10323"/>
-                    <a:pt x="9049" y="10073"/>
-                    <a:pt x="9049" y="9751"/>
-                  </a:cubicBezTo>
-                  <a:cubicBezTo>
-                    <a:pt x="9049" y="9442"/>
-                    <a:pt x="8799" y="9192"/>
-                    <a:pt x="8478" y="9192"/>
-                  </a:cubicBezTo>
-                  <a:lnTo>
-                    <a:pt x="7870" y="9192"/>
-                  </a:lnTo>
-                  <a:lnTo>
-                    <a:pt x="7549" y="8120"/>
-                  </a:lnTo>
-                  <a:lnTo>
-                    <a:pt x="10240" y="8120"/>
-                  </a:lnTo>
-                  <a:cubicBezTo>
-                    <a:pt x="10835" y="8120"/>
-                    <a:pt x="11311" y="7644"/>
-                    <a:pt x="11311" y="7049"/>
-                  </a:cubicBezTo>
-                  <a:lnTo>
-                    <a:pt x="11311" y="1072"/>
-                  </a:lnTo>
-                  <a:cubicBezTo>
-                    <a:pt x="11299" y="488"/>
-                    <a:pt x="10823" y="0"/>
-                    <a:pt x="10228" y="0"/>
-                  </a:cubicBezTo>
-                  <a:lnTo>
-                    <a:pt x="2786" y="0"/>
-                  </a:lnTo>
-                  <a:cubicBezTo>
-                    <a:pt x="2691" y="0"/>
-                    <a:pt x="2620" y="72"/>
-                    <a:pt x="2620" y="155"/>
-                  </a:cubicBezTo>
-                  <a:cubicBezTo>
-                    <a:pt x="2620" y="250"/>
-                    <a:pt x="2691" y="322"/>
-                    <a:pt x="2786" y="322"/>
-                  </a:cubicBezTo>
-                  <a:lnTo>
-                    <a:pt x="10228" y="322"/>
-                  </a:lnTo>
-                  <a:cubicBezTo>
-                    <a:pt x="10621" y="322"/>
-                    <a:pt x="10966" y="655"/>
-                    <a:pt x="10966" y="1072"/>
-                  </a:cubicBezTo>
-                  <a:lnTo>
-                    <a:pt x="10966" y="7049"/>
-                  </a:lnTo>
-                  <a:cubicBezTo>
-                    <a:pt x="10966" y="7453"/>
-                    <a:pt x="10645" y="7799"/>
-                    <a:pt x="10228" y="7799"/>
-                  </a:cubicBezTo>
-                  <a:lnTo>
-                    <a:pt x="1072" y="7799"/>
-                  </a:lnTo>
-                  <a:cubicBezTo>
-                    <a:pt x="667" y="7799"/>
-                    <a:pt x="322" y="7465"/>
-                    <a:pt x="322" y="7049"/>
-                  </a:cubicBezTo>
-                  <a:lnTo>
-                    <a:pt x="322" y="1072"/>
-                  </a:lnTo>
-                  <a:cubicBezTo>
-                    <a:pt x="322" y="667"/>
-                    <a:pt x="655" y="322"/>
-                    <a:pt x="1072" y="322"/>
-                  </a:cubicBezTo>
-                  <a:lnTo>
-                    <a:pt x="2108" y="322"/>
-                  </a:lnTo>
-                  <a:cubicBezTo>
-                    <a:pt x="2203" y="322"/>
-                    <a:pt x="2275" y="250"/>
-                    <a:pt x="2275" y="155"/>
-                  </a:cubicBezTo>
-                  <a:cubicBezTo>
-                    <a:pt x="2275" y="72"/>
-                    <a:pt x="2203" y="0"/>
-                    <a:pt x="2108" y="0"/>
-                  </a:cubicBezTo>
-                  <a:close/>
-                </a:path>
-              </a:pathLst>
-            </a:custGeom>
-            <a:solidFill>
-              <a:srgbClr val="657E93"/>
-            </a:solidFill>
-            <a:ln>
-              <a:noFill/>
-            </a:ln>
-          </p:spPr>
-          <p:txBody>
-            <a:bodyPr spcFirstLastPara="1" wrap="square" lIns="91425" tIns="91425" rIns="91425" bIns="91425" anchor="ctr" anchorCtr="0">
-              <a:noAutofit/>
-            </a:bodyPr>
-            <a:lstStyle/>
-            <a:p>
-              <a:pPr marL="0" lvl="0" indent="0" algn="l" rtl="0">
-                <a:spcBef>
-                  <a:spcPts val="0"/>
-                </a:spcBef>
-                <a:spcAft>
-                  <a:spcPts val="0"/>
-                </a:spcAft>
-                <a:buNone/>
-              </a:pPr>
-              <a:endParaRPr/>
-            </a:p>
-          </p:txBody>
-        </p:sp>
-        <p:sp>
-          <p:nvSpPr>
-            <p:cNvPr id="17" name="Google Shape;11407;p63"/>
-            <p:cNvSpPr/>
-            <p:nvPr/>
-          </p:nvSpPr>
-          <p:spPr>
-            <a:xfrm>
-              <a:off x="1986877" y="2331313"/>
-              <a:ext cx="302117" cy="184909"/>
-            </a:xfrm>
-            <a:custGeom>
-              <a:avLst/>
-              <a:gdLst/>
-              <a:ahLst/>
-              <a:cxnLst/>
-              <a:rect l="l" t="t" r="r" b="b"/>
-              <a:pathLst>
-                <a:path w="9514" h="5823" extrusionOk="0">
-                  <a:moveTo>
-                    <a:pt x="179" y="0"/>
-                  </a:moveTo>
-                  <a:cubicBezTo>
-                    <a:pt x="72" y="0"/>
-                    <a:pt x="0" y="71"/>
-                    <a:pt x="0" y="179"/>
-                  </a:cubicBezTo>
-                  <a:lnTo>
-                    <a:pt x="0" y="5656"/>
-                  </a:lnTo>
-                  <a:cubicBezTo>
-                    <a:pt x="0" y="5739"/>
-                    <a:pt x="72" y="5822"/>
-                    <a:pt x="167" y="5822"/>
-                  </a:cubicBezTo>
-                  <a:lnTo>
-                    <a:pt x="9347" y="5822"/>
-                  </a:lnTo>
-                  <a:cubicBezTo>
-                    <a:pt x="9430" y="5822"/>
-                    <a:pt x="9513" y="5739"/>
-                    <a:pt x="9513" y="5656"/>
-                  </a:cubicBezTo>
-                  <a:lnTo>
-                    <a:pt x="9513" y="5072"/>
-                  </a:lnTo>
-                  <a:cubicBezTo>
-                    <a:pt x="9513" y="4989"/>
-                    <a:pt x="9430" y="4905"/>
-                    <a:pt x="9347" y="4905"/>
-                  </a:cubicBezTo>
-                  <a:cubicBezTo>
-                    <a:pt x="9252" y="4905"/>
-                    <a:pt x="9180" y="4989"/>
-                    <a:pt x="9180" y="5072"/>
-                  </a:cubicBezTo>
-                  <a:lnTo>
-                    <a:pt x="9180" y="5489"/>
-                  </a:lnTo>
-                  <a:lnTo>
-                    <a:pt x="346" y="5489"/>
-                  </a:lnTo>
-                  <a:lnTo>
-                    <a:pt x="346" y="345"/>
-                  </a:lnTo>
-                  <a:lnTo>
-                    <a:pt x="9180" y="345"/>
-                  </a:lnTo>
-                  <a:lnTo>
-                    <a:pt x="9180" y="4405"/>
-                  </a:lnTo>
-                  <a:cubicBezTo>
-                    <a:pt x="9168" y="4489"/>
-                    <a:pt x="9240" y="4572"/>
-                    <a:pt x="9347" y="4572"/>
-                  </a:cubicBezTo>
-                  <a:cubicBezTo>
-                    <a:pt x="9430" y="4572"/>
-                    <a:pt x="9513" y="4489"/>
-                    <a:pt x="9513" y="4405"/>
-                  </a:cubicBezTo>
-                  <a:lnTo>
-                    <a:pt x="9513" y="179"/>
-                  </a:lnTo>
-                  <a:cubicBezTo>
-                    <a:pt x="9513" y="71"/>
-                    <a:pt x="9430" y="0"/>
-                    <a:pt x="9335" y="0"/>
-                  </a:cubicBezTo>
-                  <a:close/>
-                </a:path>
-              </a:pathLst>
-            </a:custGeom>
-            <a:solidFill>
-              <a:srgbClr val="657E93"/>
-            </a:solidFill>
-            <a:ln>
-              <a:noFill/>
-            </a:ln>
-          </p:spPr>
-          <p:txBody>
-            <a:bodyPr spcFirstLastPara="1" wrap="square" lIns="91425" tIns="91425" rIns="91425" bIns="91425" anchor="ctr" anchorCtr="0">
-              <a:noAutofit/>
-            </a:bodyPr>
-            <a:lstStyle/>
-            <a:p>
-              <a:pPr marL="0" lvl="0" indent="0" algn="l" rtl="0">
-                <a:spcBef>
-                  <a:spcPts val="0"/>
-                </a:spcBef>
-                <a:spcAft>
-                  <a:spcPts val="0"/>
-                </a:spcAft>
-                <a:buNone/>
-              </a:pPr>
-              <a:endParaRPr/>
-            </a:p>
-          </p:txBody>
-        </p:sp>
-        <p:sp>
-          <p:nvSpPr>
-            <p:cNvPr id="18" name="Google Shape;11408;p63"/>
-            <p:cNvSpPr/>
-            <p:nvPr/>
-          </p:nvSpPr>
-          <p:spPr>
-            <a:xfrm>
-              <a:off x="2131521" y="2526701"/>
-              <a:ext cx="11908" cy="10638"/>
-            </a:xfrm>
-            <a:custGeom>
-              <a:avLst/>
-              <a:gdLst/>
-              <a:ahLst/>
-              <a:cxnLst/>
-              <a:rect l="l" t="t" r="r" b="b"/>
-              <a:pathLst>
-                <a:path w="375" h="335" extrusionOk="0">
-                  <a:moveTo>
-                    <a:pt x="176" y="0"/>
-                  </a:moveTo>
-                  <a:cubicBezTo>
-                    <a:pt x="167" y="0"/>
-                    <a:pt x="158" y="1"/>
-                    <a:pt x="148" y="3"/>
-                  </a:cubicBezTo>
-                  <a:cubicBezTo>
-                    <a:pt x="77" y="26"/>
-                    <a:pt x="17" y="86"/>
-                    <a:pt x="17" y="157"/>
-                  </a:cubicBezTo>
-                  <a:cubicBezTo>
-                    <a:pt x="1" y="258"/>
-                    <a:pt x="95" y="334"/>
-                    <a:pt x="186" y="334"/>
-                  </a:cubicBezTo>
-                  <a:cubicBezTo>
-                    <a:pt x="225" y="334"/>
-                    <a:pt x="263" y="320"/>
-                    <a:pt x="291" y="288"/>
-                  </a:cubicBezTo>
-                  <a:cubicBezTo>
-                    <a:pt x="375" y="229"/>
-                    <a:pt x="375" y="145"/>
-                    <a:pt x="327" y="86"/>
-                  </a:cubicBezTo>
-                  <a:cubicBezTo>
-                    <a:pt x="296" y="34"/>
-                    <a:pt x="238" y="0"/>
-                    <a:pt x="176" y="0"/>
-                  </a:cubicBezTo>
-                  <a:close/>
-                </a:path>
-              </a:pathLst>
-            </a:custGeom>
-            <a:solidFill>
-              <a:srgbClr val="657E93"/>
-            </a:solidFill>
-            <a:ln>
-              <a:noFill/>
-            </a:ln>
-          </p:spPr>
-          <p:txBody>
-            <a:bodyPr spcFirstLastPara="1" wrap="square" lIns="91425" tIns="91425" rIns="91425" bIns="91425" anchor="ctr" anchorCtr="0">
-              <a:noAutofit/>
-            </a:bodyPr>
-            <a:lstStyle/>
-            <a:p>
-              <a:pPr marL="0" lvl="0" indent="0" algn="l" rtl="0">
-                <a:spcBef>
-                  <a:spcPts val="0"/>
-                </a:spcBef>
-                <a:spcAft>
-                  <a:spcPts val="0"/>
-                </a:spcAft>
-                <a:buNone/>
-              </a:pPr>
-              <a:endParaRPr/>
-            </a:p>
-          </p:txBody>
-        </p:sp>
-      </p:grpSp>
-      <p:grpSp>
-        <p:nvGrpSpPr>
-          <p:cNvPr id="19" name="Google Shape;12642;p65"/>
-          <p:cNvGrpSpPr/>
-          <p:nvPr/>
-        </p:nvGrpSpPr>
-        <p:grpSpPr>
-          <a:xfrm>
-            <a:off x="7740352" y="1419622"/>
-            <a:ext cx="860833" cy="936104"/>
-            <a:chOff x="7521454" y="2906139"/>
-            <a:chExt cx="359651" cy="371013"/>
-          </a:xfrm>
-        </p:grpSpPr>
-        <p:sp>
-          <p:nvSpPr>
-            <p:cNvPr id="20" name="Google Shape;12643;p65"/>
-            <p:cNvSpPr/>
-            <p:nvPr/>
-          </p:nvSpPr>
-          <p:spPr>
-            <a:xfrm>
-              <a:off x="7614677" y="3138830"/>
-              <a:ext cx="79983" cy="138322"/>
-            </a:xfrm>
-            <a:custGeom>
-              <a:avLst/>
-              <a:gdLst/>
-              <a:ahLst/>
-              <a:cxnLst/>
-              <a:rect l="l" t="t" r="r" b="b"/>
-              <a:pathLst>
-                <a:path w="2513" h="4346" extrusionOk="0">
-                  <a:moveTo>
-                    <a:pt x="1429" y="345"/>
-                  </a:moveTo>
-                  <a:cubicBezTo>
-                    <a:pt x="1643" y="345"/>
-                    <a:pt x="1798" y="512"/>
-                    <a:pt x="1798" y="715"/>
-                  </a:cubicBezTo>
-                  <a:lnTo>
-                    <a:pt x="1798" y="1084"/>
-                  </a:lnTo>
-                  <a:cubicBezTo>
-                    <a:pt x="1798" y="1405"/>
-                    <a:pt x="1548" y="1655"/>
-                    <a:pt x="1251" y="1655"/>
-                  </a:cubicBezTo>
-                  <a:cubicBezTo>
-                    <a:pt x="941" y="1655"/>
-                    <a:pt x="691" y="1393"/>
-                    <a:pt x="691" y="1084"/>
-                  </a:cubicBezTo>
-                  <a:lnTo>
-                    <a:pt x="691" y="715"/>
-                  </a:lnTo>
-                  <a:cubicBezTo>
-                    <a:pt x="691" y="512"/>
-                    <a:pt x="846" y="345"/>
-                    <a:pt x="1060" y="345"/>
-                  </a:cubicBezTo>
-                  <a:close/>
-                  <a:moveTo>
-                    <a:pt x="1429" y="1988"/>
-                  </a:moveTo>
-                  <a:lnTo>
-                    <a:pt x="1429" y="2072"/>
-                  </a:lnTo>
-                  <a:cubicBezTo>
-                    <a:pt x="1429" y="2131"/>
-                    <a:pt x="1441" y="2191"/>
-                    <a:pt x="1477" y="2250"/>
-                  </a:cubicBezTo>
-                  <a:lnTo>
-                    <a:pt x="1251" y="2489"/>
-                  </a:lnTo>
-                  <a:lnTo>
-                    <a:pt x="1239" y="2489"/>
-                  </a:lnTo>
-                  <a:lnTo>
-                    <a:pt x="1000" y="2250"/>
-                  </a:lnTo>
-                  <a:cubicBezTo>
-                    <a:pt x="1024" y="2191"/>
-                    <a:pt x="1048" y="2131"/>
-                    <a:pt x="1048" y="2072"/>
-                  </a:cubicBezTo>
-                  <a:lnTo>
-                    <a:pt x="1048" y="1988"/>
-                  </a:lnTo>
-                  <a:close/>
-                  <a:moveTo>
-                    <a:pt x="1072" y="0"/>
-                  </a:moveTo>
-                  <a:cubicBezTo>
-                    <a:pt x="667" y="0"/>
-                    <a:pt x="358" y="334"/>
-                    <a:pt x="358" y="715"/>
-                  </a:cubicBezTo>
-                  <a:lnTo>
-                    <a:pt x="358" y="1084"/>
-                  </a:lnTo>
-                  <a:cubicBezTo>
-                    <a:pt x="358" y="1381"/>
-                    <a:pt x="512" y="1655"/>
-                    <a:pt x="727" y="1822"/>
-                  </a:cubicBezTo>
-                  <a:lnTo>
-                    <a:pt x="727" y="2072"/>
-                  </a:lnTo>
-                  <a:lnTo>
-                    <a:pt x="727" y="2084"/>
-                  </a:lnTo>
-                  <a:lnTo>
-                    <a:pt x="298" y="2298"/>
-                  </a:lnTo>
-                  <a:cubicBezTo>
-                    <a:pt x="119" y="2381"/>
-                    <a:pt x="0" y="2572"/>
-                    <a:pt x="0" y="2774"/>
-                  </a:cubicBezTo>
-                  <a:lnTo>
-                    <a:pt x="0" y="4179"/>
-                  </a:lnTo>
-                  <a:cubicBezTo>
-                    <a:pt x="0" y="4274"/>
-                    <a:pt x="72" y="4346"/>
-                    <a:pt x="167" y="4346"/>
-                  </a:cubicBezTo>
-                  <a:cubicBezTo>
-                    <a:pt x="250" y="4346"/>
-                    <a:pt x="322" y="4274"/>
-                    <a:pt x="322" y="4179"/>
-                  </a:cubicBezTo>
-                  <a:lnTo>
-                    <a:pt x="322" y="2774"/>
-                  </a:lnTo>
-                  <a:cubicBezTo>
-                    <a:pt x="322" y="2691"/>
-                    <a:pt x="369" y="2631"/>
-                    <a:pt x="429" y="2596"/>
-                  </a:cubicBezTo>
-                  <a:lnTo>
-                    <a:pt x="727" y="2441"/>
-                  </a:lnTo>
-                  <a:lnTo>
-                    <a:pt x="1000" y="2715"/>
-                  </a:lnTo>
-                  <a:cubicBezTo>
-                    <a:pt x="1072" y="2786"/>
-                    <a:pt x="1155" y="2810"/>
-                    <a:pt x="1251" y="2810"/>
-                  </a:cubicBezTo>
-                  <a:cubicBezTo>
-                    <a:pt x="1334" y="2810"/>
-                    <a:pt x="1429" y="2786"/>
-                    <a:pt x="1501" y="2715"/>
-                  </a:cubicBezTo>
-                  <a:lnTo>
-                    <a:pt x="1774" y="2441"/>
-                  </a:lnTo>
-                  <a:lnTo>
-                    <a:pt x="2072" y="2596"/>
-                  </a:lnTo>
-                  <a:cubicBezTo>
-                    <a:pt x="2132" y="2619"/>
-                    <a:pt x="2179" y="2691"/>
-                    <a:pt x="2179" y="2774"/>
-                  </a:cubicBezTo>
-                  <a:lnTo>
-                    <a:pt x="2179" y="4179"/>
-                  </a:lnTo>
-                  <a:cubicBezTo>
-                    <a:pt x="2179" y="4274"/>
-                    <a:pt x="2251" y="4346"/>
-                    <a:pt x="2334" y="4346"/>
-                  </a:cubicBezTo>
-                  <a:cubicBezTo>
-                    <a:pt x="2429" y="4346"/>
-                    <a:pt x="2501" y="4274"/>
-                    <a:pt x="2501" y="4179"/>
-                  </a:cubicBezTo>
-                  <a:lnTo>
-                    <a:pt x="2501" y="2774"/>
-                  </a:lnTo>
-                  <a:cubicBezTo>
-                    <a:pt x="2513" y="2572"/>
-                    <a:pt x="2394" y="2381"/>
-                    <a:pt x="2215" y="2298"/>
-                  </a:cubicBezTo>
-                  <a:lnTo>
-                    <a:pt x="1786" y="2084"/>
-                  </a:lnTo>
-                  <a:lnTo>
-                    <a:pt x="1786" y="2072"/>
-                  </a:lnTo>
-                  <a:lnTo>
-                    <a:pt x="1786" y="1822"/>
-                  </a:lnTo>
-                  <a:cubicBezTo>
-                    <a:pt x="2013" y="1655"/>
-                    <a:pt x="2155" y="1381"/>
-                    <a:pt x="2155" y="1084"/>
-                  </a:cubicBezTo>
-                  <a:lnTo>
-                    <a:pt x="2155" y="715"/>
-                  </a:lnTo>
-                  <a:cubicBezTo>
-                    <a:pt x="2155" y="310"/>
-                    <a:pt x="1834" y="0"/>
-                    <a:pt x="1441" y="0"/>
-                  </a:cubicBezTo>
-                  <a:close/>
-                </a:path>
-              </a:pathLst>
-            </a:custGeom>
-            <a:solidFill>
-              <a:srgbClr val="657E93"/>
-            </a:solidFill>
-            <a:ln>
-              <a:noFill/>
-            </a:ln>
-          </p:spPr>
-          <p:txBody>
-            <a:bodyPr spcFirstLastPara="1" wrap="square" lIns="91425" tIns="91425" rIns="91425" bIns="91425" anchor="ctr" anchorCtr="0">
-              <a:noAutofit/>
-            </a:bodyPr>
-            <a:lstStyle/>
-            <a:p>
-              <a:pPr marL="0" lvl="0" indent="0" algn="l" rtl="0">
-                <a:spcBef>
-                  <a:spcPts val="0"/>
-                </a:spcBef>
-                <a:spcAft>
-                  <a:spcPts val="0"/>
-                </a:spcAft>
-                <a:buNone/>
-              </a:pPr>
-              <a:endParaRPr/>
-            </a:p>
-          </p:txBody>
-        </p:sp>
-        <p:sp>
-          <p:nvSpPr>
-            <p:cNvPr id="21" name="Google Shape;12644;p65"/>
-            <p:cNvSpPr/>
-            <p:nvPr/>
-          </p:nvSpPr>
-          <p:spPr>
-            <a:xfrm>
-              <a:off x="7707518" y="3138830"/>
-              <a:ext cx="79983" cy="138322"/>
-            </a:xfrm>
-            <a:custGeom>
-              <a:avLst/>
-              <a:gdLst/>
-              <a:ahLst/>
-              <a:cxnLst/>
-              <a:rect l="l" t="t" r="r" b="b"/>
-              <a:pathLst>
-                <a:path w="2513" h="4346" extrusionOk="0">
-                  <a:moveTo>
-                    <a:pt x="1429" y="345"/>
-                  </a:moveTo>
-                  <a:cubicBezTo>
-                    <a:pt x="1643" y="345"/>
-                    <a:pt x="1798" y="512"/>
-                    <a:pt x="1798" y="715"/>
-                  </a:cubicBezTo>
-                  <a:lnTo>
-                    <a:pt x="1798" y="1084"/>
-                  </a:lnTo>
-                  <a:cubicBezTo>
-                    <a:pt x="1822" y="1405"/>
-                    <a:pt x="1560" y="1655"/>
-                    <a:pt x="1251" y="1655"/>
-                  </a:cubicBezTo>
-                  <a:cubicBezTo>
-                    <a:pt x="941" y="1655"/>
-                    <a:pt x="691" y="1393"/>
-                    <a:pt x="691" y="1084"/>
-                  </a:cubicBezTo>
-                  <a:lnTo>
-                    <a:pt x="691" y="715"/>
-                  </a:lnTo>
-                  <a:cubicBezTo>
-                    <a:pt x="691" y="512"/>
-                    <a:pt x="846" y="345"/>
-                    <a:pt x="1060" y="345"/>
-                  </a:cubicBezTo>
-                  <a:close/>
-                  <a:moveTo>
-                    <a:pt x="1441" y="1988"/>
-                  </a:moveTo>
-                  <a:lnTo>
-                    <a:pt x="1441" y="2072"/>
-                  </a:lnTo>
-                  <a:cubicBezTo>
-                    <a:pt x="1441" y="2131"/>
-                    <a:pt x="1465" y="2191"/>
-                    <a:pt x="1489" y="2250"/>
-                  </a:cubicBezTo>
-                  <a:lnTo>
-                    <a:pt x="1262" y="2489"/>
-                  </a:lnTo>
-                  <a:lnTo>
-                    <a:pt x="1251" y="2489"/>
-                  </a:lnTo>
-                  <a:lnTo>
-                    <a:pt x="1012" y="2250"/>
-                  </a:lnTo>
-                  <a:cubicBezTo>
-                    <a:pt x="1048" y="2191"/>
-                    <a:pt x="1060" y="2131"/>
-                    <a:pt x="1060" y="2072"/>
-                  </a:cubicBezTo>
-                  <a:lnTo>
-                    <a:pt x="1060" y="1988"/>
-                  </a:lnTo>
-                  <a:close/>
-                  <a:moveTo>
-                    <a:pt x="1072" y="0"/>
-                  </a:moveTo>
-                  <a:cubicBezTo>
-                    <a:pt x="667" y="0"/>
-                    <a:pt x="358" y="334"/>
-                    <a:pt x="358" y="715"/>
-                  </a:cubicBezTo>
-                  <a:lnTo>
-                    <a:pt x="358" y="1084"/>
-                  </a:lnTo>
-                  <a:cubicBezTo>
-                    <a:pt x="358" y="1381"/>
-                    <a:pt x="512" y="1655"/>
-                    <a:pt x="727" y="1822"/>
-                  </a:cubicBezTo>
-                  <a:lnTo>
-                    <a:pt x="727" y="2072"/>
-                  </a:lnTo>
-                  <a:lnTo>
-                    <a:pt x="727" y="2084"/>
-                  </a:lnTo>
-                  <a:lnTo>
-                    <a:pt x="298" y="2298"/>
-                  </a:lnTo>
-                  <a:cubicBezTo>
-                    <a:pt x="119" y="2381"/>
-                    <a:pt x="0" y="2572"/>
-                    <a:pt x="0" y="2774"/>
-                  </a:cubicBezTo>
-                  <a:lnTo>
-                    <a:pt x="0" y="4179"/>
-                  </a:lnTo>
-                  <a:cubicBezTo>
-                    <a:pt x="0" y="4274"/>
-                    <a:pt x="72" y="4346"/>
-                    <a:pt x="167" y="4346"/>
-                  </a:cubicBezTo>
-                  <a:cubicBezTo>
-                    <a:pt x="250" y="4346"/>
-                    <a:pt x="322" y="4274"/>
-                    <a:pt x="322" y="4179"/>
-                  </a:cubicBezTo>
-                  <a:lnTo>
-                    <a:pt x="322" y="2774"/>
-                  </a:lnTo>
-                  <a:cubicBezTo>
-                    <a:pt x="322" y="2691"/>
-                    <a:pt x="369" y="2631"/>
-                    <a:pt x="429" y="2596"/>
-                  </a:cubicBezTo>
-                  <a:lnTo>
-                    <a:pt x="727" y="2441"/>
-                  </a:lnTo>
-                  <a:lnTo>
-                    <a:pt x="1001" y="2715"/>
-                  </a:lnTo>
-                  <a:cubicBezTo>
-                    <a:pt x="1072" y="2786"/>
-                    <a:pt x="1155" y="2810"/>
-                    <a:pt x="1251" y="2810"/>
-                  </a:cubicBezTo>
-                  <a:cubicBezTo>
-                    <a:pt x="1346" y="2810"/>
-                    <a:pt x="1429" y="2786"/>
-                    <a:pt x="1501" y="2715"/>
-                  </a:cubicBezTo>
-                  <a:lnTo>
-                    <a:pt x="1774" y="2441"/>
-                  </a:lnTo>
-                  <a:lnTo>
-                    <a:pt x="2072" y="2596"/>
-                  </a:lnTo>
-                  <a:cubicBezTo>
-                    <a:pt x="2132" y="2619"/>
-                    <a:pt x="2167" y="2691"/>
-                    <a:pt x="2167" y="2774"/>
-                  </a:cubicBezTo>
-                  <a:lnTo>
-                    <a:pt x="2167" y="4179"/>
-                  </a:lnTo>
-                  <a:cubicBezTo>
-                    <a:pt x="2167" y="4274"/>
-                    <a:pt x="2251" y="4346"/>
-                    <a:pt x="2334" y="4346"/>
-                  </a:cubicBezTo>
-                  <a:cubicBezTo>
-                    <a:pt x="2429" y="4346"/>
-                    <a:pt x="2501" y="4274"/>
-                    <a:pt x="2501" y="4179"/>
-                  </a:cubicBezTo>
-                  <a:lnTo>
-                    <a:pt x="2501" y="2774"/>
-                  </a:lnTo>
-                  <a:cubicBezTo>
-                    <a:pt x="2513" y="2572"/>
-                    <a:pt x="2417" y="2381"/>
-                    <a:pt x="2215" y="2298"/>
-                  </a:cubicBezTo>
-                  <a:lnTo>
-                    <a:pt x="1786" y="2084"/>
-                  </a:lnTo>
-                  <a:lnTo>
-                    <a:pt x="1786" y="2072"/>
-                  </a:lnTo>
-                  <a:lnTo>
-                    <a:pt x="1786" y="1822"/>
-                  </a:lnTo>
-                  <a:cubicBezTo>
-                    <a:pt x="2013" y="1655"/>
-                    <a:pt x="2155" y="1381"/>
-                    <a:pt x="2155" y="1084"/>
-                  </a:cubicBezTo>
-                  <a:lnTo>
-                    <a:pt x="2155" y="715"/>
-                  </a:lnTo>
-                  <a:cubicBezTo>
-                    <a:pt x="2155" y="310"/>
-                    <a:pt x="1834" y="0"/>
-                    <a:pt x="1441" y="0"/>
-                  </a:cubicBezTo>
-                  <a:close/>
-                </a:path>
-              </a:pathLst>
-            </a:custGeom>
-            <a:solidFill>
-              <a:srgbClr val="657E93"/>
-            </a:solidFill>
-            <a:ln>
-              <a:noFill/>
-            </a:ln>
-          </p:spPr>
-          <p:txBody>
-            <a:bodyPr spcFirstLastPara="1" wrap="square" lIns="91425" tIns="91425" rIns="91425" bIns="91425" anchor="ctr" anchorCtr="0">
-              <a:noAutofit/>
-            </a:bodyPr>
-            <a:lstStyle/>
-            <a:p>
-              <a:pPr marL="0" lvl="0" indent="0" algn="l" rtl="0">
-                <a:spcBef>
-                  <a:spcPts val="0"/>
-                </a:spcBef>
-                <a:spcAft>
-                  <a:spcPts val="0"/>
-                </a:spcAft>
-                <a:buNone/>
-              </a:pPr>
-              <a:endParaRPr/>
-            </a:p>
-          </p:txBody>
-        </p:sp>
-        <p:sp>
-          <p:nvSpPr>
-            <p:cNvPr id="22" name="Google Shape;12645;p65"/>
-            <p:cNvSpPr/>
-            <p:nvPr/>
-          </p:nvSpPr>
-          <p:spPr>
-            <a:xfrm>
-              <a:off x="7800740" y="3138830"/>
-              <a:ext cx="80364" cy="138322"/>
-            </a:xfrm>
-            <a:custGeom>
-              <a:avLst/>
-              <a:gdLst/>
-              <a:ahLst/>
-              <a:cxnLst/>
-              <a:rect l="l" t="t" r="r" b="b"/>
-              <a:pathLst>
-                <a:path w="2525" h="4346" extrusionOk="0">
-                  <a:moveTo>
-                    <a:pt x="1429" y="345"/>
-                  </a:moveTo>
-                  <a:cubicBezTo>
-                    <a:pt x="1643" y="345"/>
-                    <a:pt x="1810" y="512"/>
-                    <a:pt x="1810" y="715"/>
-                  </a:cubicBezTo>
-                  <a:lnTo>
-                    <a:pt x="1810" y="1084"/>
-                  </a:lnTo>
-                  <a:cubicBezTo>
-                    <a:pt x="1810" y="1405"/>
-                    <a:pt x="1548" y="1655"/>
-                    <a:pt x="1250" y="1655"/>
-                  </a:cubicBezTo>
-                  <a:cubicBezTo>
-                    <a:pt x="941" y="1655"/>
-                    <a:pt x="691" y="1393"/>
-                    <a:pt x="691" y="1084"/>
-                  </a:cubicBezTo>
-                  <a:lnTo>
-                    <a:pt x="691" y="715"/>
-                  </a:lnTo>
-                  <a:cubicBezTo>
-                    <a:pt x="691" y="512"/>
-                    <a:pt x="858" y="345"/>
-                    <a:pt x="1060" y="345"/>
-                  </a:cubicBezTo>
-                  <a:close/>
-                  <a:moveTo>
-                    <a:pt x="1429" y="1988"/>
-                  </a:moveTo>
-                  <a:lnTo>
-                    <a:pt x="1429" y="2072"/>
-                  </a:lnTo>
-                  <a:cubicBezTo>
-                    <a:pt x="1429" y="2131"/>
-                    <a:pt x="1453" y="2191"/>
-                    <a:pt x="1477" y="2250"/>
-                  </a:cubicBezTo>
-                  <a:lnTo>
-                    <a:pt x="1250" y="2489"/>
-                  </a:lnTo>
-                  <a:lnTo>
-                    <a:pt x="1239" y="2489"/>
-                  </a:lnTo>
-                  <a:lnTo>
-                    <a:pt x="1000" y="2250"/>
-                  </a:lnTo>
-                  <a:cubicBezTo>
-                    <a:pt x="1036" y="2191"/>
-                    <a:pt x="1048" y="2131"/>
-                    <a:pt x="1048" y="2072"/>
-                  </a:cubicBezTo>
-                  <a:lnTo>
-                    <a:pt x="1048" y="1988"/>
-                  </a:lnTo>
-                  <a:close/>
-                  <a:moveTo>
-                    <a:pt x="1072" y="0"/>
-                  </a:moveTo>
-                  <a:cubicBezTo>
-                    <a:pt x="679" y="0"/>
-                    <a:pt x="358" y="334"/>
-                    <a:pt x="358" y="715"/>
-                  </a:cubicBezTo>
-                  <a:lnTo>
-                    <a:pt x="358" y="1084"/>
-                  </a:lnTo>
-                  <a:cubicBezTo>
-                    <a:pt x="358" y="1381"/>
-                    <a:pt x="512" y="1655"/>
-                    <a:pt x="739" y="1822"/>
-                  </a:cubicBezTo>
-                  <a:lnTo>
-                    <a:pt x="739" y="2072"/>
-                  </a:lnTo>
-                  <a:lnTo>
-                    <a:pt x="739" y="2084"/>
-                  </a:lnTo>
-                  <a:lnTo>
-                    <a:pt x="298" y="2298"/>
-                  </a:lnTo>
-                  <a:cubicBezTo>
-                    <a:pt x="119" y="2381"/>
-                    <a:pt x="0" y="2572"/>
-                    <a:pt x="0" y="2774"/>
-                  </a:cubicBezTo>
-                  <a:lnTo>
-                    <a:pt x="0" y="4179"/>
-                  </a:lnTo>
-                  <a:cubicBezTo>
-                    <a:pt x="0" y="4274"/>
-                    <a:pt x="84" y="4346"/>
-                    <a:pt x="167" y="4346"/>
-                  </a:cubicBezTo>
-                  <a:cubicBezTo>
-                    <a:pt x="250" y="4346"/>
-                    <a:pt x="334" y="4274"/>
-                    <a:pt x="334" y="4179"/>
-                  </a:cubicBezTo>
-                  <a:lnTo>
-                    <a:pt x="334" y="2774"/>
-                  </a:lnTo>
-                  <a:cubicBezTo>
-                    <a:pt x="334" y="2691"/>
-                    <a:pt x="369" y="2631"/>
-                    <a:pt x="429" y="2596"/>
-                  </a:cubicBezTo>
-                  <a:lnTo>
-                    <a:pt x="727" y="2441"/>
-                  </a:lnTo>
-                  <a:lnTo>
-                    <a:pt x="1000" y="2715"/>
-                  </a:lnTo>
-                  <a:cubicBezTo>
-                    <a:pt x="1072" y="2786"/>
-                    <a:pt x="1167" y="2810"/>
-                    <a:pt x="1250" y="2810"/>
-                  </a:cubicBezTo>
-                  <a:cubicBezTo>
-                    <a:pt x="1346" y="2810"/>
-                    <a:pt x="1429" y="2786"/>
-                    <a:pt x="1512" y="2715"/>
-                  </a:cubicBezTo>
-                  <a:lnTo>
-                    <a:pt x="1774" y="2441"/>
-                  </a:lnTo>
-                  <a:lnTo>
-                    <a:pt x="2072" y="2596"/>
-                  </a:lnTo>
-                  <a:cubicBezTo>
-                    <a:pt x="2132" y="2619"/>
-                    <a:pt x="2179" y="2691"/>
-                    <a:pt x="2179" y="2774"/>
-                  </a:cubicBezTo>
-                  <a:lnTo>
-                    <a:pt x="2179" y="4179"/>
-                  </a:lnTo>
-                  <a:cubicBezTo>
-                    <a:pt x="2179" y="4274"/>
-                    <a:pt x="2251" y="4346"/>
-                    <a:pt x="2334" y="4346"/>
-                  </a:cubicBezTo>
-                  <a:cubicBezTo>
-                    <a:pt x="2429" y="4346"/>
-                    <a:pt x="2501" y="4274"/>
-                    <a:pt x="2501" y="4179"/>
-                  </a:cubicBezTo>
-                  <a:lnTo>
-                    <a:pt x="2501" y="2774"/>
-                  </a:lnTo>
-                  <a:cubicBezTo>
-                    <a:pt x="2524" y="2572"/>
-                    <a:pt x="2405" y="2381"/>
-                    <a:pt x="2227" y="2298"/>
-                  </a:cubicBezTo>
-                  <a:lnTo>
-                    <a:pt x="1786" y="2084"/>
-                  </a:lnTo>
-                  <a:lnTo>
-                    <a:pt x="1786" y="2072"/>
-                  </a:lnTo>
-                  <a:lnTo>
-                    <a:pt x="1786" y="1822"/>
-                  </a:lnTo>
-                  <a:cubicBezTo>
-                    <a:pt x="2012" y="1655"/>
-                    <a:pt x="2167" y="1381"/>
-                    <a:pt x="2167" y="1084"/>
-                  </a:cubicBezTo>
-                  <a:lnTo>
-                    <a:pt x="2167" y="715"/>
-                  </a:lnTo>
-                  <a:cubicBezTo>
-                    <a:pt x="2167" y="310"/>
-                    <a:pt x="1834" y="0"/>
-                    <a:pt x="1453" y="0"/>
-                  </a:cubicBezTo>
-                  <a:close/>
-                </a:path>
-              </a:pathLst>
-            </a:custGeom>
-            <a:solidFill>
-              <a:srgbClr val="657E93"/>
-            </a:solidFill>
-            <a:ln>
-              <a:noFill/>
-            </a:ln>
-          </p:spPr>
-          <p:txBody>
-            <a:bodyPr spcFirstLastPara="1" wrap="square" lIns="91425" tIns="91425" rIns="91425" bIns="91425" anchor="ctr" anchorCtr="0">
-              <a:noAutofit/>
-            </a:bodyPr>
-            <a:lstStyle/>
-            <a:p>
-              <a:pPr marL="0" lvl="0" indent="0" algn="l" rtl="0">
-                <a:spcBef>
-                  <a:spcPts val="0"/>
-                </a:spcBef>
-                <a:spcAft>
-                  <a:spcPts val="0"/>
-                </a:spcAft>
-                <a:buNone/>
-              </a:pPr>
-              <a:endParaRPr/>
-            </a:p>
-          </p:txBody>
-        </p:sp>
-        <p:sp>
-          <p:nvSpPr>
-            <p:cNvPr id="23" name="Google Shape;12646;p65"/>
-            <p:cNvSpPr/>
-            <p:nvPr/>
-          </p:nvSpPr>
-          <p:spPr>
-            <a:xfrm>
-              <a:off x="7521454" y="3138830"/>
-              <a:ext cx="79983" cy="138322"/>
-            </a:xfrm>
-            <a:custGeom>
-              <a:avLst/>
-              <a:gdLst/>
-              <a:ahLst/>
-              <a:cxnLst/>
-              <a:rect l="l" t="t" r="r" b="b"/>
-              <a:pathLst>
-                <a:path w="2513" h="4346" extrusionOk="0">
-                  <a:moveTo>
-                    <a:pt x="1429" y="345"/>
-                  </a:moveTo>
-                  <a:cubicBezTo>
-                    <a:pt x="1632" y="345"/>
-                    <a:pt x="1798" y="512"/>
-                    <a:pt x="1798" y="715"/>
-                  </a:cubicBezTo>
-                  <a:lnTo>
-                    <a:pt x="1798" y="1084"/>
-                  </a:lnTo>
-                  <a:cubicBezTo>
-                    <a:pt x="1810" y="1405"/>
-                    <a:pt x="1560" y="1655"/>
-                    <a:pt x="1251" y="1655"/>
-                  </a:cubicBezTo>
-                  <a:cubicBezTo>
-                    <a:pt x="941" y="1655"/>
-                    <a:pt x="679" y="1393"/>
-                    <a:pt x="679" y="1084"/>
-                  </a:cubicBezTo>
-                  <a:lnTo>
-                    <a:pt x="679" y="715"/>
-                  </a:lnTo>
-                  <a:cubicBezTo>
-                    <a:pt x="679" y="512"/>
-                    <a:pt x="846" y="345"/>
-                    <a:pt x="1060" y="345"/>
-                  </a:cubicBezTo>
-                  <a:close/>
-                  <a:moveTo>
-                    <a:pt x="1441" y="1988"/>
-                  </a:moveTo>
-                  <a:lnTo>
-                    <a:pt x="1441" y="2072"/>
-                  </a:lnTo>
-                  <a:cubicBezTo>
-                    <a:pt x="1441" y="2131"/>
-                    <a:pt x="1453" y="2191"/>
-                    <a:pt x="1489" y="2250"/>
-                  </a:cubicBezTo>
-                  <a:lnTo>
-                    <a:pt x="1262" y="2489"/>
-                  </a:lnTo>
-                  <a:lnTo>
-                    <a:pt x="1251" y="2489"/>
-                  </a:lnTo>
-                  <a:lnTo>
-                    <a:pt x="1012" y="2250"/>
-                  </a:lnTo>
-                  <a:cubicBezTo>
-                    <a:pt x="1036" y="2191"/>
-                    <a:pt x="1060" y="2131"/>
-                    <a:pt x="1060" y="2072"/>
-                  </a:cubicBezTo>
-                  <a:lnTo>
-                    <a:pt x="1060" y="1988"/>
-                  </a:lnTo>
-                  <a:close/>
-                  <a:moveTo>
-                    <a:pt x="1072" y="0"/>
-                  </a:moveTo>
-                  <a:cubicBezTo>
-                    <a:pt x="667" y="0"/>
-                    <a:pt x="358" y="334"/>
-                    <a:pt x="358" y="715"/>
-                  </a:cubicBezTo>
-                  <a:lnTo>
-                    <a:pt x="358" y="1084"/>
-                  </a:lnTo>
-                  <a:cubicBezTo>
-                    <a:pt x="358" y="1381"/>
-                    <a:pt x="500" y="1655"/>
-                    <a:pt x="727" y="1822"/>
-                  </a:cubicBezTo>
-                  <a:lnTo>
-                    <a:pt x="727" y="2072"/>
-                  </a:lnTo>
-                  <a:lnTo>
-                    <a:pt x="727" y="2084"/>
-                  </a:lnTo>
-                  <a:lnTo>
-                    <a:pt x="298" y="2298"/>
-                  </a:lnTo>
-                  <a:cubicBezTo>
-                    <a:pt x="119" y="2381"/>
-                    <a:pt x="0" y="2572"/>
-                    <a:pt x="0" y="2774"/>
-                  </a:cubicBezTo>
-                  <a:lnTo>
-                    <a:pt x="0" y="4179"/>
-                  </a:lnTo>
-                  <a:cubicBezTo>
-                    <a:pt x="0" y="4274"/>
-                    <a:pt x="72" y="4346"/>
-                    <a:pt x="167" y="4346"/>
-                  </a:cubicBezTo>
-                  <a:cubicBezTo>
-                    <a:pt x="250" y="4346"/>
-                    <a:pt x="322" y="4274"/>
-                    <a:pt x="322" y="4179"/>
-                  </a:cubicBezTo>
-                  <a:lnTo>
-                    <a:pt x="322" y="2774"/>
-                  </a:lnTo>
-                  <a:cubicBezTo>
-                    <a:pt x="322" y="2691"/>
-                    <a:pt x="370" y="2631"/>
-                    <a:pt x="429" y="2596"/>
-                  </a:cubicBezTo>
-                  <a:lnTo>
-                    <a:pt x="727" y="2441"/>
-                  </a:lnTo>
-                  <a:lnTo>
-                    <a:pt x="989" y="2715"/>
-                  </a:lnTo>
-                  <a:cubicBezTo>
-                    <a:pt x="1072" y="2786"/>
-                    <a:pt x="1155" y="2810"/>
-                    <a:pt x="1251" y="2810"/>
-                  </a:cubicBezTo>
-                  <a:cubicBezTo>
-                    <a:pt x="1334" y="2810"/>
-                    <a:pt x="1429" y="2786"/>
-                    <a:pt x="1501" y="2715"/>
-                  </a:cubicBezTo>
-                  <a:lnTo>
-                    <a:pt x="1763" y="2441"/>
-                  </a:lnTo>
-                  <a:lnTo>
-                    <a:pt x="2060" y="2596"/>
-                  </a:lnTo>
-                  <a:cubicBezTo>
-                    <a:pt x="2132" y="2619"/>
-                    <a:pt x="2167" y="2691"/>
-                    <a:pt x="2167" y="2774"/>
-                  </a:cubicBezTo>
-                  <a:lnTo>
-                    <a:pt x="2167" y="4179"/>
-                  </a:lnTo>
-                  <a:cubicBezTo>
-                    <a:pt x="2167" y="4274"/>
-                    <a:pt x="2251" y="4346"/>
-                    <a:pt x="2334" y="4346"/>
-                  </a:cubicBezTo>
-                  <a:cubicBezTo>
-                    <a:pt x="2417" y="4346"/>
-                    <a:pt x="2501" y="4274"/>
-                    <a:pt x="2501" y="4179"/>
-                  </a:cubicBezTo>
-                  <a:lnTo>
-                    <a:pt x="2501" y="2774"/>
-                  </a:lnTo>
-                  <a:cubicBezTo>
-                    <a:pt x="2513" y="2572"/>
-                    <a:pt x="2405" y="2381"/>
-                    <a:pt x="2215" y="2298"/>
-                  </a:cubicBezTo>
-                  <a:lnTo>
-                    <a:pt x="1786" y="2084"/>
-                  </a:lnTo>
-                  <a:lnTo>
-                    <a:pt x="1786" y="2072"/>
-                  </a:lnTo>
-                  <a:lnTo>
-                    <a:pt x="1786" y="1822"/>
-                  </a:lnTo>
-                  <a:cubicBezTo>
-                    <a:pt x="2013" y="1655"/>
-                    <a:pt x="2155" y="1381"/>
-                    <a:pt x="2155" y="1084"/>
-                  </a:cubicBezTo>
-                  <a:lnTo>
-                    <a:pt x="2155" y="715"/>
-                  </a:lnTo>
-                  <a:cubicBezTo>
-                    <a:pt x="2155" y="310"/>
-                    <a:pt x="1834" y="0"/>
-                    <a:pt x="1441" y="0"/>
-                  </a:cubicBezTo>
-                  <a:close/>
-                </a:path>
-              </a:pathLst>
-            </a:custGeom>
-            <a:solidFill>
-              <a:srgbClr val="657E93"/>
-            </a:solidFill>
-            <a:ln>
-              <a:noFill/>
-            </a:ln>
-          </p:spPr>
-          <p:txBody>
-            <a:bodyPr spcFirstLastPara="1" wrap="square" lIns="91425" tIns="91425" rIns="91425" bIns="91425" anchor="ctr" anchorCtr="0">
-              <a:noAutofit/>
-            </a:bodyPr>
-            <a:lstStyle/>
-            <a:p>
-              <a:pPr marL="0" lvl="0" indent="0" algn="l" rtl="0">
-                <a:spcBef>
-                  <a:spcPts val="0"/>
-                </a:spcBef>
-                <a:spcAft>
-                  <a:spcPts val="0"/>
-                </a:spcAft>
-                <a:buNone/>
-              </a:pPr>
-              <a:endParaRPr/>
-            </a:p>
-          </p:txBody>
-        </p:sp>
-        <p:sp>
-          <p:nvSpPr>
-            <p:cNvPr id="24" name="Google Shape;12647;p65"/>
-            <p:cNvSpPr/>
-            <p:nvPr/>
-          </p:nvSpPr>
-          <p:spPr>
-            <a:xfrm>
-              <a:off x="7555923" y="2906139"/>
-              <a:ext cx="289949" cy="219833"/>
-            </a:xfrm>
-            <a:custGeom>
-              <a:avLst/>
-              <a:gdLst/>
-              <a:ahLst/>
-              <a:cxnLst/>
-              <a:rect l="l" t="t" r="r" b="b"/>
-              <a:pathLst>
-                <a:path w="9110" h="6907" extrusionOk="0">
-                  <a:moveTo>
-                    <a:pt x="4561" y="1"/>
-                  </a:moveTo>
-                  <a:cubicBezTo>
-                    <a:pt x="4501" y="1"/>
-                    <a:pt x="4442" y="36"/>
-                    <a:pt x="4406" y="96"/>
-                  </a:cubicBezTo>
-                  <a:lnTo>
-                    <a:pt x="3859" y="1191"/>
-                  </a:lnTo>
-                  <a:cubicBezTo>
-                    <a:pt x="3811" y="1287"/>
-                    <a:pt x="3847" y="1382"/>
-                    <a:pt x="3930" y="1418"/>
-                  </a:cubicBezTo>
-                  <a:cubicBezTo>
-                    <a:pt x="3959" y="1432"/>
-                    <a:pt x="3988" y="1439"/>
-                    <a:pt x="4016" y="1439"/>
-                  </a:cubicBezTo>
-                  <a:cubicBezTo>
-                    <a:pt x="4078" y="1439"/>
-                    <a:pt x="4131" y="1404"/>
-                    <a:pt x="4156" y="1346"/>
-                  </a:cubicBezTo>
-                  <a:lnTo>
-                    <a:pt x="4382" y="894"/>
-                  </a:lnTo>
-                  <a:lnTo>
-                    <a:pt x="4382" y="4204"/>
-                  </a:lnTo>
-                  <a:lnTo>
-                    <a:pt x="715" y="4204"/>
-                  </a:lnTo>
-                  <a:cubicBezTo>
-                    <a:pt x="310" y="4204"/>
-                    <a:pt x="1" y="4525"/>
-                    <a:pt x="1" y="4918"/>
-                  </a:cubicBezTo>
-                  <a:lnTo>
-                    <a:pt x="1" y="6752"/>
-                  </a:lnTo>
-                  <a:cubicBezTo>
-                    <a:pt x="1" y="6835"/>
-                    <a:pt x="72" y="6906"/>
-                    <a:pt x="168" y="6906"/>
-                  </a:cubicBezTo>
-                  <a:cubicBezTo>
-                    <a:pt x="251" y="6906"/>
-                    <a:pt x="334" y="6835"/>
-                    <a:pt x="334" y="6752"/>
-                  </a:cubicBezTo>
-                  <a:lnTo>
-                    <a:pt x="334" y="4918"/>
-                  </a:lnTo>
-                  <a:cubicBezTo>
-                    <a:pt x="334" y="4704"/>
-                    <a:pt x="489" y="4549"/>
-                    <a:pt x="703" y="4549"/>
-                  </a:cubicBezTo>
-                  <a:lnTo>
-                    <a:pt x="2906" y="4549"/>
-                  </a:lnTo>
-                  <a:lnTo>
-                    <a:pt x="2906" y="6752"/>
-                  </a:lnTo>
-                  <a:cubicBezTo>
-                    <a:pt x="2906" y="6835"/>
-                    <a:pt x="2977" y="6906"/>
-                    <a:pt x="3061" y="6906"/>
-                  </a:cubicBezTo>
-                  <a:cubicBezTo>
-                    <a:pt x="3156" y="6906"/>
-                    <a:pt x="3227" y="6835"/>
-                    <a:pt x="3227" y="6752"/>
-                  </a:cubicBezTo>
-                  <a:lnTo>
-                    <a:pt x="3227" y="4549"/>
-                  </a:lnTo>
-                  <a:lnTo>
-                    <a:pt x="5823" y="4549"/>
-                  </a:lnTo>
-                  <a:lnTo>
-                    <a:pt x="5823" y="6752"/>
-                  </a:lnTo>
-                  <a:cubicBezTo>
-                    <a:pt x="5823" y="6835"/>
-                    <a:pt x="5894" y="6906"/>
-                    <a:pt x="5978" y="6906"/>
-                  </a:cubicBezTo>
-                  <a:cubicBezTo>
-                    <a:pt x="6073" y="6906"/>
-                    <a:pt x="6145" y="6835"/>
-                    <a:pt x="6145" y="6752"/>
-                  </a:cubicBezTo>
-                  <a:lnTo>
-                    <a:pt x="6145" y="4549"/>
-                  </a:lnTo>
-                  <a:lnTo>
-                    <a:pt x="8347" y="4549"/>
-                  </a:lnTo>
-                  <a:cubicBezTo>
-                    <a:pt x="8561" y="4549"/>
-                    <a:pt x="8716" y="4704"/>
-                    <a:pt x="8716" y="4918"/>
-                  </a:cubicBezTo>
-                  <a:lnTo>
-                    <a:pt x="8716" y="6752"/>
-                  </a:lnTo>
-                  <a:cubicBezTo>
-                    <a:pt x="8716" y="6835"/>
-                    <a:pt x="8800" y="6906"/>
-                    <a:pt x="8883" y="6906"/>
-                  </a:cubicBezTo>
-                  <a:cubicBezTo>
-                    <a:pt x="8978" y="6906"/>
-                    <a:pt x="9050" y="6835"/>
-                    <a:pt x="9050" y="6752"/>
-                  </a:cubicBezTo>
-                  <a:lnTo>
-                    <a:pt x="9050" y="4918"/>
-                  </a:lnTo>
-                  <a:cubicBezTo>
-                    <a:pt x="9109" y="4525"/>
-                    <a:pt x="8788" y="4204"/>
-                    <a:pt x="8395" y="4204"/>
-                  </a:cubicBezTo>
-                  <a:lnTo>
-                    <a:pt x="4740" y="4204"/>
-                  </a:lnTo>
-                  <a:lnTo>
-                    <a:pt x="4740" y="894"/>
-                  </a:lnTo>
-                  <a:lnTo>
-                    <a:pt x="4954" y="1346"/>
-                  </a:lnTo>
-                  <a:cubicBezTo>
-                    <a:pt x="4990" y="1406"/>
-                    <a:pt x="5049" y="1429"/>
-                    <a:pt x="5109" y="1429"/>
-                  </a:cubicBezTo>
-                  <a:cubicBezTo>
-                    <a:pt x="5132" y="1429"/>
-                    <a:pt x="5156" y="1429"/>
-                    <a:pt x="5180" y="1418"/>
-                  </a:cubicBezTo>
-                  <a:cubicBezTo>
-                    <a:pt x="5275" y="1370"/>
-                    <a:pt x="5299" y="1263"/>
-                    <a:pt x="5252" y="1191"/>
-                  </a:cubicBezTo>
-                  <a:lnTo>
-                    <a:pt x="4704" y="96"/>
-                  </a:lnTo>
-                  <a:cubicBezTo>
-                    <a:pt x="4680" y="36"/>
-                    <a:pt x="4621" y="1"/>
-                    <a:pt x="4561" y="1"/>
-                  </a:cubicBezTo>
-                  <a:close/>
-                </a:path>
-              </a:pathLst>
-            </a:custGeom>
-            <a:solidFill>
-              <a:srgbClr val="657E93"/>
-            </a:solidFill>
-            <a:ln>
-              <a:noFill/>
-            </a:ln>
-          </p:spPr>
-          <p:txBody>
-            <a:bodyPr spcFirstLastPara="1" wrap="square" lIns="91425" tIns="91425" rIns="91425" bIns="91425" anchor="ctr" anchorCtr="0">
-              <a:noAutofit/>
-            </a:bodyPr>
-            <a:lstStyle/>
-            <a:p>
-              <a:pPr marL="0" lvl="0" indent="0" algn="l" rtl="0">
-                <a:spcBef>
-                  <a:spcPts val="0"/>
-                </a:spcBef>
-                <a:spcAft>
-                  <a:spcPts val="0"/>
-                </a:spcAft>
-                <a:buNone/>
-              </a:pPr>
-              <a:endParaRPr/>
-            </a:p>
-          </p:txBody>
-        </p:sp>
-      </p:grpSp>
-    </p:spTree>
-  </p:cSld>
-  <p:clrMapOvr>
-    <a:masterClrMapping/>
-  </p:clrMapOvr>
-  <p:transition>
-    <p:zoom/>
-  </p:transition>
-  <p:timing>
-    <p:tnLst>
-      <p:par>
-        <p:cTn id="1" dur="indefinite" restart="never" nodeType="tmRoot"/>
-      </p:par>
-    </p:tnLst>
-  </p:timing>
-</p:sld>
-</file>
-
-<file path=ppt/slides/slide4.xml><?xml version="1.0" encoding="utf-8"?>
-<p:sld xmlns:a="http://schemas.openxmlformats.org/drawingml/2006/main" xmlns:r="http://schemas.openxmlformats.org/officeDocument/2006/relationships" xmlns:p="http://schemas.openxmlformats.org/presentationml/2006/main">
-  <p:cSld>
-    <p:spTree>
-      <p:nvGrpSpPr>
-        <p:cNvPr id="1" name="Shape 457"/>
-        <p:cNvGrpSpPr/>
-        <p:nvPr/>
-      </p:nvGrpSpPr>
-      <p:grpSpPr>
-        <a:xfrm>
-          <a:off x="0" y="0"/>
-          <a:ext cx="0" cy="0"/>
-          <a:chOff x="0" y="0"/>
-          <a:chExt cx="0" cy="0"/>
-        </a:xfrm>
-      </p:grpSpPr>
-      <p:sp>
-        <p:nvSpPr>
-          <p:cNvPr id="458" name="Google Shape;458;p27"/>
-          <p:cNvSpPr txBox="1">
-            <a:spLocks noGrp="1"/>
-          </p:cNvSpPr>
-          <p:nvPr>
-            <p:ph type="ctrTitle"/>
-          </p:nvPr>
-        </p:nvSpPr>
-        <p:spPr>
-          <a:xfrm>
-            <a:off x="1115616" y="1131590"/>
-            <a:ext cx="4598635" cy="517500"/>
-          </a:xfrm>
-          <a:prstGeom prst="rect">
-            <a:avLst/>
-          </a:prstGeom>
-        </p:spPr>
-        <p:txBody>
-          <a:bodyPr spcFirstLastPara="1" wrap="square" lIns="91425" tIns="91425" rIns="91425" bIns="91425" anchor="ctr" anchorCtr="0">
-            <a:noAutofit/>
-          </a:bodyPr>
-          <a:lstStyle/>
-          <a:p>
-            <a:pPr lvl="0"/>
-            <a:r>
-              <a:rPr lang="ru-RU" sz="2800" dirty="0" smtClean="0"/>
-              <a:t>Работа</a:t>
-            </a:r>
-            <a:r>
-              <a:rPr lang="en" sz="2800" dirty="0" smtClean="0">
-                <a:solidFill>
-                  <a:schemeClr val="accent2"/>
-                </a:solidFill>
-              </a:rPr>
-              <a:t> ‘Server’ </a:t>
-            </a:r>
-            <a:r>
-              <a:rPr lang="en" sz="2800" dirty="0" smtClean="0">
-                <a:solidFill>
-                  <a:schemeClr val="accent6"/>
-                </a:solidFill>
-              </a:rPr>
-              <a:t>{</a:t>
-            </a:r>
-            <a:endParaRPr sz="2800" dirty="0">
-              <a:solidFill>
-                <a:schemeClr val="accent3"/>
-              </a:solidFill>
-            </a:endParaRPr>
-          </a:p>
-        </p:txBody>
-      </p:sp>
-      <p:grpSp>
-        <p:nvGrpSpPr>
-          <p:cNvPr id="2" name="Google Shape;462;p27"/>
-          <p:cNvGrpSpPr/>
-          <p:nvPr/>
-        </p:nvGrpSpPr>
-        <p:grpSpPr>
-          <a:xfrm>
-            <a:off x="1403648" y="2067694"/>
-            <a:ext cx="506100" cy="2121197"/>
-            <a:chOff x="1403648" y="1759900"/>
-            <a:chExt cx="506100" cy="2431274"/>
-          </a:xfrm>
-        </p:grpSpPr>
-        <p:cxnSp>
-          <p:nvCxnSpPr>
-            <p:cNvPr id="463" name="Google Shape;463;p27"/>
-            <p:cNvCxnSpPr/>
-            <p:nvPr/>
-          </p:nvCxnSpPr>
-          <p:spPr>
-            <a:xfrm>
-              <a:off x="1552225" y="1759900"/>
-              <a:ext cx="0" cy="1763400"/>
-            </a:xfrm>
-            <a:prstGeom prst="straightConnector1">
-              <a:avLst/>
-            </a:prstGeom>
-            <a:noFill/>
-            <a:ln w="9525" cap="flat" cmpd="sng">
-              <a:solidFill>
-                <a:schemeClr val="accent4"/>
-              </a:solidFill>
-              <a:prstDash val="solid"/>
-              <a:round/>
-              <a:headEnd type="none" w="med" len="med"/>
-              <a:tailEnd type="none" w="med" len="med"/>
-            </a:ln>
-          </p:spPr>
-        </p:cxnSp>
-        <p:sp>
-          <p:nvSpPr>
-            <p:cNvPr id="464" name="Google Shape;464;p27"/>
-            <p:cNvSpPr txBox="1"/>
-            <p:nvPr/>
-          </p:nvSpPr>
-          <p:spPr>
-            <a:xfrm>
-              <a:off x="1403648" y="3575651"/>
-              <a:ext cx="506100" cy="615523"/>
-            </a:xfrm>
-            <a:prstGeom prst="rect">
-              <a:avLst/>
-            </a:prstGeom>
-            <a:noFill/>
-            <a:ln>
-              <a:noFill/>
-            </a:ln>
-          </p:spPr>
-          <p:txBody>
-            <a:bodyPr spcFirstLastPara="1" wrap="square" lIns="91425" tIns="91425" rIns="91425" bIns="91425" anchor="t" anchorCtr="0">
-              <a:spAutoFit/>
-            </a:bodyPr>
-            <a:lstStyle/>
-            <a:p>
-              <a:pPr marL="0" lvl="0" indent="0" algn="l" rtl="0">
-                <a:spcBef>
-                  <a:spcPts val="0"/>
-                </a:spcBef>
-                <a:spcAft>
-                  <a:spcPts val="0"/>
-                </a:spcAft>
-                <a:buNone/>
-              </a:pPr>
-              <a:r>
-                <a:rPr lang="en" sz="2800" dirty="0">
-                  <a:solidFill>
-                    <a:schemeClr val="accent3"/>
-                  </a:solidFill>
-                  <a:latin typeface="Fira Code"/>
-                  <a:ea typeface="Fira Code"/>
-                  <a:cs typeface="Fira Code"/>
-                  <a:sym typeface="Fira Code"/>
-                </a:rPr>
-                <a:t>}</a:t>
-              </a:r>
-              <a:endParaRPr sz="2800" dirty="0">
-                <a:solidFill>
-                  <a:schemeClr val="accent3"/>
-                </a:solidFill>
-                <a:latin typeface="Fira Code"/>
-                <a:ea typeface="Fira Code"/>
-                <a:cs typeface="Fira Code"/>
-                <a:sym typeface="Fira Code"/>
-              </a:endParaRPr>
-            </a:p>
-          </p:txBody>
-        </p:sp>
-      </p:grpSp>
-      <p:sp>
-        <p:nvSpPr>
-          <p:cNvPr id="465" name="Google Shape;465;p27"/>
-          <p:cNvSpPr txBox="1">
-            <a:spLocks noGrp="1"/>
-          </p:cNvSpPr>
-          <p:nvPr>
-            <p:ph type="subTitle" idx="1"/>
-          </p:nvPr>
-        </p:nvSpPr>
-        <p:spPr>
-          <a:xfrm>
-            <a:off x="-5975" y="91525"/>
-            <a:ext cx="4572000" cy="357300"/>
-          </a:xfrm>
-          <a:prstGeom prst="rect">
-            <a:avLst/>
-          </a:prstGeom>
-        </p:spPr>
-        <p:txBody>
-          <a:bodyPr spcFirstLastPara="1" wrap="square" lIns="91425" tIns="91425" rIns="91425" bIns="91425" anchor="ctr" anchorCtr="0">
-            <a:noAutofit/>
-          </a:bodyPr>
-          <a:lstStyle/>
-          <a:p>
-            <a:pPr marL="0" lvl="0" indent="0" algn="ctr" rtl="0">
-              <a:spcBef>
-                <a:spcPts val="0"/>
-              </a:spcBef>
-              <a:spcAft>
-                <a:spcPts val="0"/>
-              </a:spcAft>
-              <a:buNone/>
-            </a:pPr>
-            <a:r>
-              <a:rPr lang="en-US" sz="1400" dirty="0" smtClean="0"/>
-              <a:t>server</a:t>
-            </a:r>
-            <a:r>
-              <a:rPr lang="en" sz="1400" dirty="0" smtClean="0">
-                <a:solidFill>
-                  <a:schemeClr val="accent3"/>
-                </a:solidFill>
-              </a:rPr>
-              <a:t>.cpp</a:t>
-            </a:r>
-            <a:endParaRPr sz="1400" dirty="0">
-              <a:solidFill>
-                <a:schemeClr val="accent3"/>
-              </a:solidFill>
-            </a:endParaRPr>
-          </a:p>
-        </p:txBody>
-      </p:sp>
-      <p:sp>
-        <p:nvSpPr>
-          <p:cNvPr id="466" name="Google Shape;466;p27"/>
-          <p:cNvSpPr txBox="1">
-            <a:spLocks noGrp="1"/>
-          </p:cNvSpPr>
-          <p:nvPr>
-            <p:ph type="subTitle" idx="1"/>
-          </p:nvPr>
-        </p:nvSpPr>
-        <p:spPr>
-          <a:xfrm>
-            <a:off x="4572000" y="91525"/>
-            <a:ext cx="4572000" cy="357300"/>
-          </a:xfrm>
-          <a:prstGeom prst="rect">
-            <a:avLst/>
-          </a:prstGeom>
-        </p:spPr>
-        <p:txBody>
-          <a:bodyPr spcFirstLastPara="1" wrap="square" lIns="91425" tIns="91425" rIns="91425" bIns="91425" anchor="ctr" anchorCtr="0">
-            <a:noAutofit/>
-          </a:bodyPr>
-          <a:lstStyle/>
-          <a:p>
-            <a:pPr marL="0" lvl="0" indent="0" algn="ctr"/>
-            <a:r>
-              <a:rPr lang="en-US" sz="1400" dirty="0" smtClean="0"/>
-              <a:t>client.cpp</a:t>
-            </a:r>
-            <a:endParaRPr lang="en-US" sz="1400" dirty="0"/>
-          </a:p>
-        </p:txBody>
-      </p:sp>
-      <p:sp>
-        <p:nvSpPr>
-          <p:cNvPr id="22" name="Google Shape;853;p42"/>
-          <p:cNvSpPr txBox="1">
-            <a:spLocks noGrp="1"/>
-          </p:cNvSpPr>
-          <p:nvPr>
-            <p:ph type="subTitle" idx="1"/>
-          </p:nvPr>
-        </p:nvSpPr>
-        <p:spPr>
-          <a:xfrm>
-            <a:off x="1619672" y="1779662"/>
-            <a:ext cx="3627600" cy="2088232"/>
-          </a:xfrm>
-          <a:prstGeom prst="rect">
-            <a:avLst/>
-          </a:prstGeom>
-        </p:spPr>
-        <p:txBody>
-          <a:bodyPr spcFirstLastPara="1" wrap="square" lIns="91425" tIns="91425" rIns="91425" bIns="91425" anchor="ctr" anchorCtr="0">
-            <a:noAutofit/>
-          </a:bodyPr>
-          <a:lstStyle/>
-          <a:p>
-            <a:pPr marL="0" lvl="0" indent="0"/>
-            <a:r>
-              <a:rPr lang="en" sz="1400" dirty="0"/>
-              <a:t>&lt; </a:t>
-            </a:r>
-            <a:r>
-              <a:rPr lang="ru-RU" sz="1400" dirty="0" smtClean="0"/>
-              <a:t>Давайте разберем работу функции </a:t>
-            </a:r>
-            <a:r>
-              <a:rPr lang="en-US" sz="1400" dirty="0" err="1" smtClean="0"/>
-              <a:t>handleClient</a:t>
-            </a:r>
-            <a:r>
-              <a:rPr lang="ru-RU" sz="1400" dirty="0" smtClean="0"/>
-              <a:t>. Функция принимает числа от клиента, сравнивает их с загаданным </a:t>
-            </a:r>
-            <a:r>
-              <a:rPr lang="ru-RU" sz="1400" dirty="0" err="1" smtClean="0"/>
-              <a:t>secretNumber</a:t>
-            </a:r>
-            <a:r>
-              <a:rPr lang="ru-RU" sz="1400" dirty="0" smtClean="0"/>
-              <a:t>, отправляет подсказки </a:t>
-            </a:r>
-            <a:r>
-              <a:rPr lang="ru-RU" sz="1400" b="1" dirty="0" smtClean="0"/>
-              <a:t>MORE/LESS</a:t>
-            </a:r>
-            <a:r>
-              <a:rPr lang="ru-RU" sz="1400" dirty="0" smtClean="0"/>
-              <a:t> или </a:t>
-            </a:r>
-            <a:r>
-              <a:rPr lang="ru-RU" sz="1400" b="1" dirty="0" smtClean="0"/>
-              <a:t>WIN</a:t>
-            </a:r>
-            <a:r>
-              <a:rPr lang="ru-RU" sz="1400" dirty="0" smtClean="0"/>
-              <a:t>, пока клиент не угадает или не отключится</a:t>
-            </a:r>
-            <a:r>
-              <a:rPr lang="en" sz="1400" dirty="0" smtClean="0"/>
-              <a:t> </a:t>
-            </a:r>
-            <a:r>
-              <a:rPr lang="en" sz="1400" dirty="0"/>
-              <a:t>&gt;</a:t>
-            </a:r>
-            <a:endParaRPr sz="1400" dirty="0"/>
-          </a:p>
-        </p:txBody>
-      </p:sp>
-      <p:pic>
-        <p:nvPicPr>
-          <p:cNvPr id="6145" name="Picture 1"/>
-          <p:cNvPicPr>
-            <a:picLocks noChangeAspect="1" noChangeArrowheads="1"/>
-          </p:cNvPicPr>
-          <p:nvPr/>
-        </p:nvPicPr>
-        <p:blipFill>
-          <a:blip r:embed="rId3"/>
-          <a:srcRect/>
-          <a:stretch>
-            <a:fillRect/>
-          </a:stretch>
-        </p:blipFill>
-        <p:spPr bwMode="auto">
-          <a:xfrm>
-            <a:off x="5148064" y="583307"/>
-            <a:ext cx="3957274" cy="4076675"/>
-          </a:xfrm>
-          <a:prstGeom prst="rect">
-            <a:avLst/>
-          </a:prstGeom>
-          <a:noFill/>
-          <a:ln w="9525">
-            <a:noFill/>
-            <a:miter lim="800000"/>
-            <a:headEnd/>
-            <a:tailEnd/>
-          </a:ln>
-        </p:spPr>
-      </p:pic>
-    </p:spTree>
-  </p:cSld>
-  <p:clrMapOvr>
-    <a:masterClrMapping/>
-  </p:clrMapOvr>
-  <p:transition>
-    <p:pull dir="d"/>
-  </p:transition>
-  <p:timing>
-    <p:tnLst>
-      <p:par>
-        <p:cTn id="1" dur="indefinite" restart="never" nodeType="tmRoot"/>
-      </p:par>
-    </p:tnLst>
-  </p:timing>
-</p:sld>
-</file>
-
-<file path=ppt/slides/slide5.xml><?xml version="1.0" encoding="utf-8"?>
-<p:sld xmlns:a="http://schemas.openxmlformats.org/drawingml/2006/main" xmlns:r="http://schemas.openxmlformats.org/officeDocument/2006/relationships" xmlns:p="http://schemas.openxmlformats.org/presentationml/2006/main">
-  <p:cSld>
-    <p:spTree>
-      <p:nvGrpSpPr>
-        <p:cNvPr id="1" name="Shape 457"/>
-        <p:cNvGrpSpPr/>
-        <p:nvPr/>
-      </p:nvGrpSpPr>
-      <p:grpSpPr>
-        <a:xfrm>
-          <a:off x="0" y="0"/>
-          <a:ext cx="0" cy="0"/>
-          <a:chOff x="0" y="0"/>
-          <a:chExt cx="0" cy="0"/>
-        </a:xfrm>
-      </p:grpSpPr>
-      <p:sp>
-        <p:nvSpPr>
-          <p:cNvPr id="458" name="Google Shape;458;p27"/>
-          <p:cNvSpPr txBox="1">
-            <a:spLocks noGrp="1"/>
-          </p:cNvSpPr>
-          <p:nvPr>
-            <p:ph type="ctrTitle"/>
-          </p:nvPr>
-        </p:nvSpPr>
-        <p:spPr>
-          <a:xfrm>
-            <a:off x="1413525" y="1144250"/>
-            <a:ext cx="4598635" cy="517500"/>
-          </a:xfrm>
-          <a:prstGeom prst="rect">
-            <a:avLst/>
-          </a:prstGeom>
-        </p:spPr>
-        <p:txBody>
-          <a:bodyPr spcFirstLastPara="1" wrap="square" lIns="91425" tIns="91425" rIns="91425" bIns="91425" anchor="ctr" anchorCtr="0">
-            <a:noAutofit/>
-          </a:bodyPr>
-          <a:lstStyle/>
-          <a:p>
-            <a:pPr lvl="0"/>
-            <a:r>
-              <a:rPr lang="ru-RU" sz="2800" dirty="0" smtClean="0"/>
-              <a:t>Работа</a:t>
-            </a:r>
-            <a:r>
-              <a:rPr lang="en" sz="2800" dirty="0" smtClean="0">
-                <a:solidFill>
-                  <a:schemeClr val="accent2"/>
-                </a:solidFill>
-              </a:rPr>
-              <a:t> ‘Server’</a:t>
-            </a:r>
-            <a:r>
-              <a:rPr lang="en" sz="2800" dirty="0" smtClean="0">
-                <a:solidFill>
-                  <a:schemeClr val="accent6"/>
-                </a:solidFill>
-              </a:rPr>
-              <a:t>{</a:t>
-            </a:r>
-            <a:endParaRPr sz="2800" dirty="0">
-              <a:solidFill>
-                <a:schemeClr val="accent3"/>
-              </a:solidFill>
-            </a:endParaRPr>
-          </a:p>
-        </p:txBody>
-      </p:sp>
-      <p:grpSp>
-        <p:nvGrpSpPr>
-          <p:cNvPr id="2" name="Google Shape;462;p27"/>
-          <p:cNvGrpSpPr/>
-          <p:nvPr/>
-        </p:nvGrpSpPr>
-        <p:grpSpPr>
-          <a:xfrm>
-            <a:off x="1413525" y="2067694"/>
-            <a:ext cx="506100" cy="2105579"/>
-            <a:chOff x="1413525" y="1759900"/>
-            <a:chExt cx="506100" cy="2413373"/>
-          </a:xfrm>
-        </p:grpSpPr>
-        <p:cxnSp>
-          <p:nvCxnSpPr>
-            <p:cNvPr id="463" name="Google Shape;463;p27"/>
-            <p:cNvCxnSpPr/>
-            <p:nvPr/>
-          </p:nvCxnSpPr>
-          <p:spPr>
-            <a:xfrm>
-              <a:off x="1552225" y="1759900"/>
-              <a:ext cx="0" cy="1763400"/>
-            </a:xfrm>
-            <a:prstGeom prst="straightConnector1">
-              <a:avLst/>
-            </a:prstGeom>
-            <a:noFill/>
-            <a:ln w="9525" cap="flat" cmpd="sng">
-              <a:solidFill>
-                <a:schemeClr val="accent4"/>
-              </a:solidFill>
-              <a:prstDash val="solid"/>
-              <a:round/>
-              <a:headEnd type="none" w="med" len="med"/>
-              <a:tailEnd type="none" w="med" len="med"/>
-            </a:ln>
-          </p:spPr>
-        </p:cxnSp>
-        <p:sp>
-          <p:nvSpPr>
-            <p:cNvPr id="464" name="Google Shape;464;p27"/>
-            <p:cNvSpPr txBox="1"/>
-            <p:nvPr/>
-          </p:nvSpPr>
-          <p:spPr>
-            <a:xfrm>
-              <a:off x="1413525" y="3557750"/>
-              <a:ext cx="506100" cy="615523"/>
-            </a:xfrm>
-            <a:prstGeom prst="rect">
-              <a:avLst/>
-            </a:prstGeom>
-            <a:noFill/>
-            <a:ln>
-              <a:noFill/>
-            </a:ln>
-          </p:spPr>
-          <p:txBody>
-            <a:bodyPr spcFirstLastPara="1" wrap="square" lIns="91425" tIns="91425" rIns="91425" bIns="91425" anchor="t" anchorCtr="0">
-              <a:spAutoFit/>
-            </a:bodyPr>
-            <a:lstStyle/>
-            <a:p>
-              <a:pPr marL="0" lvl="0" indent="0" algn="l" rtl="0">
-                <a:spcBef>
-                  <a:spcPts val="0"/>
-                </a:spcBef>
-                <a:spcAft>
-                  <a:spcPts val="0"/>
-                </a:spcAft>
-                <a:buNone/>
-              </a:pPr>
-              <a:r>
-                <a:rPr lang="en" sz="2800" dirty="0">
-                  <a:solidFill>
-                    <a:schemeClr val="accent3"/>
-                  </a:solidFill>
-                  <a:latin typeface="Fira Code"/>
-                  <a:ea typeface="Fira Code"/>
-                  <a:cs typeface="Fira Code"/>
-                  <a:sym typeface="Fira Code"/>
-                </a:rPr>
-                <a:t>}</a:t>
-              </a:r>
-              <a:endParaRPr sz="2800" dirty="0">
-                <a:solidFill>
-                  <a:schemeClr val="accent3"/>
-                </a:solidFill>
-                <a:latin typeface="Fira Code"/>
-                <a:ea typeface="Fira Code"/>
-                <a:cs typeface="Fira Code"/>
-                <a:sym typeface="Fira Code"/>
-              </a:endParaRPr>
-            </a:p>
-          </p:txBody>
-        </p:sp>
-      </p:grpSp>
-      <p:sp>
-        <p:nvSpPr>
-          <p:cNvPr id="465" name="Google Shape;465;p27"/>
-          <p:cNvSpPr txBox="1">
-            <a:spLocks noGrp="1"/>
-          </p:cNvSpPr>
-          <p:nvPr>
-            <p:ph type="subTitle" idx="1"/>
-          </p:nvPr>
-        </p:nvSpPr>
-        <p:spPr>
-          <a:xfrm>
-            <a:off x="-5975" y="91525"/>
-            <a:ext cx="4572000" cy="357300"/>
-          </a:xfrm>
-          <a:prstGeom prst="rect">
-            <a:avLst/>
-          </a:prstGeom>
-        </p:spPr>
-        <p:txBody>
-          <a:bodyPr spcFirstLastPara="1" wrap="square" lIns="91425" tIns="91425" rIns="91425" bIns="91425" anchor="ctr" anchorCtr="0">
-            <a:noAutofit/>
-          </a:bodyPr>
-          <a:lstStyle/>
-          <a:p>
-            <a:pPr marL="0" lvl="0" indent="0" algn="ctr" rtl="0">
-              <a:spcBef>
-                <a:spcPts val="0"/>
-              </a:spcBef>
-              <a:spcAft>
-                <a:spcPts val="0"/>
-              </a:spcAft>
-              <a:buNone/>
-            </a:pPr>
-            <a:r>
-              <a:rPr lang="en-US" sz="1400" dirty="0" smtClean="0"/>
-              <a:t>server</a:t>
-            </a:r>
-            <a:r>
-              <a:rPr lang="en" sz="1400" dirty="0" smtClean="0">
-                <a:solidFill>
-                  <a:schemeClr val="accent3"/>
-                </a:solidFill>
-              </a:rPr>
-              <a:t>.cpp</a:t>
-            </a:r>
-            <a:endParaRPr sz="1400" dirty="0">
-              <a:solidFill>
-                <a:schemeClr val="accent3"/>
-              </a:solidFill>
-            </a:endParaRPr>
-          </a:p>
-        </p:txBody>
-      </p:sp>
-      <p:sp>
-        <p:nvSpPr>
-          <p:cNvPr id="466" name="Google Shape;466;p27"/>
-          <p:cNvSpPr txBox="1">
-            <a:spLocks noGrp="1"/>
-          </p:cNvSpPr>
-          <p:nvPr>
-            <p:ph type="subTitle" idx="1"/>
-          </p:nvPr>
-        </p:nvSpPr>
-        <p:spPr>
-          <a:xfrm>
-            <a:off x="4572000" y="91525"/>
-            <a:ext cx="4572000" cy="357300"/>
-          </a:xfrm>
-          <a:prstGeom prst="rect">
-            <a:avLst/>
-          </a:prstGeom>
-        </p:spPr>
-        <p:txBody>
-          <a:bodyPr spcFirstLastPara="1" wrap="square" lIns="91425" tIns="91425" rIns="91425" bIns="91425" anchor="ctr" anchorCtr="0">
-            <a:noAutofit/>
-          </a:bodyPr>
-          <a:lstStyle/>
-          <a:p>
-            <a:pPr marL="0" lvl="0" indent="0" algn="ctr"/>
-            <a:r>
-              <a:rPr lang="en-US" sz="1400" dirty="0" smtClean="0"/>
-              <a:t>client.cpp</a:t>
-            </a:r>
-            <a:endParaRPr lang="en-US" sz="1400" dirty="0"/>
-          </a:p>
-        </p:txBody>
-      </p:sp>
-      <p:sp>
-        <p:nvSpPr>
-          <p:cNvPr id="22" name="Google Shape;853;p42"/>
-          <p:cNvSpPr txBox="1">
-            <a:spLocks noGrp="1"/>
-          </p:cNvSpPr>
-          <p:nvPr>
-            <p:ph type="subTitle" idx="1"/>
-          </p:nvPr>
-        </p:nvSpPr>
-        <p:spPr>
-          <a:xfrm>
-            <a:off x="1763688" y="1779662"/>
-            <a:ext cx="3627600" cy="2016224"/>
-          </a:xfrm>
-          <a:prstGeom prst="rect">
-            <a:avLst/>
-          </a:prstGeom>
-        </p:spPr>
-        <p:txBody>
-          <a:bodyPr spcFirstLastPara="1" wrap="square" lIns="91425" tIns="91425" rIns="91425" bIns="91425" anchor="ctr" anchorCtr="0">
-            <a:noAutofit/>
-          </a:bodyPr>
-          <a:lstStyle/>
-          <a:p>
-            <a:pPr marL="0" lvl="0" indent="0"/>
-            <a:r>
-              <a:rPr lang="en" sz="1400" dirty="0"/>
-              <a:t>&lt; </a:t>
-            </a:r>
-            <a:r>
-              <a:rPr lang="ru-RU" sz="1400" dirty="0" smtClean="0"/>
-              <a:t>Далее разберем суть работы функции </a:t>
-            </a:r>
-            <a:r>
-              <a:rPr lang="en-US" sz="1400" dirty="0" smtClean="0"/>
-              <a:t>main: </a:t>
-            </a:r>
-            <a:r>
-              <a:rPr lang="ru-RU" sz="1400" dirty="0" smtClean="0"/>
-              <a:t>Это </a:t>
-            </a:r>
-            <a:r>
-              <a:rPr lang="ru-RU" sz="1400" b="1" dirty="0" smtClean="0"/>
-              <a:t>точка входа сервера</a:t>
-            </a:r>
-            <a:r>
-              <a:rPr lang="ru-RU" sz="1400" dirty="0" smtClean="0"/>
-              <a:t>: инициализирует сеть, загадывает число и бесконечно принимает новых клиентов, запуская для каждого отдельный поток.</a:t>
-            </a:r>
-            <a:r>
-              <a:rPr lang="en-US" sz="1400" dirty="0" smtClean="0"/>
-              <a:t> </a:t>
-            </a:r>
-            <a:r>
-              <a:rPr lang="ru-RU" sz="1400" dirty="0" err="1" smtClean="0"/>
-              <a:t>secretNumber</a:t>
-            </a:r>
-            <a:r>
-              <a:rPr lang="ru-RU" sz="1400" dirty="0" smtClean="0"/>
-              <a:t> генерируется </a:t>
-            </a:r>
-            <a:r>
-              <a:rPr lang="ru-RU" sz="1400" b="1" dirty="0" smtClean="0"/>
-              <a:t>один раз при старте сервера</a:t>
-            </a:r>
-            <a:r>
-              <a:rPr lang="ru-RU" sz="1400" dirty="0" smtClean="0"/>
-              <a:t> — все клиенты угадывают одно и то же число.</a:t>
-            </a:r>
-            <a:r>
-              <a:rPr lang="en-US" sz="1400" dirty="0" smtClean="0"/>
-              <a:t> </a:t>
-            </a:r>
-            <a:r>
-              <a:rPr lang="en" sz="1400" dirty="0" smtClean="0"/>
-              <a:t>&gt;</a:t>
-            </a:r>
-            <a:endParaRPr sz="1400" dirty="0"/>
-          </a:p>
-        </p:txBody>
-      </p:sp>
-      <p:grpSp>
-        <p:nvGrpSpPr>
-          <p:cNvPr id="25" name="Google Shape;2531;p48"/>
-          <p:cNvGrpSpPr/>
-          <p:nvPr/>
-        </p:nvGrpSpPr>
-        <p:grpSpPr>
-          <a:xfrm>
-            <a:off x="5580112" y="948075"/>
-            <a:ext cx="3439196" cy="2775803"/>
-            <a:chOff x="4994678" y="1173377"/>
-            <a:chExt cx="3439196" cy="2775803"/>
-          </a:xfrm>
-        </p:grpSpPr>
-        <p:grpSp>
-          <p:nvGrpSpPr>
-            <p:cNvPr id="26" name="Google Shape;2532;p48"/>
-            <p:cNvGrpSpPr/>
-            <p:nvPr/>
-          </p:nvGrpSpPr>
-          <p:grpSpPr>
-            <a:xfrm>
-              <a:off x="4994678" y="1173377"/>
-              <a:ext cx="3439196" cy="2775803"/>
-              <a:chOff x="4572031" y="1415284"/>
-              <a:chExt cx="2875341" cy="2319354"/>
-            </a:xfrm>
-          </p:grpSpPr>
-          <p:grpSp>
-            <p:nvGrpSpPr>
-              <p:cNvPr id="28" name="Google Shape;2533;p48"/>
-              <p:cNvGrpSpPr/>
-              <p:nvPr/>
-            </p:nvGrpSpPr>
-            <p:grpSpPr>
-              <a:xfrm>
-                <a:off x="4572031" y="1415284"/>
-                <a:ext cx="2875341" cy="1993075"/>
-                <a:chOff x="3665860" y="822037"/>
-                <a:chExt cx="4758136" cy="3243937"/>
-              </a:xfrm>
-            </p:grpSpPr>
-            <p:grpSp>
-              <p:nvGrpSpPr>
-                <p:cNvPr id="30" name="Google Shape;2534;p48"/>
-                <p:cNvGrpSpPr/>
-                <p:nvPr/>
-              </p:nvGrpSpPr>
-              <p:grpSpPr>
-                <a:xfrm>
-                  <a:off x="3665860" y="822037"/>
-                  <a:ext cx="4758136" cy="3243937"/>
-                  <a:chOff x="518725" y="252435"/>
-                  <a:chExt cx="6524250" cy="4448015"/>
-                </a:xfrm>
-              </p:grpSpPr>
-              <p:sp>
-                <p:nvSpPr>
-                  <p:cNvPr id="32" name="Google Shape;2535;p48"/>
-                  <p:cNvSpPr/>
-                  <p:nvPr/>
-                </p:nvSpPr>
-                <p:spPr>
-                  <a:xfrm>
-                    <a:off x="518725" y="4131625"/>
-                    <a:ext cx="6524250" cy="568825"/>
-                  </a:xfrm>
-                  <a:custGeom>
-                    <a:avLst/>
-                    <a:gdLst/>
-                    <a:ahLst/>
-                    <a:cxnLst/>
-                    <a:rect l="l" t="t" r="r" b="b"/>
-                    <a:pathLst>
-                      <a:path w="260970" h="22753" extrusionOk="0">
-                        <a:moveTo>
-                          <a:pt x="0" y="14846"/>
-                        </a:moveTo>
-                        <a:cubicBezTo>
-                          <a:pt x="0" y="19169"/>
-                          <a:pt x="4039" y="22753"/>
-                          <a:pt x="8305" y="22753"/>
-                        </a:cubicBezTo>
-                        <a:lnTo>
-                          <a:pt x="253120" y="22753"/>
-                        </a:lnTo>
-                        <a:cubicBezTo>
-                          <a:pt x="257443" y="22696"/>
-                          <a:pt x="260913" y="19169"/>
-                          <a:pt x="260970" y="14846"/>
-                        </a:cubicBezTo>
-                        <a:lnTo>
-                          <a:pt x="260970" y="0"/>
-                        </a:lnTo>
-                        <a:lnTo>
-                          <a:pt x="0" y="0"/>
-                        </a:lnTo>
-                        <a:close/>
-                      </a:path>
-                    </a:pathLst>
-                  </a:custGeom>
-                  <a:solidFill>
-                    <a:schemeClr val="dk1"/>
-                  </a:solidFill>
-                  <a:ln w="9525" cap="flat" cmpd="sng">
-                    <a:solidFill>
-                      <a:schemeClr val="accent3"/>
-                    </a:solidFill>
-                    <a:prstDash val="solid"/>
-                    <a:round/>
-                    <a:headEnd type="none" w="sm" len="sm"/>
-                    <a:tailEnd type="none" w="sm" len="sm"/>
-                  </a:ln>
-                </p:spPr>
-                <p:txBody>
-                  <a:bodyPr spcFirstLastPara="1" wrap="square" lIns="91425" tIns="91425" rIns="91425" bIns="91425" anchor="ctr" anchorCtr="0">
-                    <a:noAutofit/>
-                  </a:bodyPr>
-                  <a:lstStyle/>
-                  <a:p>
-                    <a:pPr marL="0" lvl="0" indent="0" algn="l" rtl="0">
-                      <a:spcBef>
-                        <a:spcPts val="0"/>
-                      </a:spcBef>
-                      <a:spcAft>
-                        <a:spcPts val="0"/>
-                      </a:spcAft>
-                      <a:buNone/>
-                    </a:pPr>
-                    <a:endParaRPr>
-                      <a:solidFill>
-                        <a:schemeClr val="accent3"/>
-                      </a:solidFill>
-                    </a:endParaRPr>
-                  </a:p>
-                </p:txBody>
-              </p:sp>
-              <p:sp>
-                <p:nvSpPr>
-                  <p:cNvPr id="33" name="Google Shape;2536;p48"/>
-                  <p:cNvSpPr/>
-                  <p:nvPr/>
-                </p:nvSpPr>
-                <p:spPr>
-                  <a:xfrm>
-                    <a:off x="518725" y="252435"/>
-                    <a:ext cx="6524250" cy="3893525"/>
-                  </a:xfrm>
-                  <a:custGeom>
-                    <a:avLst/>
-                    <a:gdLst/>
-                    <a:ahLst/>
-                    <a:cxnLst/>
-                    <a:rect l="l" t="t" r="r" b="b"/>
-                    <a:pathLst>
-                      <a:path w="260970" h="155741" extrusionOk="0">
-                        <a:moveTo>
-                          <a:pt x="249594" y="9954"/>
-                        </a:moveTo>
-                        <a:lnTo>
-                          <a:pt x="249594" y="144364"/>
-                        </a:lnTo>
-                        <a:lnTo>
-                          <a:pt x="11376" y="144364"/>
-                        </a:lnTo>
-                        <a:lnTo>
-                          <a:pt x="11376" y="9954"/>
-                        </a:lnTo>
-                        <a:close/>
-                        <a:moveTo>
-                          <a:pt x="8305" y="0"/>
-                        </a:moveTo>
-                        <a:cubicBezTo>
-                          <a:pt x="4039" y="0"/>
-                          <a:pt x="0" y="2844"/>
-                          <a:pt x="0" y="7110"/>
-                        </a:cubicBezTo>
-                        <a:lnTo>
-                          <a:pt x="0" y="155740"/>
-                        </a:lnTo>
-                        <a:lnTo>
-                          <a:pt x="260970" y="155740"/>
-                        </a:lnTo>
-                        <a:lnTo>
-                          <a:pt x="260970" y="7110"/>
-                        </a:lnTo>
-                        <a:cubicBezTo>
-                          <a:pt x="260970" y="2844"/>
-                          <a:pt x="257386" y="0"/>
-                          <a:pt x="253120" y="0"/>
-                        </a:cubicBezTo>
-                        <a:close/>
-                      </a:path>
-                    </a:pathLst>
-                  </a:custGeom>
-                  <a:solidFill>
-                    <a:schemeClr val="dk1"/>
-                  </a:solidFill>
-                  <a:ln w="9525" cap="flat" cmpd="sng">
-                    <a:solidFill>
-                      <a:schemeClr val="accent3"/>
-                    </a:solidFill>
-                    <a:prstDash val="solid"/>
-                    <a:round/>
-                    <a:headEnd type="none" w="sm" len="sm"/>
-                    <a:tailEnd type="none" w="sm" len="sm"/>
-                  </a:ln>
-                </p:spPr>
-                <p:txBody>
-                  <a:bodyPr spcFirstLastPara="1" wrap="square" lIns="91425" tIns="91425" rIns="91425" bIns="91425" anchor="ctr" anchorCtr="0">
-                    <a:noAutofit/>
-                  </a:bodyPr>
-                  <a:lstStyle/>
-                  <a:p>
-                    <a:pPr marL="0" lvl="0" indent="0" algn="l" rtl="0">
-                      <a:spcBef>
-                        <a:spcPts val="0"/>
-                      </a:spcBef>
-                      <a:spcAft>
-                        <a:spcPts val="0"/>
-                      </a:spcAft>
-                      <a:buNone/>
-                    </a:pPr>
-                    <a:endParaRPr>
-                      <a:solidFill>
-                        <a:schemeClr val="accent3"/>
-                      </a:solidFill>
-                    </a:endParaRPr>
-                  </a:p>
-                </p:txBody>
-              </p:sp>
-            </p:grpSp>
-            <p:sp>
-              <p:nvSpPr>
-                <p:cNvPr id="31" name="Google Shape;2537;p48"/>
-                <p:cNvSpPr/>
-                <p:nvPr/>
-              </p:nvSpPr>
-              <p:spPr>
-                <a:xfrm>
-                  <a:off x="5947879" y="3778845"/>
-                  <a:ext cx="194076" cy="166189"/>
-                </a:xfrm>
-                <a:custGeom>
-                  <a:avLst/>
-                  <a:gdLst/>
-                  <a:ahLst/>
-                  <a:cxnLst/>
-                  <a:rect l="l" t="t" r="r" b="b"/>
-                  <a:pathLst>
-                    <a:path w="10627" h="9100" extrusionOk="0">
-                      <a:moveTo>
-                        <a:pt x="6092" y="0"/>
-                      </a:moveTo>
-                      <a:cubicBezTo>
-                        <a:pt x="2020" y="0"/>
-                        <a:pt x="0" y="4900"/>
-                        <a:pt x="2881" y="7747"/>
-                      </a:cubicBezTo>
-                      <a:cubicBezTo>
-                        <a:pt x="3804" y="8681"/>
-                        <a:pt x="4944" y="9100"/>
-                        <a:pt x="6063" y="9100"/>
-                      </a:cubicBezTo>
-                      <a:cubicBezTo>
-                        <a:pt x="8391" y="9100"/>
-                        <a:pt x="10627" y="7286"/>
-                        <a:pt x="10627" y="4536"/>
-                      </a:cubicBezTo>
-                      <a:cubicBezTo>
-                        <a:pt x="10627" y="2020"/>
-                        <a:pt x="8608" y="0"/>
-                        <a:pt x="6092" y="0"/>
-                      </a:cubicBezTo>
-                      <a:close/>
-                    </a:path>
-                  </a:pathLst>
-                </a:custGeom>
-                <a:noFill/>
-                <a:ln w="9525" cap="flat" cmpd="sng">
-                  <a:solidFill>
-                    <a:schemeClr val="accent3"/>
-                  </a:solidFill>
-                  <a:prstDash val="solid"/>
-                  <a:round/>
-                  <a:headEnd type="none" w="sm" len="sm"/>
-                  <a:tailEnd type="none" w="sm" len="sm"/>
-                </a:ln>
-              </p:spPr>
-              <p:txBody>
-                <a:bodyPr spcFirstLastPara="1" wrap="square" lIns="91425" tIns="91425" rIns="91425" bIns="91425" anchor="ctr" anchorCtr="0">
-                  <a:noAutofit/>
-                </a:bodyPr>
-                <a:lstStyle/>
-                <a:p>
-                  <a:pPr marL="0" lvl="0" indent="0" algn="l" rtl="0">
-                    <a:spcBef>
-                      <a:spcPts val="0"/>
-                    </a:spcBef>
-                    <a:spcAft>
-                      <a:spcPts val="0"/>
-                    </a:spcAft>
-                    <a:buNone/>
-                  </a:pPr>
-                  <a:endParaRPr>
-                    <a:solidFill>
-                      <a:schemeClr val="accent3"/>
-                    </a:solidFill>
-                  </a:endParaRPr>
-                </a:p>
-              </p:txBody>
-            </p:sp>
-          </p:grpSp>
-          <p:sp>
-            <p:nvSpPr>
-              <p:cNvPr id="29" name="Google Shape;2538;p48"/>
-              <p:cNvSpPr/>
-              <p:nvPr/>
-            </p:nvSpPr>
-            <p:spPr>
-              <a:xfrm>
-                <a:off x="5498909" y="3408365"/>
-                <a:ext cx="1040944" cy="326273"/>
-              </a:xfrm>
-              <a:custGeom>
-                <a:avLst/>
-                <a:gdLst/>
-                <a:ahLst/>
-                <a:cxnLst/>
-                <a:rect l="l" t="t" r="r" b="b"/>
-                <a:pathLst>
-                  <a:path w="94481" h="29125" extrusionOk="0">
-                    <a:moveTo>
-                      <a:pt x="79805" y="18317"/>
-                    </a:moveTo>
-                    <a:cubicBezTo>
-                      <a:pt x="74117" y="12515"/>
-                      <a:pt x="73889" y="1"/>
-                      <a:pt x="73889" y="1"/>
-                    </a:cubicBezTo>
-                    <a:lnTo>
-                      <a:pt x="20592" y="1"/>
-                    </a:lnTo>
-                    <a:cubicBezTo>
-                      <a:pt x="20592" y="1"/>
-                      <a:pt x="20364" y="12515"/>
-                      <a:pt x="14676" y="18317"/>
-                    </a:cubicBezTo>
-                    <a:cubicBezTo>
-                      <a:pt x="8931" y="24175"/>
-                      <a:pt x="1" y="29124"/>
-                      <a:pt x="15529" y="29124"/>
-                    </a:cubicBezTo>
-                    <a:lnTo>
-                      <a:pt x="78952" y="29124"/>
-                    </a:lnTo>
-                    <a:cubicBezTo>
-                      <a:pt x="94480" y="29124"/>
-                      <a:pt x="85493" y="24175"/>
-                      <a:pt x="79805" y="18317"/>
-                    </a:cubicBezTo>
-                    <a:close/>
-                  </a:path>
-                </a:pathLst>
-              </a:custGeom>
-              <a:solidFill>
-                <a:schemeClr val="dk1"/>
-              </a:solidFill>
-              <a:ln w="9525" cap="flat" cmpd="sng">
-                <a:solidFill>
-                  <a:schemeClr val="accent3"/>
-                </a:solidFill>
-                <a:prstDash val="solid"/>
-                <a:round/>
-                <a:headEnd type="none" w="sm" len="sm"/>
-                <a:tailEnd type="none" w="sm" len="sm"/>
-              </a:ln>
-            </p:spPr>
-            <p:txBody>
-              <a:bodyPr spcFirstLastPara="1" wrap="square" lIns="91425" tIns="91425" rIns="91425" bIns="91425" anchor="ctr" anchorCtr="0">
-                <a:noAutofit/>
-              </a:bodyPr>
-              <a:lstStyle/>
-              <a:p>
-                <a:pPr marL="0" lvl="0" indent="0" algn="l" rtl="0">
-                  <a:spcBef>
-                    <a:spcPts val="0"/>
-                  </a:spcBef>
-                  <a:spcAft>
-                    <a:spcPts val="0"/>
-                  </a:spcAft>
-                  <a:buNone/>
-                </a:pPr>
-                <a:endParaRPr>
-                  <a:solidFill>
-                    <a:schemeClr val="accent3"/>
-                  </a:solidFill>
-                </a:endParaRPr>
-              </a:p>
-            </p:txBody>
-          </p:sp>
-        </p:grpSp>
-        <p:cxnSp>
-          <p:nvCxnSpPr>
-            <p:cNvPr id="27" name="Google Shape;2539;p48"/>
-            <p:cNvCxnSpPr/>
-            <p:nvPr/>
-          </p:nvCxnSpPr>
-          <p:spPr>
-            <a:xfrm rot="10800000">
-              <a:off x="5370275" y="3949180"/>
-              <a:ext cx="2688000" cy="0"/>
-            </a:xfrm>
-            <a:prstGeom prst="straightConnector1">
-              <a:avLst/>
-            </a:prstGeom>
-            <a:noFill/>
-            <a:ln w="9525" cap="flat" cmpd="sng">
-              <a:solidFill>
-                <a:schemeClr val="accent3"/>
-              </a:solidFill>
-              <a:prstDash val="solid"/>
-              <a:round/>
-              <a:headEnd type="none" w="med" len="med"/>
-              <a:tailEnd type="none" w="med" len="med"/>
-            </a:ln>
-          </p:spPr>
-        </p:cxnSp>
-      </p:grpSp>
-      <p:pic>
-        <p:nvPicPr>
-          <p:cNvPr id="8194" name="Picture 2"/>
-          <p:cNvPicPr>
-            <a:picLocks noChangeAspect="1" noChangeArrowheads="1"/>
-          </p:cNvPicPr>
-          <p:nvPr/>
-        </p:nvPicPr>
-        <p:blipFill>
-          <a:blip r:embed="rId3"/>
-          <a:srcRect/>
-          <a:stretch>
-            <a:fillRect/>
-          </a:stretch>
-        </p:blipFill>
-        <p:spPr bwMode="auto">
-          <a:xfrm>
-            <a:off x="5868144" y="1131590"/>
-            <a:ext cx="2880320" cy="1728192"/>
-          </a:xfrm>
-          <a:prstGeom prst="rect">
-            <a:avLst/>
-          </a:prstGeom>
-          <a:noFill/>
-          <a:ln w="9525">
-            <a:noFill/>
-            <a:miter lim="800000"/>
-            <a:headEnd/>
-            <a:tailEnd/>
-          </a:ln>
-        </p:spPr>
-      </p:pic>
-    </p:spTree>
-  </p:cSld>
-  <p:clrMapOvr>
-    <a:masterClrMapping/>
-  </p:clrMapOvr>
-  <p:transition>
-    <p:pull dir="u"/>
-  </p:transition>
-  <p:timing>
-    <p:tnLst>
-      <p:par>
-        <p:cTn id="1" dur="indefinite" restart="never" nodeType="tmRoot"/>
-      </p:par>
-    </p:tnLst>
-  </p:timing>
-</p:sld>
-</file>
-
-<file path=ppt/slides/slide6.xml><?xml version="1.0" encoding="utf-8"?>
+<file path=ppt/slides/slide10.xml><?xml version="1.0" encoding="utf-8"?>
 <p:sld xmlns:a="http://schemas.openxmlformats.org/drawingml/2006/main" xmlns:r="http://schemas.openxmlformats.org/officeDocument/2006/relationships" xmlns:p="http://schemas.openxmlformats.org/presentationml/2006/main">
   <p:cSld>
     <p:spTree>
@@ -19147,7 +15679,7 @@
 </p:sld>
 </file>
 
-<file path=ppt/slides/slide7.xml><?xml version="1.0" encoding="utf-8"?>
+<file path=ppt/slides/slide11.xml><?xml version="1.0" encoding="utf-8"?>
 <p:sld xmlns:a="http://schemas.openxmlformats.org/drawingml/2006/main" xmlns:r="http://schemas.openxmlformats.org/officeDocument/2006/relationships" xmlns:p="http://schemas.openxmlformats.org/presentationml/2006/main">
   <p:cSld>
     <p:spTree>
@@ -22980,7 +19512,7 @@
 </p:sld>
 </file>
 
-<file path=ppt/slides/slide8.xml><?xml version="1.0" encoding="utf-8"?>
+<file path=ppt/slides/slide12.xml><?xml version="1.0" encoding="utf-8"?>
 <p:sld xmlns:a="http://schemas.openxmlformats.org/drawingml/2006/main" xmlns:r="http://schemas.openxmlformats.org/officeDocument/2006/relationships" xmlns:p="http://schemas.openxmlformats.org/presentationml/2006/main">
   <p:cSld>
     <p:spTree>
@@ -23345,6 +19877,5258 @@
   </p:clrMapOvr>
   <p:transition>
     <p:fade thruBlk="1"/>
+  </p:transition>
+  <p:timing>
+    <p:tnLst>
+      <p:par>
+        <p:cTn id="1" dur="indefinite" restart="never" nodeType="tmRoot"/>
+      </p:par>
+    </p:tnLst>
+  </p:timing>
+</p:sld>
+</file>
+
+<file path=ppt/slides/slide2.xml><?xml version="1.0" encoding="utf-8"?>
+<p:sld xmlns:a="http://schemas.openxmlformats.org/drawingml/2006/main" xmlns:r="http://schemas.openxmlformats.org/officeDocument/2006/relationships" xmlns:p="http://schemas.openxmlformats.org/presentationml/2006/main">
+  <p:cSld>
+    <p:spTree>
+      <p:nvGrpSpPr>
+        <p:cNvPr id="1" name="Shape 470"/>
+        <p:cNvGrpSpPr/>
+        <p:nvPr/>
+      </p:nvGrpSpPr>
+      <p:grpSpPr>
+        <a:xfrm>
+          <a:off x="0" y="0"/>
+          <a:ext cx="0" cy="0"/>
+          <a:chOff x="0" y="0"/>
+          <a:chExt cx="0" cy="0"/>
+        </a:xfrm>
+      </p:grpSpPr>
+      <p:sp>
+        <p:nvSpPr>
+          <p:cNvPr id="471" name="Google Shape;471;p28"/>
+          <p:cNvSpPr txBox="1">
+            <a:spLocks noGrp="1"/>
+          </p:cNvSpPr>
+          <p:nvPr>
+            <p:ph type="title"/>
+          </p:nvPr>
+        </p:nvSpPr>
+        <p:spPr>
+          <a:xfrm>
+            <a:off x="1143250" y="582700"/>
+            <a:ext cx="7290600" cy="541200"/>
+          </a:xfrm>
+          <a:prstGeom prst="rect">
+            <a:avLst/>
+          </a:prstGeom>
+        </p:spPr>
+        <p:txBody>
+          <a:bodyPr spcFirstLastPara="1" wrap="square" lIns="91425" tIns="91425" rIns="91425" bIns="91425" anchor="t" anchorCtr="0">
+            <a:noAutofit/>
+          </a:bodyPr>
+          <a:lstStyle/>
+          <a:p>
+            <a:pPr marL="0" lvl="0" indent="0" algn="l" rtl="0">
+              <a:spcBef>
+                <a:spcPts val="0"/>
+              </a:spcBef>
+              <a:spcAft>
+                <a:spcPts val="0"/>
+              </a:spcAft>
+              <a:buNone/>
+            </a:pPr>
+            <a:r>
+              <a:rPr lang="ru-RU" dirty="0" smtClean="0"/>
+              <a:t>Цели и задачи проекта</a:t>
+            </a:r>
+            <a:endParaRPr dirty="0">
+              <a:solidFill>
+                <a:schemeClr val="accent2"/>
+              </a:solidFill>
+            </a:endParaRPr>
+          </a:p>
+        </p:txBody>
+      </p:sp>
+      <p:sp>
+        <p:nvSpPr>
+          <p:cNvPr id="472" name="Google Shape;472;p28"/>
+          <p:cNvSpPr txBox="1">
+            <a:spLocks noGrp="1"/>
+          </p:cNvSpPr>
+          <p:nvPr>
+            <p:ph type="body" idx="1"/>
+          </p:nvPr>
+        </p:nvSpPr>
+        <p:spPr>
+          <a:xfrm>
+            <a:off x="1464250" y="1063175"/>
+            <a:ext cx="6969600" cy="3416400"/>
+          </a:xfrm>
+          <a:prstGeom prst="rect">
+            <a:avLst/>
+          </a:prstGeom>
+        </p:spPr>
+        <p:txBody>
+          <a:bodyPr spcFirstLastPara="1" wrap="square" lIns="91425" tIns="91425" rIns="91425" bIns="91425" anchor="ctr" anchorCtr="0">
+            <a:noAutofit/>
+          </a:bodyPr>
+          <a:lstStyle/>
+          <a:p>
+            <a:pPr marL="0" indent="0">
+              <a:buNone/>
+            </a:pPr>
+            <a:r>
+              <a:rPr lang="ru-RU" sz="1400" dirty="0" smtClean="0">
+                <a:solidFill>
+                  <a:schemeClr val="accent3"/>
+                </a:solidFill>
+              </a:rPr>
+              <a:t>Цель: разработать приложение </a:t>
+            </a:r>
+            <a:r>
+              <a:rPr lang="ru-RU" sz="1400" smtClean="0">
+                <a:solidFill>
+                  <a:schemeClr val="accent3"/>
+                </a:solidFill>
+              </a:rPr>
+              <a:t>используя </a:t>
+            </a:r>
+            <a:r>
+              <a:rPr lang="ru-RU" sz="1400" b="1" smtClean="0">
+                <a:solidFill>
+                  <a:srgbClr val="FF5858"/>
+                </a:solidFill>
+              </a:rPr>
+              <a:t>указатели</a:t>
+            </a:r>
+            <a:r>
+              <a:rPr lang="ru-RU" sz="1400" smtClean="0">
+                <a:solidFill>
+                  <a:schemeClr val="accent3"/>
+                </a:solidFill>
+              </a:rPr>
+              <a:t>, </a:t>
+            </a:r>
+            <a:r>
+              <a:rPr lang="ru-RU" sz="1400" b="1" dirty="0" smtClean="0">
+                <a:solidFill>
+                  <a:srgbClr val="FF5858"/>
+                </a:solidFill>
+              </a:rPr>
+              <a:t>потоки</a:t>
+            </a:r>
+            <a:r>
+              <a:rPr lang="ru-RU" sz="1400" dirty="0" smtClean="0">
+                <a:solidFill>
+                  <a:schemeClr val="accent3"/>
+                </a:solidFill>
+              </a:rPr>
+              <a:t> и </a:t>
+            </a:r>
+            <a:r>
+              <a:rPr lang="ru-RU" sz="1400" b="1" dirty="0" smtClean="0">
+                <a:solidFill>
+                  <a:srgbClr val="FF5858"/>
+                </a:solidFill>
+              </a:rPr>
+              <a:t>сокеты</a:t>
+            </a:r>
+            <a:r>
+              <a:rPr lang="ru-RU" sz="1400" dirty="0" smtClean="0">
+                <a:solidFill>
+                  <a:schemeClr val="accent3"/>
+                </a:solidFill>
+              </a:rPr>
+              <a:t>.</a:t>
+            </a:r>
+          </a:p>
+          <a:p>
+            <a:pPr marL="0" lvl="0" indent="0" algn="l" rtl="0">
+              <a:spcBef>
+                <a:spcPts val="0"/>
+              </a:spcBef>
+              <a:spcAft>
+                <a:spcPts val="0"/>
+              </a:spcAft>
+              <a:buNone/>
+            </a:pPr>
+            <a:r>
+              <a:rPr lang="ru-RU" sz="1400" dirty="0" smtClean="0">
+                <a:solidFill>
+                  <a:schemeClr val="accent3"/>
+                </a:solidFill>
+              </a:rPr>
+              <a:t>Задачи</a:t>
+            </a:r>
+            <a:r>
+              <a:rPr lang="en" sz="1400" dirty="0" smtClean="0">
+                <a:solidFill>
+                  <a:schemeClr val="accent3"/>
+                </a:solidFill>
+              </a:rPr>
+              <a:t>: </a:t>
+            </a:r>
+            <a:endParaRPr sz="1400" dirty="0">
+              <a:solidFill>
+                <a:schemeClr val="accent3"/>
+              </a:solidFill>
+            </a:endParaRPr>
+          </a:p>
+          <a:p>
+            <a:pPr marL="457200" lvl="0" indent="-292100" algn="l" rtl="0">
+              <a:spcBef>
+                <a:spcPts val="0"/>
+              </a:spcBef>
+              <a:spcAft>
+                <a:spcPts val="0"/>
+              </a:spcAft>
+              <a:buClr>
+                <a:schemeClr val="accent3"/>
+              </a:buClr>
+              <a:buSzPts val="1000"/>
+              <a:buChar char="∗"/>
+            </a:pPr>
+            <a:r>
+              <a:rPr lang="ru-RU" sz="1400" dirty="0" smtClean="0">
+                <a:solidFill>
+                  <a:schemeClr val="accent3"/>
+                </a:solidFill>
+              </a:rPr>
+              <a:t>Изучить работу с </a:t>
+            </a:r>
+            <a:r>
+              <a:rPr lang="ru-RU" sz="1400" b="1" dirty="0" smtClean="0">
+                <a:solidFill>
+                  <a:srgbClr val="FF5858"/>
+                </a:solidFill>
+                <a:uFill>
+                  <a:noFill/>
+                </a:uFill>
+              </a:rPr>
+              <a:t>сокетами</a:t>
+            </a:r>
+            <a:r>
+              <a:rPr lang="en" sz="1400" dirty="0" smtClean="0">
+                <a:solidFill>
+                  <a:schemeClr val="accent3"/>
+                </a:solidFill>
+              </a:rPr>
+              <a:t>.</a:t>
+            </a:r>
+            <a:endParaRPr sz="1400" dirty="0">
+              <a:solidFill>
+                <a:schemeClr val="accent3"/>
+              </a:solidFill>
+            </a:endParaRPr>
+          </a:p>
+          <a:p>
+            <a:pPr marL="457200" lvl="0" indent="-292100" algn="l" rtl="0">
+              <a:spcBef>
+                <a:spcPts val="0"/>
+              </a:spcBef>
+              <a:spcAft>
+                <a:spcPts val="0"/>
+              </a:spcAft>
+              <a:buClr>
+                <a:schemeClr val="accent3"/>
+              </a:buClr>
+              <a:buSzPts val="1000"/>
+              <a:buChar char="∗"/>
+            </a:pPr>
+            <a:r>
+              <a:rPr lang="ru-RU" sz="1400" dirty="0" smtClean="0">
+                <a:solidFill>
+                  <a:schemeClr val="accent3"/>
+                </a:solidFill>
+              </a:rPr>
+              <a:t>Реализовать управление </a:t>
+            </a:r>
+            <a:r>
+              <a:rPr lang="ru-RU" sz="1400" b="1" dirty="0" smtClean="0">
+                <a:solidFill>
+                  <a:srgbClr val="FF5858"/>
+                </a:solidFill>
+              </a:rPr>
+              <a:t>памятью</a:t>
+            </a:r>
+            <a:r>
+              <a:rPr lang="en" sz="1400" dirty="0" smtClean="0">
+                <a:solidFill>
+                  <a:schemeClr val="accent3"/>
+                </a:solidFill>
+              </a:rPr>
+              <a:t>.</a:t>
+            </a:r>
+            <a:endParaRPr sz="1400" dirty="0">
+              <a:solidFill>
+                <a:schemeClr val="accent3"/>
+              </a:solidFill>
+            </a:endParaRPr>
+          </a:p>
+          <a:p>
+            <a:pPr marL="457200" lvl="0" indent="-292100" algn="l" rtl="0">
+              <a:spcBef>
+                <a:spcPts val="0"/>
+              </a:spcBef>
+              <a:spcAft>
+                <a:spcPts val="0"/>
+              </a:spcAft>
+              <a:buClr>
+                <a:schemeClr val="accent3"/>
+              </a:buClr>
+              <a:buSzPts val="1000"/>
+              <a:buChar char="∗"/>
+            </a:pPr>
+            <a:r>
+              <a:rPr lang="ru-RU" sz="1400" dirty="0" smtClean="0">
+                <a:solidFill>
+                  <a:schemeClr val="accent3"/>
+                </a:solidFill>
+              </a:rPr>
+              <a:t>Осуществить работу с </a:t>
+            </a:r>
+            <a:r>
+              <a:rPr lang="ru-RU" sz="1400" b="1" dirty="0" smtClean="0">
+                <a:solidFill>
+                  <a:srgbClr val="FF5858"/>
+                </a:solidFill>
+              </a:rPr>
+              <a:t>указателями</a:t>
+            </a:r>
+            <a:r>
+              <a:rPr lang="ru-RU" sz="1400" dirty="0" smtClean="0">
+                <a:solidFill>
+                  <a:schemeClr val="accent3"/>
+                </a:solidFill>
+              </a:rPr>
+              <a:t>.</a:t>
+            </a:r>
+          </a:p>
+          <a:p>
+            <a:pPr marL="457200" lvl="0" indent="-292100" algn="l" rtl="0">
+              <a:spcBef>
+                <a:spcPts val="0"/>
+              </a:spcBef>
+              <a:spcAft>
+                <a:spcPts val="0"/>
+              </a:spcAft>
+              <a:buClr>
+                <a:schemeClr val="accent3"/>
+              </a:buClr>
+              <a:buSzPts val="1000"/>
+              <a:buChar char="∗"/>
+            </a:pPr>
+            <a:r>
+              <a:rPr lang="ru-RU" sz="1400" dirty="0" smtClean="0">
+                <a:solidFill>
+                  <a:schemeClr val="accent3"/>
+                </a:solidFill>
+              </a:rPr>
+              <a:t>Использовать </a:t>
+            </a:r>
+            <a:r>
+              <a:rPr lang="ru-RU" sz="1400" b="1" dirty="0" smtClean="0">
+                <a:solidFill>
+                  <a:srgbClr val="FF5858"/>
+                </a:solidFill>
+              </a:rPr>
+              <a:t>многопоточность</a:t>
+            </a:r>
+            <a:r>
+              <a:rPr lang="ru-RU" sz="1400" dirty="0" smtClean="0">
+                <a:solidFill>
+                  <a:schemeClr val="accent3"/>
+                </a:solidFill>
+              </a:rPr>
+              <a:t>.</a:t>
+            </a:r>
+            <a:endParaRPr sz="1400" dirty="0">
+              <a:solidFill>
+                <a:schemeClr val="accent3"/>
+              </a:solidFill>
+            </a:endParaRPr>
+          </a:p>
+          <a:p>
+            <a:pPr marL="0" lvl="0" indent="0" algn="l" rtl="0">
+              <a:spcBef>
+                <a:spcPts val="0"/>
+              </a:spcBef>
+              <a:spcAft>
+                <a:spcPts val="0"/>
+              </a:spcAft>
+              <a:buNone/>
+            </a:pPr>
+            <a:r>
+              <a:rPr lang="ru-RU" sz="1400" dirty="0" smtClean="0">
+                <a:solidFill>
+                  <a:schemeClr val="accent3"/>
+                </a:solidFill>
+              </a:rPr>
+              <a:t>Основная цель проекта – не просто написать игру, а понять, как программы общаются друг с другом по сети.</a:t>
+            </a:r>
+            <a:endParaRPr sz="1400" dirty="0">
+              <a:solidFill>
+                <a:schemeClr val="accent3"/>
+              </a:solidFill>
+            </a:endParaRPr>
+          </a:p>
+        </p:txBody>
+      </p:sp>
+      <p:sp>
+        <p:nvSpPr>
+          <p:cNvPr id="474" name="Google Shape;474;p28"/>
+          <p:cNvSpPr txBox="1">
+            <a:spLocks noGrp="1"/>
+          </p:cNvSpPr>
+          <p:nvPr>
+            <p:ph type="subTitle" idx="4294967295"/>
+          </p:nvPr>
+        </p:nvSpPr>
+        <p:spPr>
+          <a:xfrm>
+            <a:off x="-5975" y="91525"/>
+            <a:ext cx="4572000" cy="357300"/>
+          </a:xfrm>
+          <a:prstGeom prst="rect">
+            <a:avLst/>
+          </a:prstGeom>
+        </p:spPr>
+        <p:txBody>
+          <a:bodyPr spcFirstLastPara="1" wrap="square" lIns="91425" tIns="91425" rIns="91425" bIns="91425" anchor="ctr" anchorCtr="0">
+            <a:noAutofit/>
+          </a:bodyPr>
+          <a:lstStyle/>
+          <a:p>
+            <a:pPr marL="0" lvl="0" indent="0" algn="ctr" rtl="0">
+              <a:spcBef>
+                <a:spcPts val="0"/>
+              </a:spcBef>
+              <a:spcAft>
+                <a:spcPts val="0"/>
+              </a:spcAft>
+              <a:buNone/>
+            </a:pPr>
+            <a:r>
+              <a:rPr lang="en" sz="1400" dirty="0" smtClean="0">
+                <a:solidFill>
+                  <a:schemeClr val="accent3"/>
+                </a:solidFill>
+              </a:rPr>
+              <a:t>server.cpp</a:t>
+            </a:r>
+            <a:endParaRPr sz="1400" dirty="0">
+              <a:solidFill>
+                <a:schemeClr val="accent3"/>
+              </a:solidFill>
+            </a:endParaRPr>
+          </a:p>
+        </p:txBody>
+      </p:sp>
+      <p:sp>
+        <p:nvSpPr>
+          <p:cNvPr id="475" name="Google Shape;475;p28"/>
+          <p:cNvSpPr txBox="1">
+            <a:spLocks noGrp="1"/>
+          </p:cNvSpPr>
+          <p:nvPr>
+            <p:ph type="subTitle" idx="4294967295"/>
+          </p:nvPr>
+        </p:nvSpPr>
+        <p:spPr>
+          <a:xfrm>
+            <a:off x="4572000" y="91525"/>
+            <a:ext cx="4572000" cy="357300"/>
+          </a:xfrm>
+          <a:prstGeom prst="rect">
+            <a:avLst/>
+          </a:prstGeom>
+        </p:spPr>
+        <p:txBody>
+          <a:bodyPr spcFirstLastPara="1" wrap="square" lIns="91425" tIns="91425" rIns="91425" bIns="91425" anchor="ctr" anchorCtr="0">
+            <a:noAutofit/>
+          </a:bodyPr>
+          <a:lstStyle/>
+          <a:p>
+            <a:pPr marL="0" lvl="0" indent="0" algn="ctr" rtl="0">
+              <a:spcBef>
+                <a:spcPts val="0"/>
+              </a:spcBef>
+              <a:spcAft>
+                <a:spcPts val="0"/>
+              </a:spcAft>
+              <a:buNone/>
+            </a:pPr>
+            <a:r>
+              <a:rPr lang="en" sz="1400" dirty="0" smtClean="0">
+                <a:solidFill>
+                  <a:schemeClr val="accent3"/>
+                </a:solidFill>
+              </a:rPr>
+              <a:t>client.cpp</a:t>
+            </a:r>
+            <a:endParaRPr sz="1400" dirty="0">
+              <a:solidFill>
+                <a:schemeClr val="accent3"/>
+              </a:solidFill>
+            </a:endParaRPr>
+          </a:p>
+        </p:txBody>
+      </p:sp>
+    </p:spTree>
+  </p:cSld>
+  <p:clrMapOvr>
+    <a:masterClrMapping/>
+  </p:clrMapOvr>
+  <p:transition>
+    <p:split/>
+  </p:transition>
+  <p:timing>
+    <p:tnLst>
+      <p:par>
+        <p:cTn id="1" dur="indefinite" restart="never" nodeType="tmRoot"/>
+      </p:par>
+    </p:tnLst>
+  </p:timing>
+</p:sld>
+</file>
+
+<file path=ppt/slides/slide3.xml><?xml version="1.0" encoding="utf-8"?>
+<p:sld xmlns:a="http://schemas.openxmlformats.org/drawingml/2006/main" xmlns:r="http://schemas.openxmlformats.org/officeDocument/2006/relationships" xmlns:p="http://schemas.openxmlformats.org/presentationml/2006/main">
+  <p:cSld>
+    <p:spTree>
+      <p:nvGrpSpPr>
+        <p:cNvPr id="1" name="Shape 781"/>
+        <p:cNvGrpSpPr/>
+        <p:nvPr/>
+      </p:nvGrpSpPr>
+      <p:grpSpPr>
+        <a:xfrm>
+          <a:off x="0" y="0"/>
+          <a:ext cx="0" cy="0"/>
+          <a:chOff x="0" y="0"/>
+          <a:chExt cx="0" cy="0"/>
+        </a:xfrm>
+      </p:grpSpPr>
+      <p:sp>
+        <p:nvSpPr>
+          <p:cNvPr id="782" name="Google Shape;782;p37"/>
+          <p:cNvSpPr txBox="1">
+            <a:spLocks noGrp="1"/>
+          </p:cNvSpPr>
+          <p:nvPr>
+            <p:ph type="body" idx="1"/>
+          </p:nvPr>
+        </p:nvSpPr>
+        <p:spPr>
+          <a:xfrm>
+            <a:off x="3306200" y="2227588"/>
+            <a:ext cx="4694400" cy="751800"/>
+          </a:xfrm>
+          <a:prstGeom prst="rect">
+            <a:avLst/>
+          </a:prstGeom>
+        </p:spPr>
+        <p:txBody>
+          <a:bodyPr spcFirstLastPara="1" wrap="square" lIns="91425" tIns="91425" rIns="91425" bIns="91425" anchor="ctr" anchorCtr="0">
+            <a:noAutofit/>
+          </a:bodyPr>
+          <a:lstStyle/>
+          <a:p>
+            <a:pPr marL="341342" lvl="0" indent="-265184" algn="l" rtl="0">
+              <a:spcBef>
+                <a:spcPts val="0"/>
+              </a:spcBef>
+              <a:spcAft>
+                <a:spcPts val="0"/>
+              </a:spcAft>
+              <a:buSzPts val="1200"/>
+              <a:buNone/>
+            </a:pPr>
+            <a:r>
+              <a:rPr lang="en-US" dirty="0" smtClean="0">
+                <a:solidFill>
+                  <a:schemeClr val="accent3"/>
+                </a:solidFill>
+              </a:rPr>
+              <a:t>Server: </a:t>
+            </a:r>
+            <a:r>
+              <a:rPr lang="ru-RU" dirty="0" smtClean="0">
+                <a:solidFill>
+                  <a:schemeClr val="accent3"/>
+                </a:solidFill>
+              </a:rPr>
+              <a:t>генерирует число, хранит состояние игры, обрабатывает запросы клиентов</a:t>
+            </a:r>
+            <a:endParaRPr dirty="0">
+              <a:solidFill>
+                <a:schemeClr val="accent3"/>
+              </a:solidFill>
+            </a:endParaRPr>
+          </a:p>
+        </p:txBody>
+      </p:sp>
+      <p:sp>
+        <p:nvSpPr>
+          <p:cNvPr id="783" name="Google Shape;783;p37"/>
+          <p:cNvSpPr txBox="1">
+            <a:spLocks noGrp="1"/>
+          </p:cNvSpPr>
+          <p:nvPr>
+            <p:ph type="title"/>
+          </p:nvPr>
+        </p:nvSpPr>
+        <p:spPr>
+          <a:xfrm>
+            <a:off x="1143250" y="582700"/>
+            <a:ext cx="7290600" cy="541200"/>
+          </a:xfrm>
+          <a:prstGeom prst="rect">
+            <a:avLst/>
+          </a:prstGeom>
+        </p:spPr>
+        <p:txBody>
+          <a:bodyPr spcFirstLastPara="1" wrap="square" lIns="91425" tIns="91425" rIns="91425" bIns="91425" anchor="t" anchorCtr="0">
+            <a:noAutofit/>
+          </a:bodyPr>
+          <a:lstStyle/>
+          <a:p>
+            <a:pPr marL="0" lvl="0" indent="0" algn="l" rtl="0">
+              <a:spcBef>
+                <a:spcPts val="0"/>
+              </a:spcBef>
+              <a:spcAft>
+                <a:spcPts val="0"/>
+              </a:spcAft>
+              <a:buNone/>
+            </a:pPr>
+            <a:r>
+              <a:rPr lang="ru-RU" dirty="0" smtClean="0"/>
+              <a:t>Архитектура приложения </a:t>
+            </a:r>
+            <a:r>
+              <a:rPr lang="en" dirty="0" smtClean="0">
+                <a:solidFill>
+                  <a:schemeClr val="accent6"/>
+                </a:solidFill>
+              </a:rPr>
+              <a:t>{</a:t>
+            </a:r>
+            <a:endParaRPr dirty="0">
+              <a:solidFill>
+                <a:schemeClr val="accent6"/>
+              </a:solidFill>
+            </a:endParaRPr>
+          </a:p>
+        </p:txBody>
+      </p:sp>
+      <p:sp>
+        <p:nvSpPr>
+          <p:cNvPr id="784" name="Google Shape;784;p37"/>
+          <p:cNvSpPr txBox="1">
+            <a:spLocks noGrp="1"/>
+          </p:cNvSpPr>
+          <p:nvPr>
+            <p:ph type="title" idx="2"/>
+          </p:nvPr>
+        </p:nvSpPr>
+        <p:spPr>
+          <a:xfrm flipH="1">
+            <a:off x="2091200" y="2372263"/>
+            <a:ext cx="1215000" cy="462300"/>
+          </a:xfrm>
+          <a:prstGeom prst="rect">
+            <a:avLst/>
+          </a:prstGeom>
+        </p:spPr>
+        <p:txBody>
+          <a:bodyPr spcFirstLastPara="1" wrap="square" lIns="91425" tIns="91425" rIns="91425" bIns="91425" anchor="ctr" anchorCtr="0">
+            <a:noAutofit/>
+          </a:bodyPr>
+          <a:lstStyle/>
+          <a:p>
+            <a:pPr marL="0" lvl="0" indent="0" algn="l" rtl="0">
+              <a:spcBef>
+                <a:spcPts val="0"/>
+              </a:spcBef>
+              <a:spcAft>
+                <a:spcPts val="0"/>
+              </a:spcAft>
+              <a:buNone/>
+            </a:pPr>
+            <a:r>
+              <a:rPr lang="en"/>
+              <a:t>&lt; /1 &gt;</a:t>
+            </a:r>
+            <a:endParaRPr/>
+          </a:p>
+        </p:txBody>
+      </p:sp>
+      <p:sp>
+        <p:nvSpPr>
+          <p:cNvPr id="785" name="Google Shape;785;p37"/>
+          <p:cNvSpPr txBox="1">
+            <a:spLocks noGrp="1"/>
+          </p:cNvSpPr>
+          <p:nvPr>
+            <p:ph type="body" idx="3"/>
+          </p:nvPr>
+        </p:nvSpPr>
+        <p:spPr>
+          <a:xfrm>
+            <a:off x="3739600" y="3164425"/>
+            <a:ext cx="4694400" cy="751800"/>
+          </a:xfrm>
+          <a:prstGeom prst="rect">
+            <a:avLst/>
+          </a:prstGeom>
+        </p:spPr>
+        <p:txBody>
+          <a:bodyPr spcFirstLastPara="1" wrap="square" lIns="91425" tIns="91425" rIns="91425" bIns="91425" anchor="ctr" anchorCtr="0">
+            <a:noAutofit/>
+          </a:bodyPr>
+          <a:lstStyle/>
+          <a:p>
+            <a:pPr marL="341342" lvl="0" indent="-265184" algn="l" rtl="0">
+              <a:spcBef>
+                <a:spcPts val="0"/>
+              </a:spcBef>
+              <a:spcAft>
+                <a:spcPts val="0"/>
+              </a:spcAft>
+              <a:buSzPts val="1200"/>
+              <a:buNone/>
+            </a:pPr>
+            <a:r>
+              <a:rPr lang="en-US" dirty="0" smtClean="0">
+                <a:solidFill>
+                  <a:schemeClr val="accent3"/>
+                </a:solidFill>
+              </a:rPr>
+              <a:t>Client: </a:t>
+            </a:r>
+            <a:r>
+              <a:rPr lang="ru-RU" dirty="0" smtClean="0">
+                <a:solidFill>
+                  <a:schemeClr val="accent3"/>
+                </a:solidFill>
+              </a:rPr>
+              <a:t>отправляет предположения и получает подсказки (</a:t>
+            </a:r>
+            <a:r>
+              <a:rPr lang="en-US" dirty="0" smtClean="0">
+                <a:solidFill>
+                  <a:schemeClr val="accent3"/>
+                </a:solidFill>
+              </a:rPr>
+              <a:t>“</a:t>
+            </a:r>
+            <a:r>
+              <a:rPr lang="ru-RU" dirty="0" smtClean="0">
+                <a:solidFill>
+                  <a:schemeClr val="accent3"/>
+                </a:solidFill>
+              </a:rPr>
+              <a:t>Больше</a:t>
+            </a:r>
+            <a:r>
+              <a:rPr lang="en-US" dirty="0" smtClean="0">
+                <a:solidFill>
+                  <a:schemeClr val="accent3"/>
+                </a:solidFill>
+              </a:rPr>
+              <a:t>”, “</a:t>
+            </a:r>
+            <a:r>
+              <a:rPr lang="ru-RU" dirty="0" smtClean="0">
+                <a:solidFill>
+                  <a:schemeClr val="accent3"/>
+                </a:solidFill>
+              </a:rPr>
+              <a:t>Меньше</a:t>
+            </a:r>
+            <a:r>
+              <a:rPr lang="en-US" dirty="0" smtClean="0">
+                <a:solidFill>
+                  <a:schemeClr val="accent3"/>
+                </a:solidFill>
+              </a:rPr>
+              <a:t>”, “</a:t>
+            </a:r>
+            <a:r>
+              <a:rPr lang="ru-RU" dirty="0" smtClean="0">
+                <a:solidFill>
+                  <a:schemeClr val="accent3"/>
+                </a:solidFill>
+              </a:rPr>
+              <a:t>Победа</a:t>
+            </a:r>
+            <a:r>
+              <a:rPr lang="en-US" dirty="0" smtClean="0">
+                <a:solidFill>
+                  <a:schemeClr val="accent3"/>
+                </a:solidFill>
+              </a:rPr>
+              <a:t>”) </a:t>
+            </a:r>
+            <a:endParaRPr dirty="0">
+              <a:solidFill>
+                <a:schemeClr val="accent3"/>
+              </a:solidFill>
+            </a:endParaRPr>
+          </a:p>
+        </p:txBody>
+      </p:sp>
+      <p:sp>
+        <p:nvSpPr>
+          <p:cNvPr id="786" name="Google Shape;786;p37"/>
+          <p:cNvSpPr txBox="1">
+            <a:spLocks noGrp="1"/>
+          </p:cNvSpPr>
+          <p:nvPr>
+            <p:ph type="title" idx="4"/>
+          </p:nvPr>
+        </p:nvSpPr>
+        <p:spPr>
+          <a:xfrm flipH="1">
+            <a:off x="2524600" y="3309175"/>
+            <a:ext cx="1215000" cy="462300"/>
+          </a:xfrm>
+          <a:prstGeom prst="rect">
+            <a:avLst/>
+          </a:prstGeom>
+        </p:spPr>
+        <p:txBody>
+          <a:bodyPr spcFirstLastPara="1" wrap="square" lIns="91425" tIns="91425" rIns="91425" bIns="91425" anchor="ctr" anchorCtr="0">
+            <a:noAutofit/>
+          </a:bodyPr>
+          <a:lstStyle/>
+          <a:p>
+            <a:pPr marL="0" lvl="0" indent="0" algn="l" rtl="0">
+              <a:spcBef>
+                <a:spcPts val="0"/>
+              </a:spcBef>
+              <a:spcAft>
+                <a:spcPts val="0"/>
+              </a:spcAft>
+              <a:buNone/>
+            </a:pPr>
+            <a:r>
+              <a:rPr lang="en"/>
+              <a:t>&lt; /2 &gt;</a:t>
+            </a:r>
+            <a:endParaRPr/>
+          </a:p>
+        </p:txBody>
+      </p:sp>
+      <p:sp>
+        <p:nvSpPr>
+          <p:cNvPr id="787" name="Google Shape;787;p37"/>
+          <p:cNvSpPr txBox="1">
+            <a:spLocks noGrp="1"/>
+          </p:cNvSpPr>
+          <p:nvPr>
+            <p:ph type="subTitle" idx="5"/>
+          </p:nvPr>
+        </p:nvSpPr>
+        <p:spPr>
+          <a:xfrm>
+            <a:off x="1672200" y="1245150"/>
+            <a:ext cx="5922000" cy="541200"/>
+          </a:xfrm>
+          <a:prstGeom prst="rect">
+            <a:avLst/>
+          </a:prstGeom>
+        </p:spPr>
+        <p:txBody>
+          <a:bodyPr spcFirstLastPara="1" wrap="square" lIns="91425" tIns="91425" rIns="91425" bIns="91425" anchor="ctr" anchorCtr="0">
+            <a:noAutofit/>
+          </a:bodyPr>
+          <a:lstStyle/>
+          <a:p>
+            <a:pPr marL="0" lvl="0" indent="0" algn="l" rtl="0">
+              <a:spcBef>
+                <a:spcPts val="0"/>
+              </a:spcBef>
+              <a:spcAft>
+                <a:spcPts val="0"/>
+              </a:spcAft>
+              <a:buNone/>
+            </a:pPr>
+            <a:r>
+              <a:rPr lang="en" dirty="0"/>
+              <a:t>&lt; </a:t>
+            </a:r>
+            <a:r>
+              <a:rPr lang="ru-RU" dirty="0" smtClean="0"/>
+              <a:t>Модель: </a:t>
+            </a:r>
+            <a:r>
+              <a:rPr lang="en-US" dirty="0" smtClean="0"/>
+              <a:t>Client-Server</a:t>
+            </a:r>
+            <a:r>
+              <a:rPr lang="en" dirty="0" smtClean="0"/>
+              <a:t> </a:t>
+            </a:r>
+            <a:r>
+              <a:rPr lang="en" dirty="0"/>
+              <a:t>&gt;</a:t>
+            </a:r>
+            <a:endParaRPr dirty="0"/>
+          </a:p>
+        </p:txBody>
+      </p:sp>
+      <p:sp>
+        <p:nvSpPr>
+          <p:cNvPr id="789" name="Google Shape;789;p37"/>
+          <p:cNvSpPr txBox="1">
+            <a:spLocks noGrp="1"/>
+          </p:cNvSpPr>
+          <p:nvPr>
+            <p:ph type="subTitle" idx="5"/>
+          </p:nvPr>
+        </p:nvSpPr>
+        <p:spPr>
+          <a:xfrm>
+            <a:off x="-5975" y="91525"/>
+            <a:ext cx="4572000" cy="357300"/>
+          </a:xfrm>
+          <a:prstGeom prst="rect">
+            <a:avLst/>
+          </a:prstGeom>
+        </p:spPr>
+        <p:txBody>
+          <a:bodyPr spcFirstLastPara="1" wrap="square" lIns="91425" tIns="91425" rIns="91425" bIns="91425" anchor="ctr" anchorCtr="0">
+            <a:noAutofit/>
+          </a:bodyPr>
+          <a:lstStyle/>
+          <a:p>
+            <a:pPr marL="0" lvl="0" indent="0" algn="ctr" rtl="0">
+              <a:spcBef>
+                <a:spcPts val="0"/>
+              </a:spcBef>
+              <a:spcAft>
+                <a:spcPts val="0"/>
+              </a:spcAft>
+              <a:buNone/>
+            </a:pPr>
+            <a:r>
+              <a:rPr lang="en" sz="1400" dirty="0" smtClean="0">
+                <a:solidFill>
+                  <a:schemeClr val="accent3"/>
+                </a:solidFill>
+              </a:rPr>
+              <a:t>server.cpp</a:t>
+            </a:r>
+            <a:endParaRPr sz="1400" dirty="0">
+              <a:solidFill>
+                <a:schemeClr val="accent3"/>
+              </a:solidFill>
+            </a:endParaRPr>
+          </a:p>
+        </p:txBody>
+      </p:sp>
+      <p:sp>
+        <p:nvSpPr>
+          <p:cNvPr id="790" name="Google Shape;790;p37"/>
+          <p:cNvSpPr txBox="1">
+            <a:spLocks noGrp="1"/>
+          </p:cNvSpPr>
+          <p:nvPr>
+            <p:ph type="subTitle" idx="5"/>
+          </p:nvPr>
+        </p:nvSpPr>
+        <p:spPr>
+          <a:xfrm>
+            <a:off x="4572000" y="91525"/>
+            <a:ext cx="4572000" cy="357300"/>
+          </a:xfrm>
+          <a:prstGeom prst="rect">
+            <a:avLst/>
+          </a:prstGeom>
+        </p:spPr>
+        <p:txBody>
+          <a:bodyPr spcFirstLastPara="1" wrap="square" lIns="91425" tIns="91425" rIns="91425" bIns="91425" anchor="ctr" anchorCtr="0">
+            <a:noAutofit/>
+          </a:bodyPr>
+          <a:lstStyle/>
+          <a:p>
+            <a:pPr marL="0" lvl="0" indent="0" algn="ctr" rtl="0">
+              <a:spcBef>
+                <a:spcPts val="0"/>
+              </a:spcBef>
+              <a:spcAft>
+                <a:spcPts val="0"/>
+              </a:spcAft>
+              <a:buNone/>
+            </a:pPr>
+            <a:r>
+              <a:rPr lang="en" sz="1400" dirty="0" smtClean="0">
+                <a:solidFill>
+                  <a:schemeClr val="accent3"/>
+                </a:solidFill>
+              </a:rPr>
+              <a:t>client.cpp</a:t>
+            </a:r>
+            <a:endParaRPr sz="1400" dirty="0">
+              <a:solidFill>
+                <a:schemeClr val="accent3"/>
+              </a:solidFill>
+            </a:endParaRPr>
+          </a:p>
+        </p:txBody>
+      </p:sp>
+      <p:grpSp>
+        <p:nvGrpSpPr>
+          <p:cNvPr id="791" name="Google Shape;791;p37"/>
+          <p:cNvGrpSpPr/>
+          <p:nvPr/>
+        </p:nvGrpSpPr>
+        <p:grpSpPr>
+          <a:xfrm>
+            <a:off x="1084825" y="1152525"/>
+            <a:ext cx="506100" cy="3417500"/>
+            <a:chOff x="1084825" y="1152525"/>
+            <a:chExt cx="506100" cy="3417500"/>
+          </a:xfrm>
+        </p:grpSpPr>
+        <p:sp>
+          <p:nvSpPr>
+            <p:cNvPr id="792" name="Google Shape;792;p37"/>
+            <p:cNvSpPr txBox="1"/>
+            <p:nvPr/>
+          </p:nvSpPr>
+          <p:spPr>
+            <a:xfrm>
+              <a:off x="1084825" y="3954425"/>
+              <a:ext cx="506100" cy="615600"/>
+            </a:xfrm>
+            <a:prstGeom prst="rect">
+              <a:avLst/>
+            </a:prstGeom>
+            <a:noFill/>
+            <a:ln>
+              <a:noFill/>
+            </a:ln>
+          </p:spPr>
+          <p:txBody>
+            <a:bodyPr spcFirstLastPara="1" wrap="square" lIns="91425" tIns="91425" rIns="91425" bIns="91425" anchor="t" anchorCtr="0">
+              <a:spAutoFit/>
+            </a:bodyPr>
+            <a:lstStyle/>
+            <a:p>
+              <a:pPr marL="0" lvl="0" indent="0" algn="ctr" rtl="0">
+                <a:spcBef>
+                  <a:spcPts val="0"/>
+                </a:spcBef>
+                <a:spcAft>
+                  <a:spcPts val="0"/>
+                </a:spcAft>
+                <a:buNone/>
+              </a:pPr>
+              <a:r>
+                <a:rPr lang="en" sz="2800">
+                  <a:solidFill>
+                    <a:schemeClr val="accent6"/>
+                  </a:solidFill>
+                  <a:latin typeface="Fira Code"/>
+                  <a:ea typeface="Fira Code"/>
+                  <a:cs typeface="Fira Code"/>
+                  <a:sym typeface="Fira Code"/>
+                </a:rPr>
+                <a:t>}</a:t>
+              </a:r>
+              <a:endParaRPr sz="2800">
+                <a:solidFill>
+                  <a:schemeClr val="accent6"/>
+                </a:solidFill>
+                <a:latin typeface="Fira Code"/>
+                <a:ea typeface="Fira Code"/>
+                <a:cs typeface="Fira Code"/>
+                <a:sym typeface="Fira Code"/>
+              </a:endParaRPr>
+            </a:p>
+          </p:txBody>
+        </p:sp>
+        <p:cxnSp>
+          <p:nvCxnSpPr>
+            <p:cNvPr id="793" name="Google Shape;793;p37"/>
+            <p:cNvCxnSpPr/>
+            <p:nvPr/>
+          </p:nvCxnSpPr>
+          <p:spPr>
+            <a:xfrm>
+              <a:off x="1337875" y="1152525"/>
+              <a:ext cx="0" cy="2781000"/>
+            </a:xfrm>
+            <a:prstGeom prst="straightConnector1">
+              <a:avLst/>
+            </a:prstGeom>
+            <a:noFill/>
+            <a:ln w="9525" cap="flat" cmpd="sng">
+              <a:solidFill>
+                <a:schemeClr val="accent4"/>
+              </a:solidFill>
+              <a:prstDash val="solid"/>
+              <a:round/>
+              <a:headEnd type="none" w="med" len="med"/>
+              <a:tailEnd type="none" w="med" len="med"/>
+            </a:ln>
+          </p:spPr>
+        </p:cxnSp>
+      </p:grpSp>
+      <p:grpSp>
+        <p:nvGrpSpPr>
+          <p:cNvPr id="15" name="Google Shape;11405;p63"/>
+          <p:cNvGrpSpPr/>
+          <p:nvPr/>
+        </p:nvGrpSpPr>
+        <p:grpSpPr>
+          <a:xfrm>
+            <a:off x="7812361" y="699542"/>
+            <a:ext cx="720080" cy="648072"/>
+            <a:chOff x="1958520" y="2302574"/>
+            <a:chExt cx="359213" cy="327807"/>
+          </a:xfrm>
+        </p:grpSpPr>
+        <p:sp>
+          <p:nvSpPr>
+            <p:cNvPr id="16" name="Google Shape;11406;p63"/>
+            <p:cNvSpPr/>
+            <p:nvPr/>
+          </p:nvSpPr>
+          <p:spPr>
+            <a:xfrm>
+              <a:off x="1958520" y="2302574"/>
+              <a:ext cx="359213" cy="327807"/>
+            </a:xfrm>
+            <a:custGeom>
+              <a:avLst/>
+              <a:gdLst/>
+              <a:ahLst/>
+              <a:cxnLst/>
+              <a:rect l="l" t="t" r="r" b="b"/>
+              <a:pathLst>
+                <a:path w="11312" h="10323" extrusionOk="0">
+                  <a:moveTo>
+                    <a:pt x="7168" y="8132"/>
+                  </a:moveTo>
+                  <a:lnTo>
+                    <a:pt x="7501" y="9204"/>
+                  </a:lnTo>
+                  <a:lnTo>
+                    <a:pt x="3799" y="9204"/>
+                  </a:lnTo>
+                  <a:lnTo>
+                    <a:pt x="4120" y="8132"/>
+                  </a:lnTo>
+                  <a:close/>
+                  <a:moveTo>
+                    <a:pt x="8466" y="9537"/>
+                  </a:moveTo>
+                  <a:cubicBezTo>
+                    <a:pt x="8597" y="9537"/>
+                    <a:pt x="8704" y="9656"/>
+                    <a:pt x="8704" y="9775"/>
+                  </a:cubicBezTo>
+                  <a:cubicBezTo>
+                    <a:pt x="8704" y="9906"/>
+                    <a:pt x="8597" y="10013"/>
+                    <a:pt x="8466" y="10013"/>
+                  </a:cubicBezTo>
+                  <a:lnTo>
+                    <a:pt x="2810" y="10013"/>
+                  </a:lnTo>
+                  <a:cubicBezTo>
+                    <a:pt x="2679" y="10013"/>
+                    <a:pt x="2572" y="9906"/>
+                    <a:pt x="2572" y="9775"/>
+                  </a:cubicBezTo>
+                  <a:cubicBezTo>
+                    <a:pt x="2572" y="9644"/>
+                    <a:pt x="2679" y="9537"/>
+                    <a:pt x="2810" y="9537"/>
+                  </a:cubicBezTo>
+                  <a:close/>
+                  <a:moveTo>
+                    <a:pt x="1072" y="0"/>
+                  </a:moveTo>
+                  <a:cubicBezTo>
+                    <a:pt x="477" y="0"/>
+                    <a:pt x="0" y="476"/>
+                    <a:pt x="0" y="1072"/>
+                  </a:cubicBezTo>
+                  <a:lnTo>
+                    <a:pt x="0" y="7049"/>
+                  </a:lnTo>
+                  <a:cubicBezTo>
+                    <a:pt x="0" y="7644"/>
+                    <a:pt x="477" y="8120"/>
+                    <a:pt x="1072" y="8120"/>
+                  </a:cubicBezTo>
+                  <a:lnTo>
+                    <a:pt x="3763" y="8120"/>
+                  </a:lnTo>
+                  <a:lnTo>
+                    <a:pt x="3441" y="9192"/>
+                  </a:lnTo>
+                  <a:lnTo>
+                    <a:pt x="2822" y="9192"/>
+                  </a:lnTo>
+                  <a:cubicBezTo>
+                    <a:pt x="2513" y="9192"/>
+                    <a:pt x="2263" y="9442"/>
+                    <a:pt x="2263" y="9751"/>
+                  </a:cubicBezTo>
+                  <a:cubicBezTo>
+                    <a:pt x="2263" y="10073"/>
+                    <a:pt x="2513" y="10323"/>
+                    <a:pt x="2822" y="10323"/>
+                  </a:cubicBezTo>
+                  <a:lnTo>
+                    <a:pt x="8478" y="10323"/>
+                  </a:lnTo>
+                  <a:cubicBezTo>
+                    <a:pt x="8799" y="10323"/>
+                    <a:pt x="9049" y="10073"/>
+                    <a:pt x="9049" y="9751"/>
+                  </a:cubicBezTo>
+                  <a:cubicBezTo>
+                    <a:pt x="9049" y="9442"/>
+                    <a:pt x="8799" y="9192"/>
+                    <a:pt x="8478" y="9192"/>
+                  </a:cubicBezTo>
+                  <a:lnTo>
+                    <a:pt x="7870" y="9192"/>
+                  </a:lnTo>
+                  <a:lnTo>
+                    <a:pt x="7549" y="8120"/>
+                  </a:lnTo>
+                  <a:lnTo>
+                    <a:pt x="10240" y="8120"/>
+                  </a:lnTo>
+                  <a:cubicBezTo>
+                    <a:pt x="10835" y="8120"/>
+                    <a:pt x="11311" y="7644"/>
+                    <a:pt x="11311" y="7049"/>
+                  </a:cubicBezTo>
+                  <a:lnTo>
+                    <a:pt x="11311" y="1072"/>
+                  </a:lnTo>
+                  <a:cubicBezTo>
+                    <a:pt x="11299" y="488"/>
+                    <a:pt x="10823" y="0"/>
+                    <a:pt x="10228" y="0"/>
+                  </a:cubicBezTo>
+                  <a:lnTo>
+                    <a:pt x="2786" y="0"/>
+                  </a:lnTo>
+                  <a:cubicBezTo>
+                    <a:pt x="2691" y="0"/>
+                    <a:pt x="2620" y="72"/>
+                    <a:pt x="2620" y="155"/>
+                  </a:cubicBezTo>
+                  <a:cubicBezTo>
+                    <a:pt x="2620" y="250"/>
+                    <a:pt x="2691" y="322"/>
+                    <a:pt x="2786" y="322"/>
+                  </a:cubicBezTo>
+                  <a:lnTo>
+                    <a:pt x="10228" y="322"/>
+                  </a:lnTo>
+                  <a:cubicBezTo>
+                    <a:pt x="10621" y="322"/>
+                    <a:pt x="10966" y="655"/>
+                    <a:pt x="10966" y="1072"/>
+                  </a:cubicBezTo>
+                  <a:lnTo>
+                    <a:pt x="10966" y="7049"/>
+                  </a:lnTo>
+                  <a:cubicBezTo>
+                    <a:pt x="10966" y="7453"/>
+                    <a:pt x="10645" y="7799"/>
+                    <a:pt x="10228" y="7799"/>
+                  </a:cubicBezTo>
+                  <a:lnTo>
+                    <a:pt x="1072" y="7799"/>
+                  </a:lnTo>
+                  <a:cubicBezTo>
+                    <a:pt x="667" y="7799"/>
+                    <a:pt x="322" y="7465"/>
+                    <a:pt x="322" y="7049"/>
+                  </a:cubicBezTo>
+                  <a:lnTo>
+                    <a:pt x="322" y="1072"/>
+                  </a:lnTo>
+                  <a:cubicBezTo>
+                    <a:pt x="322" y="667"/>
+                    <a:pt x="655" y="322"/>
+                    <a:pt x="1072" y="322"/>
+                  </a:cubicBezTo>
+                  <a:lnTo>
+                    <a:pt x="2108" y="322"/>
+                  </a:lnTo>
+                  <a:cubicBezTo>
+                    <a:pt x="2203" y="322"/>
+                    <a:pt x="2275" y="250"/>
+                    <a:pt x="2275" y="155"/>
+                  </a:cubicBezTo>
+                  <a:cubicBezTo>
+                    <a:pt x="2275" y="72"/>
+                    <a:pt x="2203" y="0"/>
+                    <a:pt x="2108" y="0"/>
+                  </a:cubicBezTo>
+                  <a:close/>
+                </a:path>
+              </a:pathLst>
+            </a:custGeom>
+            <a:solidFill>
+              <a:srgbClr val="657E93"/>
+            </a:solidFill>
+            <a:ln>
+              <a:noFill/>
+            </a:ln>
+          </p:spPr>
+          <p:txBody>
+            <a:bodyPr spcFirstLastPara="1" wrap="square" lIns="91425" tIns="91425" rIns="91425" bIns="91425" anchor="ctr" anchorCtr="0">
+              <a:noAutofit/>
+            </a:bodyPr>
+            <a:lstStyle/>
+            <a:p>
+              <a:pPr marL="0" lvl="0" indent="0" algn="l" rtl="0">
+                <a:spcBef>
+                  <a:spcPts val="0"/>
+                </a:spcBef>
+                <a:spcAft>
+                  <a:spcPts val="0"/>
+                </a:spcAft>
+                <a:buNone/>
+              </a:pPr>
+              <a:endParaRPr/>
+            </a:p>
+          </p:txBody>
+        </p:sp>
+        <p:sp>
+          <p:nvSpPr>
+            <p:cNvPr id="17" name="Google Shape;11407;p63"/>
+            <p:cNvSpPr/>
+            <p:nvPr/>
+          </p:nvSpPr>
+          <p:spPr>
+            <a:xfrm>
+              <a:off x="1986877" y="2331313"/>
+              <a:ext cx="302117" cy="184909"/>
+            </a:xfrm>
+            <a:custGeom>
+              <a:avLst/>
+              <a:gdLst/>
+              <a:ahLst/>
+              <a:cxnLst/>
+              <a:rect l="l" t="t" r="r" b="b"/>
+              <a:pathLst>
+                <a:path w="9514" h="5823" extrusionOk="0">
+                  <a:moveTo>
+                    <a:pt x="179" y="0"/>
+                  </a:moveTo>
+                  <a:cubicBezTo>
+                    <a:pt x="72" y="0"/>
+                    <a:pt x="0" y="71"/>
+                    <a:pt x="0" y="179"/>
+                  </a:cubicBezTo>
+                  <a:lnTo>
+                    <a:pt x="0" y="5656"/>
+                  </a:lnTo>
+                  <a:cubicBezTo>
+                    <a:pt x="0" y="5739"/>
+                    <a:pt x="72" y="5822"/>
+                    <a:pt x="167" y="5822"/>
+                  </a:cubicBezTo>
+                  <a:lnTo>
+                    <a:pt x="9347" y="5822"/>
+                  </a:lnTo>
+                  <a:cubicBezTo>
+                    <a:pt x="9430" y="5822"/>
+                    <a:pt x="9513" y="5739"/>
+                    <a:pt x="9513" y="5656"/>
+                  </a:cubicBezTo>
+                  <a:lnTo>
+                    <a:pt x="9513" y="5072"/>
+                  </a:lnTo>
+                  <a:cubicBezTo>
+                    <a:pt x="9513" y="4989"/>
+                    <a:pt x="9430" y="4905"/>
+                    <a:pt x="9347" y="4905"/>
+                  </a:cubicBezTo>
+                  <a:cubicBezTo>
+                    <a:pt x="9252" y="4905"/>
+                    <a:pt x="9180" y="4989"/>
+                    <a:pt x="9180" y="5072"/>
+                  </a:cubicBezTo>
+                  <a:lnTo>
+                    <a:pt x="9180" y="5489"/>
+                  </a:lnTo>
+                  <a:lnTo>
+                    <a:pt x="346" y="5489"/>
+                  </a:lnTo>
+                  <a:lnTo>
+                    <a:pt x="346" y="345"/>
+                  </a:lnTo>
+                  <a:lnTo>
+                    <a:pt x="9180" y="345"/>
+                  </a:lnTo>
+                  <a:lnTo>
+                    <a:pt x="9180" y="4405"/>
+                  </a:lnTo>
+                  <a:cubicBezTo>
+                    <a:pt x="9168" y="4489"/>
+                    <a:pt x="9240" y="4572"/>
+                    <a:pt x="9347" y="4572"/>
+                  </a:cubicBezTo>
+                  <a:cubicBezTo>
+                    <a:pt x="9430" y="4572"/>
+                    <a:pt x="9513" y="4489"/>
+                    <a:pt x="9513" y="4405"/>
+                  </a:cubicBezTo>
+                  <a:lnTo>
+                    <a:pt x="9513" y="179"/>
+                  </a:lnTo>
+                  <a:cubicBezTo>
+                    <a:pt x="9513" y="71"/>
+                    <a:pt x="9430" y="0"/>
+                    <a:pt x="9335" y="0"/>
+                  </a:cubicBezTo>
+                  <a:close/>
+                </a:path>
+              </a:pathLst>
+            </a:custGeom>
+            <a:solidFill>
+              <a:srgbClr val="657E93"/>
+            </a:solidFill>
+            <a:ln>
+              <a:noFill/>
+            </a:ln>
+          </p:spPr>
+          <p:txBody>
+            <a:bodyPr spcFirstLastPara="1" wrap="square" lIns="91425" tIns="91425" rIns="91425" bIns="91425" anchor="ctr" anchorCtr="0">
+              <a:noAutofit/>
+            </a:bodyPr>
+            <a:lstStyle/>
+            <a:p>
+              <a:pPr marL="0" lvl="0" indent="0" algn="l" rtl="0">
+                <a:spcBef>
+                  <a:spcPts val="0"/>
+                </a:spcBef>
+                <a:spcAft>
+                  <a:spcPts val="0"/>
+                </a:spcAft>
+                <a:buNone/>
+              </a:pPr>
+              <a:endParaRPr/>
+            </a:p>
+          </p:txBody>
+        </p:sp>
+        <p:sp>
+          <p:nvSpPr>
+            <p:cNvPr id="18" name="Google Shape;11408;p63"/>
+            <p:cNvSpPr/>
+            <p:nvPr/>
+          </p:nvSpPr>
+          <p:spPr>
+            <a:xfrm>
+              <a:off x="2131521" y="2526701"/>
+              <a:ext cx="11908" cy="10638"/>
+            </a:xfrm>
+            <a:custGeom>
+              <a:avLst/>
+              <a:gdLst/>
+              <a:ahLst/>
+              <a:cxnLst/>
+              <a:rect l="l" t="t" r="r" b="b"/>
+              <a:pathLst>
+                <a:path w="375" h="335" extrusionOk="0">
+                  <a:moveTo>
+                    <a:pt x="176" y="0"/>
+                  </a:moveTo>
+                  <a:cubicBezTo>
+                    <a:pt x="167" y="0"/>
+                    <a:pt x="158" y="1"/>
+                    <a:pt x="148" y="3"/>
+                  </a:cubicBezTo>
+                  <a:cubicBezTo>
+                    <a:pt x="77" y="26"/>
+                    <a:pt x="17" y="86"/>
+                    <a:pt x="17" y="157"/>
+                  </a:cubicBezTo>
+                  <a:cubicBezTo>
+                    <a:pt x="1" y="258"/>
+                    <a:pt x="95" y="334"/>
+                    <a:pt x="186" y="334"/>
+                  </a:cubicBezTo>
+                  <a:cubicBezTo>
+                    <a:pt x="225" y="334"/>
+                    <a:pt x="263" y="320"/>
+                    <a:pt x="291" y="288"/>
+                  </a:cubicBezTo>
+                  <a:cubicBezTo>
+                    <a:pt x="375" y="229"/>
+                    <a:pt x="375" y="145"/>
+                    <a:pt x="327" y="86"/>
+                  </a:cubicBezTo>
+                  <a:cubicBezTo>
+                    <a:pt x="296" y="34"/>
+                    <a:pt x="238" y="0"/>
+                    <a:pt x="176" y="0"/>
+                  </a:cubicBezTo>
+                  <a:close/>
+                </a:path>
+              </a:pathLst>
+            </a:custGeom>
+            <a:solidFill>
+              <a:srgbClr val="657E93"/>
+            </a:solidFill>
+            <a:ln>
+              <a:noFill/>
+            </a:ln>
+          </p:spPr>
+          <p:txBody>
+            <a:bodyPr spcFirstLastPara="1" wrap="square" lIns="91425" tIns="91425" rIns="91425" bIns="91425" anchor="ctr" anchorCtr="0">
+              <a:noAutofit/>
+            </a:bodyPr>
+            <a:lstStyle/>
+            <a:p>
+              <a:pPr marL="0" lvl="0" indent="0" algn="l" rtl="0">
+                <a:spcBef>
+                  <a:spcPts val="0"/>
+                </a:spcBef>
+                <a:spcAft>
+                  <a:spcPts val="0"/>
+                </a:spcAft>
+                <a:buNone/>
+              </a:pPr>
+              <a:endParaRPr/>
+            </a:p>
+          </p:txBody>
+        </p:sp>
+      </p:grpSp>
+      <p:grpSp>
+        <p:nvGrpSpPr>
+          <p:cNvPr id="19" name="Google Shape;12642;p65"/>
+          <p:cNvGrpSpPr/>
+          <p:nvPr/>
+        </p:nvGrpSpPr>
+        <p:grpSpPr>
+          <a:xfrm>
+            <a:off x="7740352" y="1419622"/>
+            <a:ext cx="860833" cy="936104"/>
+            <a:chOff x="7521454" y="2906139"/>
+            <a:chExt cx="359651" cy="371013"/>
+          </a:xfrm>
+        </p:grpSpPr>
+        <p:sp>
+          <p:nvSpPr>
+            <p:cNvPr id="20" name="Google Shape;12643;p65"/>
+            <p:cNvSpPr/>
+            <p:nvPr/>
+          </p:nvSpPr>
+          <p:spPr>
+            <a:xfrm>
+              <a:off x="7614677" y="3138830"/>
+              <a:ext cx="79983" cy="138322"/>
+            </a:xfrm>
+            <a:custGeom>
+              <a:avLst/>
+              <a:gdLst/>
+              <a:ahLst/>
+              <a:cxnLst/>
+              <a:rect l="l" t="t" r="r" b="b"/>
+              <a:pathLst>
+                <a:path w="2513" h="4346" extrusionOk="0">
+                  <a:moveTo>
+                    <a:pt x="1429" y="345"/>
+                  </a:moveTo>
+                  <a:cubicBezTo>
+                    <a:pt x="1643" y="345"/>
+                    <a:pt x="1798" y="512"/>
+                    <a:pt x="1798" y="715"/>
+                  </a:cubicBezTo>
+                  <a:lnTo>
+                    <a:pt x="1798" y="1084"/>
+                  </a:lnTo>
+                  <a:cubicBezTo>
+                    <a:pt x="1798" y="1405"/>
+                    <a:pt x="1548" y="1655"/>
+                    <a:pt x="1251" y="1655"/>
+                  </a:cubicBezTo>
+                  <a:cubicBezTo>
+                    <a:pt x="941" y="1655"/>
+                    <a:pt x="691" y="1393"/>
+                    <a:pt x="691" y="1084"/>
+                  </a:cubicBezTo>
+                  <a:lnTo>
+                    <a:pt x="691" y="715"/>
+                  </a:lnTo>
+                  <a:cubicBezTo>
+                    <a:pt x="691" y="512"/>
+                    <a:pt x="846" y="345"/>
+                    <a:pt x="1060" y="345"/>
+                  </a:cubicBezTo>
+                  <a:close/>
+                  <a:moveTo>
+                    <a:pt x="1429" y="1988"/>
+                  </a:moveTo>
+                  <a:lnTo>
+                    <a:pt x="1429" y="2072"/>
+                  </a:lnTo>
+                  <a:cubicBezTo>
+                    <a:pt x="1429" y="2131"/>
+                    <a:pt x="1441" y="2191"/>
+                    <a:pt x="1477" y="2250"/>
+                  </a:cubicBezTo>
+                  <a:lnTo>
+                    <a:pt x="1251" y="2489"/>
+                  </a:lnTo>
+                  <a:lnTo>
+                    <a:pt x="1239" y="2489"/>
+                  </a:lnTo>
+                  <a:lnTo>
+                    <a:pt x="1000" y="2250"/>
+                  </a:lnTo>
+                  <a:cubicBezTo>
+                    <a:pt x="1024" y="2191"/>
+                    <a:pt x="1048" y="2131"/>
+                    <a:pt x="1048" y="2072"/>
+                  </a:cubicBezTo>
+                  <a:lnTo>
+                    <a:pt x="1048" y="1988"/>
+                  </a:lnTo>
+                  <a:close/>
+                  <a:moveTo>
+                    <a:pt x="1072" y="0"/>
+                  </a:moveTo>
+                  <a:cubicBezTo>
+                    <a:pt x="667" y="0"/>
+                    <a:pt x="358" y="334"/>
+                    <a:pt x="358" y="715"/>
+                  </a:cubicBezTo>
+                  <a:lnTo>
+                    <a:pt x="358" y="1084"/>
+                  </a:lnTo>
+                  <a:cubicBezTo>
+                    <a:pt x="358" y="1381"/>
+                    <a:pt x="512" y="1655"/>
+                    <a:pt x="727" y="1822"/>
+                  </a:cubicBezTo>
+                  <a:lnTo>
+                    <a:pt x="727" y="2072"/>
+                  </a:lnTo>
+                  <a:lnTo>
+                    <a:pt x="727" y="2084"/>
+                  </a:lnTo>
+                  <a:lnTo>
+                    <a:pt x="298" y="2298"/>
+                  </a:lnTo>
+                  <a:cubicBezTo>
+                    <a:pt x="119" y="2381"/>
+                    <a:pt x="0" y="2572"/>
+                    <a:pt x="0" y="2774"/>
+                  </a:cubicBezTo>
+                  <a:lnTo>
+                    <a:pt x="0" y="4179"/>
+                  </a:lnTo>
+                  <a:cubicBezTo>
+                    <a:pt x="0" y="4274"/>
+                    <a:pt x="72" y="4346"/>
+                    <a:pt x="167" y="4346"/>
+                  </a:cubicBezTo>
+                  <a:cubicBezTo>
+                    <a:pt x="250" y="4346"/>
+                    <a:pt x="322" y="4274"/>
+                    <a:pt x="322" y="4179"/>
+                  </a:cubicBezTo>
+                  <a:lnTo>
+                    <a:pt x="322" y="2774"/>
+                  </a:lnTo>
+                  <a:cubicBezTo>
+                    <a:pt x="322" y="2691"/>
+                    <a:pt x="369" y="2631"/>
+                    <a:pt x="429" y="2596"/>
+                  </a:cubicBezTo>
+                  <a:lnTo>
+                    <a:pt x="727" y="2441"/>
+                  </a:lnTo>
+                  <a:lnTo>
+                    <a:pt x="1000" y="2715"/>
+                  </a:lnTo>
+                  <a:cubicBezTo>
+                    <a:pt x="1072" y="2786"/>
+                    <a:pt x="1155" y="2810"/>
+                    <a:pt x="1251" y="2810"/>
+                  </a:cubicBezTo>
+                  <a:cubicBezTo>
+                    <a:pt x="1334" y="2810"/>
+                    <a:pt x="1429" y="2786"/>
+                    <a:pt x="1501" y="2715"/>
+                  </a:cubicBezTo>
+                  <a:lnTo>
+                    <a:pt x="1774" y="2441"/>
+                  </a:lnTo>
+                  <a:lnTo>
+                    <a:pt x="2072" y="2596"/>
+                  </a:lnTo>
+                  <a:cubicBezTo>
+                    <a:pt x="2132" y="2619"/>
+                    <a:pt x="2179" y="2691"/>
+                    <a:pt x="2179" y="2774"/>
+                  </a:cubicBezTo>
+                  <a:lnTo>
+                    <a:pt x="2179" y="4179"/>
+                  </a:lnTo>
+                  <a:cubicBezTo>
+                    <a:pt x="2179" y="4274"/>
+                    <a:pt x="2251" y="4346"/>
+                    <a:pt x="2334" y="4346"/>
+                  </a:cubicBezTo>
+                  <a:cubicBezTo>
+                    <a:pt x="2429" y="4346"/>
+                    <a:pt x="2501" y="4274"/>
+                    <a:pt x="2501" y="4179"/>
+                  </a:cubicBezTo>
+                  <a:lnTo>
+                    <a:pt x="2501" y="2774"/>
+                  </a:lnTo>
+                  <a:cubicBezTo>
+                    <a:pt x="2513" y="2572"/>
+                    <a:pt x="2394" y="2381"/>
+                    <a:pt x="2215" y="2298"/>
+                  </a:cubicBezTo>
+                  <a:lnTo>
+                    <a:pt x="1786" y="2084"/>
+                  </a:lnTo>
+                  <a:lnTo>
+                    <a:pt x="1786" y="2072"/>
+                  </a:lnTo>
+                  <a:lnTo>
+                    <a:pt x="1786" y="1822"/>
+                  </a:lnTo>
+                  <a:cubicBezTo>
+                    <a:pt x="2013" y="1655"/>
+                    <a:pt x="2155" y="1381"/>
+                    <a:pt x="2155" y="1084"/>
+                  </a:cubicBezTo>
+                  <a:lnTo>
+                    <a:pt x="2155" y="715"/>
+                  </a:lnTo>
+                  <a:cubicBezTo>
+                    <a:pt x="2155" y="310"/>
+                    <a:pt x="1834" y="0"/>
+                    <a:pt x="1441" y="0"/>
+                  </a:cubicBezTo>
+                  <a:close/>
+                </a:path>
+              </a:pathLst>
+            </a:custGeom>
+            <a:solidFill>
+              <a:srgbClr val="657E93"/>
+            </a:solidFill>
+            <a:ln>
+              <a:noFill/>
+            </a:ln>
+          </p:spPr>
+          <p:txBody>
+            <a:bodyPr spcFirstLastPara="1" wrap="square" lIns="91425" tIns="91425" rIns="91425" bIns="91425" anchor="ctr" anchorCtr="0">
+              <a:noAutofit/>
+            </a:bodyPr>
+            <a:lstStyle/>
+            <a:p>
+              <a:pPr marL="0" lvl="0" indent="0" algn="l" rtl="0">
+                <a:spcBef>
+                  <a:spcPts val="0"/>
+                </a:spcBef>
+                <a:spcAft>
+                  <a:spcPts val="0"/>
+                </a:spcAft>
+                <a:buNone/>
+              </a:pPr>
+              <a:endParaRPr/>
+            </a:p>
+          </p:txBody>
+        </p:sp>
+        <p:sp>
+          <p:nvSpPr>
+            <p:cNvPr id="21" name="Google Shape;12644;p65"/>
+            <p:cNvSpPr/>
+            <p:nvPr/>
+          </p:nvSpPr>
+          <p:spPr>
+            <a:xfrm>
+              <a:off x="7707518" y="3138830"/>
+              <a:ext cx="79983" cy="138322"/>
+            </a:xfrm>
+            <a:custGeom>
+              <a:avLst/>
+              <a:gdLst/>
+              <a:ahLst/>
+              <a:cxnLst/>
+              <a:rect l="l" t="t" r="r" b="b"/>
+              <a:pathLst>
+                <a:path w="2513" h="4346" extrusionOk="0">
+                  <a:moveTo>
+                    <a:pt x="1429" y="345"/>
+                  </a:moveTo>
+                  <a:cubicBezTo>
+                    <a:pt x="1643" y="345"/>
+                    <a:pt x="1798" y="512"/>
+                    <a:pt x="1798" y="715"/>
+                  </a:cubicBezTo>
+                  <a:lnTo>
+                    <a:pt x="1798" y="1084"/>
+                  </a:lnTo>
+                  <a:cubicBezTo>
+                    <a:pt x="1822" y="1405"/>
+                    <a:pt x="1560" y="1655"/>
+                    <a:pt x="1251" y="1655"/>
+                  </a:cubicBezTo>
+                  <a:cubicBezTo>
+                    <a:pt x="941" y="1655"/>
+                    <a:pt x="691" y="1393"/>
+                    <a:pt x="691" y="1084"/>
+                  </a:cubicBezTo>
+                  <a:lnTo>
+                    <a:pt x="691" y="715"/>
+                  </a:lnTo>
+                  <a:cubicBezTo>
+                    <a:pt x="691" y="512"/>
+                    <a:pt x="846" y="345"/>
+                    <a:pt x="1060" y="345"/>
+                  </a:cubicBezTo>
+                  <a:close/>
+                  <a:moveTo>
+                    <a:pt x="1441" y="1988"/>
+                  </a:moveTo>
+                  <a:lnTo>
+                    <a:pt x="1441" y="2072"/>
+                  </a:lnTo>
+                  <a:cubicBezTo>
+                    <a:pt x="1441" y="2131"/>
+                    <a:pt x="1465" y="2191"/>
+                    <a:pt x="1489" y="2250"/>
+                  </a:cubicBezTo>
+                  <a:lnTo>
+                    <a:pt x="1262" y="2489"/>
+                  </a:lnTo>
+                  <a:lnTo>
+                    <a:pt x="1251" y="2489"/>
+                  </a:lnTo>
+                  <a:lnTo>
+                    <a:pt x="1012" y="2250"/>
+                  </a:lnTo>
+                  <a:cubicBezTo>
+                    <a:pt x="1048" y="2191"/>
+                    <a:pt x="1060" y="2131"/>
+                    <a:pt x="1060" y="2072"/>
+                  </a:cubicBezTo>
+                  <a:lnTo>
+                    <a:pt x="1060" y="1988"/>
+                  </a:lnTo>
+                  <a:close/>
+                  <a:moveTo>
+                    <a:pt x="1072" y="0"/>
+                  </a:moveTo>
+                  <a:cubicBezTo>
+                    <a:pt x="667" y="0"/>
+                    <a:pt x="358" y="334"/>
+                    <a:pt x="358" y="715"/>
+                  </a:cubicBezTo>
+                  <a:lnTo>
+                    <a:pt x="358" y="1084"/>
+                  </a:lnTo>
+                  <a:cubicBezTo>
+                    <a:pt x="358" y="1381"/>
+                    <a:pt x="512" y="1655"/>
+                    <a:pt x="727" y="1822"/>
+                  </a:cubicBezTo>
+                  <a:lnTo>
+                    <a:pt x="727" y="2072"/>
+                  </a:lnTo>
+                  <a:lnTo>
+                    <a:pt x="727" y="2084"/>
+                  </a:lnTo>
+                  <a:lnTo>
+                    <a:pt x="298" y="2298"/>
+                  </a:lnTo>
+                  <a:cubicBezTo>
+                    <a:pt x="119" y="2381"/>
+                    <a:pt x="0" y="2572"/>
+                    <a:pt x="0" y="2774"/>
+                  </a:cubicBezTo>
+                  <a:lnTo>
+                    <a:pt x="0" y="4179"/>
+                  </a:lnTo>
+                  <a:cubicBezTo>
+                    <a:pt x="0" y="4274"/>
+                    <a:pt x="72" y="4346"/>
+                    <a:pt x="167" y="4346"/>
+                  </a:cubicBezTo>
+                  <a:cubicBezTo>
+                    <a:pt x="250" y="4346"/>
+                    <a:pt x="322" y="4274"/>
+                    <a:pt x="322" y="4179"/>
+                  </a:cubicBezTo>
+                  <a:lnTo>
+                    <a:pt x="322" y="2774"/>
+                  </a:lnTo>
+                  <a:cubicBezTo>
+                    <a:pt x="322" y="2691"/>
+                    <a:pt x="369" y="2631"/>
+                    <a:pt x="429" y="2596"/>
+                  </a:cubicBezTo>
+                  <a:lnTo>
+                    <a:pt x="727" y="2441"/>
+                  </a:lnTo>
+                  <a:lnTo>
+                    <a:pt x="1001" y="2715"/>
+                  </a:lnTo>
+                  <a:cubicBezTo>
+                    <a:pt x="1072" y="2786"/>
+                    <a:pt x="1155" y="2810"/>
+                    <a:pt x="1251" y="2810"/>
+                  </a:cubicBezTo>
+                  <a:cubicBezTo>
+                    <a:pt x="1346" y="2810"/>
+                    <a:pt x="1429" y="2786"/>
+                    <a:pt x="1501" y="2715"/>
+                  </a:cubicBezTo>
+                  <a:lnTo>
+                    <a:pt x="1774" y="2441"/>
+                  </a:lnTo>
+                  <a:lnTo>
+                    <a:pt x="2072" y="2596"/>
+                  </a:lnTo>
+                  <a:cubicBezTo>
+                    <a:pt x="2132" y="2619"/>
+                    <a:pt x="2167" y="2691"/>
+                    <a:pt x="2167" y="2774"/>
+                  </a:cubicBezTo>
+                  <a:lnTo>
+                    <a:pt x="2167" y="4179"/>
+                  </a:lnTo>
+                  <a:cubicBezTo>
+                    <a:pt x="2167" y="4274"/>
+                    <a:pt x="2251" y="4346"/>
+                    <a:pt x="2334" y="4346"/>
+                  </a:cubicBezTo>
+                  <a:cubicBezTo>
+                    <a:pt x="2429" y="4346"/>
+                    <a:pt x="2501" y="4274"/>
+                    <a:pt x="2501" y="4179"/>
+                  </a:cubicBezTo>
+                  <a:lnTo>
+                    <a:pt x="2501" y="2774"/>
+                  </a:lnTo>
+                  <a:cubicBezTo>
+                    <a:pt x="2513" y="2572"/>
+                    <a:pt x="2417" y="2381"/>
+                    <a:pt x="2215" y="2298"/>
+                  </a:cubicBezTo>
+                  <a:lnTo>
+                    <a:pt x="1786" y="2084"/>
+                  </a:lnTo>
+                  <a:lnTo>
+                    <a:pt x="1786" y="2072"/>
+                  </a:lnTo>
+                  <a:lnTo>
+                    <a:pt x="1786" y="1822"/>
+                  </a:lnTo>
+                  <a:cubicBezTo>
+                    <a:pt x="2013" y="1655"/>
+                    <a:pt x="2155" y="1381"/>
+                    <a:pt x="2155" y="1084"/>
+                  </a:cubicBezTo>
+                  <a:lnTo>
+                    <a:pt x="2155" y="715"/>
+                  </a:lnTo>
+                  <a:cubicBezTo>
+                    <a:pt x="2155" y="310"/>
+                    <a:pt x="1834" y="0"/>
+                    <a:pt x="1441" y="0"/>
+                  </a:cubicBezTo>
+                  <a:close/>
+                </a:path>
+              </a:pathLst>
+            </a:custGeom>
+            <a:solidFill>
+              <a:srgbClr val="657E93"/>
+            </a:solidFill>
+            <a:ln>
+              <a:noFill/>
+            </a:ln>
+          </p:spPr>
+          <p:txBody>
+            <a:bodyPr spcFirstLastPara="1" wrap="square" lIns="91425" tIns="91425" rIns="91425" bIns="91425" anchor="ctr" anchorCtr="0">
+              <a:noAutofit/>
+            </a:bodyPr>
+            <a:lstStyle/>
+            <a:p>
+              <a:pPr marL="0" lvl="0" indent="0" algn="l" rtl="0">
+                <a:spcBef>
+                  <a:spcPts val="0"/>
+                </a:spcBef>
+                <a:spcAft>
+                  <a:spcPts val="0"/>
+                </a:spcAft>
+                <a:buNone/>
+              </a:pPr>
+              <a:endParaRPr/>
+            </a:p>
+          </p:txBody>
+        </p:sp>
+        <p:sp>
+          <p:nvSpPr>
+            <p:cNvPr id="22" name="Google Shape;12645;p65"/>
+            <p:cNvSpPr/>
+            <p:nvPr/>
+          </p:nvSpPr>
+          <p:spPr>
+            <a:xfrm>
+              <a:off x="7800740" y="3138830"/>
+              <a:ext cx="80364" cy="138322"/>
+            </a:xfrm>
+            <a:custGeom>
+              <a:avLst/>
+              <a:gdLst/>
+              <a:ahLst/>
+              <a:cxnLst/>
+              <a:rect l="l" t="t" r="r" b="b"/>
+              <a:pathLst>
+                <a:path w="2525" h="4346" extrusionOk="0">
+                  <a:moveTo>
+                    <a:pt x="1429" y="345"/>
+                  </a:moveTo>
+                  <a:cubicBezTo>
+                    <a:pt x="1643" y="345"/>
+                    <a:pt x="1810" y="512"/>
+                    <a:pt x="1810" y="715"/>
+                  </a:cubicBezTo>
+                  <a:lnTo>
+                    <a:pt x="1810" y="1084"/>
+                  </a:lnTo>
+                  <a:cubicBezTo>
+                    <a:pt x="1810" y="1405"/>
+                    <a:pt x="1548" y="1655"/>
+                    <a:pt x="1250" y="1655"/>
+                  </a:cubicBezTo>
+                  <a:cubicBezTo>
+                    <a:pt x="941" y="1655"/>
+                    <a:pt x="691" y="1393"/>
+                    <a:pt x="691" y="1084"/>
+                  </a:cubicBezTo>
+                  <a:lnTo>
+                    <a:pt x="691" y="715"/>
+                  </a:lnTo>
+                  <a:cubicBezTo>
+                    <a:pt x="691" y="512"/>
+                    <a:pt x="858" y="345"/>
+                    <a:pt x="1060" y="345"/>
+                  </a:cubicBezTo>
+                  <a:close/>
+                  <a:moveTo>
+                    <a:pt x="1429" y="1988"/>
+                  </a:moveTo>
+                  <a:lnTo>
+                    <a:pt x="1429" y="2072"/>
+                  </a:lnTo>
+                  <a:cubicBezTo>
+                    <a:pt x="1429" y="2131"/>
+                    <a:pt x="1453" y="2191"/>
+                    <a:pt x="1477" y="2250"/>
+                  </a:cubicBezTo>
+                  <a:lnTo>
+                    <a:pt x="1250" y="2489"/>
+                  </a:lnTo>
+                  <a:lnTo>
+                    <a:pt x="1239" y="2489"/>
+                  </a:lnTo>
+                  <a:lnTo>
+                    <a:pt x="1000" y="2250"/>
+                  </a:lnTo>
+                  <a:cubicBezTo>
+                    <a:pt x="1036" y="2191"/>
+                    <a:pt x="1048" y="2131"/>
+                    <a:pt x="1048" y="2072"/>
+                  </a:cubicBezTo>
+                  <a:lnTo>
+                    <a:pt x="1048" y="1988"/>
+                  </a:lnTo>
+                  <a:close/>
+                  <a:moveTo>
+                    <a:pt x="1072" y="0"/>
+                  </a:moveTo>
+                  <a:cubicBezTo>
+                    <a:pt x="679" y="0"/>
+                    <a:pt x="358" y="334"/>
+                    <a:pt x="358" y="715"/>
+                  </a:cubicBezTo>
+                  <a:lnTo>
+                    <a:pt x="358" y="1084"/>
+                  </a:lnTo>
+                  <a:cubicBezTo>
+                    <a:pt x="358" y="1381"/>
+                    <a:pt x="512" y="1655"/>
+                    <a:pt x="739" y="1822"/>
+                  </a:cubicBezTo>
+                  <a:lnTo>
+                    <a:pt x="739" y="2072"/>
+                  </a:lnTo>
+                  <a:lnTo>
+                    <a:pt x="739" y="2084"/>
+                  </a:lnTo>
+                  <a:lnTo>
+                    <a:pt x="298" y="2298"/>
+                  </a:lnTo>
+                  <a:cubicBezTo>
+                    <a:pt x="119" y="2381"/>
+                    <a:pt x="0" y="2572"/>
+                    <a:pt x="0" y="2774"/>
+                  </a:cubicBezTo>
+                  <a:lnTo>
+                    <a:pt x="0" y="4179"/>
+                  </a:lnTo>
+                  <a:cubicBezTo>
+                    <a:pt x="0" y="4274"/>
+                    <a:pt x="84" y="4346"/>
+                    <a:pt x="167" y="4346"/>
+                  </a:cubicBezTo>
+                  <a:cubicBezTo>
+                    <a:pt x="250" y="4346"/>
+                    <a:pt x="334" y="4274"/>
+                    <a:pt x="334" y="4179"/>
+                  </a:cubicBezTo>
+                  <a:lnTo>
+                    <a:pt x="334" y="2774"/>
+                  </a:lnTo>
+                  <a:cubicBezTo>
+                    <a:pt x="334" y="2691"/>
+                    <a:pt x="369" y="2631"/>
+                    <a:pt x="429" y="2596"/>
+                  </a:cubicBezTo>
+                  <a:lnTo>
+                    <a:pt x="727" y="2441"/>
+                  </a:lnTo>
+                  <a:lnTo>
+                    <a:pt x="1000" y="2715"/>
+                  </a:lnTo>
+                  <a:cubicBezTo>
+                    <a:pt x="1072" y="2786"/>
+                    <a:pt x="1167" y="2810"/>
+                    <a:pt x="1250" y="2810"/>
+                  </a:cubicBezTo>
+                  <a:cubicBezTo>
+                    <a:pt x="1346" y="2810"/>
+                    <a:pt x="1429" y="2786"/>
+                    <a:pt x="1512" y="2715"/>
+                  </a:cubicBezTo>
+                  <a:lnTo>
+                    <a:pt x="1774" y="2441"/>
+                  </a:lnTo>
+                  <a:lnTo>
+                    <a:pt x="2072" y="2596"/>
+                  </a:lnTo>
+                  <a:cubicBezTo>
+                    <a:pt x="2132" y="2619"/>
+                    <a:pt x="2179" y="2691"/>
+                    <a:pt x="2179" y="2774"/>
+                  </a:cubicBezTo>
+                  <a:lnTo>
+                    <a:pt x="2179" y="4179"/>
+                  </a:lnTo>
+                  <a:cubicBezTo>
+                    <a:pt x="2179" y="4274"/>
+                    <a:pt x="2251" y="4346"/>
+                    <a:pt x="2334" y="4346"/>
+                  </a:cubicBezTo>
+                  <a:cubicBezTo>
+                    <a:pt x="2429" y="4346"/>
+                    <a:pt x="2501" y="4274"/>
+                    <a:pt x="2501" y="4179"/>
+                  </a:cubicBezTo>
+                  <a:lnTo>
+                    <a:pt x="2501" y="2774"/>
+                  </a:lnTo>
+                  <a:cubicBezTo>
+                    <a:pt x="2524" y="2572"/>
+                    <a:pt x="2405" y="2381"/>
+                    <a:pt x="2227" y="2298"/>
+                  </a:cubicBezTo>
+                  <a:lnTo>
+                    <a:pt x="1786" y="2084"/>
+                  </a:lnTo>
+                  <a:lnTo>
+                    <a:pt x="1786" y="2072"/>
+                  </a:lnTo>
+                  <a:lnTo>
+                    <a:pt x="1786" y="1822"/>
+                  </a:lnTo>
+                  <a:cubicBezTo>
+                    <a:pt x="2012" y="1655"/>
+                    <a:pt x="2167" y="1381"/>
+                    <a:pt x="2167" y="1084"/>
+                  </a:cubicBezTo>
+                  <a:lnTo>
+                    <a:pt x="2167" y="715"/>
+                  </a:lnTo>
+                  <a:cubicBezTo>
+                    <a:pt x="2167" y="310"/>
+                    <a:pt x="1834" y="0"/>
+                    <a:pt x="1453" y="0"/>
+                  </a:cubicBezTo>
+                  <a:close/>
+                </a:path>
+              </a:pathLst>
+            </a:custGeom>
+            <a:solidFill>
+              <a:srgbClr val="657E93"/>
+            </a:solidFill>
+            <a:ln>
+              <a:noFill/>
+            </a:ln>
+          </p:spPr>
+          <p:txBody>
+            <a:bodyPr spcFirstLastPara="1" wrap="square" lIns="91425" tIns="91425" rIns="91425" bIns="91425" anchor="ctr" anchorCtr="0">
+              <a:noAutofit/>
+            </a:bodyPr>
+            <a:lstStyle/>
+            <a:p>
+              <a:pPr marL="0" lvl="0" indent="0" algn="l" rtl="0">
+                <a:spcBef>
+                  <a:spcPts val="0"/>
+                </a:spcBef>
+                <a:spcAft>
+                  <a:spcPts val="0"/>
+                </a:spcAft>
+                <a:buNone/>
+              </a:pPr>
+              <a:endParaRPr/>
+            </a:p>
+          </p:txBody>
+        </p:sp>
+        <p:sp>
+          <p:nvSpPr>
+            <p:cNvPr id="23" name="Google Shape;12646;p65"/>
+            <p:cNvSpPr/>
+            <p:nvPr/>
+          </p:nvSpPr>
+          <p:spPr>
+            <a:xfrm>
+              <a:off x="7521454" y="3138830"/>
+              <a:ext cx="79983" cy="138322"/>
+            </a:xfrm>
+            <a:custGeom>
+              <a:avLst/>
+              <a:gdLst/>
+              <a:ahLst/>
+              <a:cxnLst/>
+              <a:rect l="l" t="t" r="r" b="b"/>
+              <a:pathLst>
+                <a:path w="2513" h="4346" extrusionOk="0">
+                  <a:moveTo>
+                    <a:pt x="1429" y="345"/>
+                  </a:moveTo>
+                  <a:cubicBezTo>
+                    <a:pt x="1632" y="345"/>
+                    <a:pt x="1798" y="512"/>
+                    <a:pt x="1798" y="715"/>
+                  </a:cubicBezTo>
+                  <a:lnTo>
+                    <a:pt x="1798" y="1084"/>
+                  </a:lnTo>
+                  <a:cubicBezTo>
+                    <a:pt x="1810" y="1405"/>
+                    <a:pt x="1560" y="1655"/>
+                    <a:pt x="1251" y="1655"/>
+                  </a:cubicBezTo>
+                  <a:cubicBezTo>
+                    <a:pt x="941" y="1655"/>
+                    <a:pt x="679" y="1393"/>
+                    <a:pt x="679" y="1084"/>
+                  </a:cubicBezTo>
+                  <a:lnTo>
+                    <a:pt x="679" y="715"/>
+                  </a:lnTo>
+                  <a:cubicBezTo>
+                    <a:pt x="679" y="512"/>
+                    <a:pt x="846" y="345"/>
+                    <a:pt x="1060" y="345"/>
+                  </a:cubicBezTo>
+                  <a:close/>
+                  <a:moveTo>
+                    <a:pt x="1441" y="1988"/>
+                  </a:moveTo>
+                  <a:lnTo>
+                    <a:pt x="1441" y="2072"/>
+                  </a:lnTo>
+                  <a:cubicBezTo>
+                    <a:pt x="1441" y="2131"/>
+                    <a:pt x="1453" y="2191"/>
+                    <a:pt x="1489" y="2250"/>
+                  </a:cubicBezTo>
+                  <a:lnTo>
+                    <a:pt x="1262" y="2489"/>
+                  </a:lnTo>
+                  <a:lnTo>
+                    <a:pt x="1251" y="2489"/>
+                  </a:lnTo>
+                  <a:lnTo>
+                    <a:pt x="1012" y="2250"/>
+                  </a:lnTo>
+                  <a:cubicBezTo>
+                    <a:pt x="1036" y="2191"/>
+                    <a:pt x="1060" y="2131"/>
+                    <a:pt x="1060" y="2072"/>
+                  </a:cubicBezTo>
+                  <a:lnTo>
+                    <a:pt x="1060" y="1988"/>
+                  </a:lnTo>
+                  <a:close/>
+                  <a:moveTo>
+                    <a:pt x="1072" y="0"/>
+                  </a:moveTo>
+                  <a:cubicBezTo>
+                    <a:pt x="667" y="0"/>
+                    <a:pt x="358" y="334"/>
+                    <a:pt x="358" y="715"/>
+                  </a:cubicBezTo>
+                  <a:lnTo>
+                    <a:pt x="358" y="1084"/>
+                  </a:lnTo>
+                  <a:cubicBezTo>
+                    <a:pt x="358" y="1381"/>
+                    <a:pt x="500" y="1655"/>
+                    <a:pt x="727" y="1822"/>
+                  </a:cubicBezTo>
+                  <a:lnTo>
+                    <a:pt x="727" y="2072"/>
+                  </a:lnTo>
+                  <a:lnTo>
+                    <a:pt x="727" y="2084"/>
+                  </a:lnTo>
+                  <a:lnTo>
+                    <a:pt x="298" y="2298"/>
+                  </a:lnTo>
+                  <a:cubicBezTo>
+                    <a:pt x="119" y="2381"/>
+                    <a:pt x="0" y="2572"/>
+                    <a:pt x="0" y="2774"/>
+                  </a:cubicBezTo>
+                  <a:lnTo>
+                    <a:pt x="0" y="4179"/>
+                  </a:lnTo>
+                  <a:cubicBezTo>
+                    <a:pt x="0" y="4274"/>
+                    <a:pt x="72" y="4346"/>
+                    <a:pt x="167" y="4346"/>
+                  </a:cubicBezTo>
+                  <a:cubicBezTo>
+                    <a:pt x="250" y="4346"/>
+                    <a:pt x="322" y="4274"/>
+                    <a:pt x="322" y="4179"/>
+                  </a:cubicBezTo>
+                  <a:lnTo>
+                    <a:pt x="322" y="2774"/>
+                  </a:lnTo>
+                  <a:cubicBezTo>
+                    <a:pt x="322" y="2691"/>
+                    <a:pt x="370" y="2631"/>
+                    <a:pt x="429" y="2596"/>
+                  </a:cubicBezTo>
+                  <a:lnTo>
+                    <a:pt x="727" y="2441"/>
+                  </a:lnTo>
+                  <a:lnTo>
+                    <a:pt x="989" y="2715"/>
+                  </a:lnTo>
+                  <a:cubicBezTo>
+                    <a:pt x="1072" y="2786"/>
+                    <a:pt x="1155" y="2810"/>
+                    <a:pt x="1251" y="2810"/>
+                  </a:cubicBezTo>
+                  <a:cubicBezTo>
+                    <a:pt x="1334" y="2810"/>
+                    <a:pt x="1429" y="2786"/>
+                    <a:pt x="1501" y="2715"/>
+                  </a:cubicBezTo>
+                  <a:lnTo>
+                    <a:pt x="1763" y="2441"/>
+                  </a:lnTo>
+                  <a:lnTo>
+                    <a:pt x="2060" y="2596"/>
+                  </a:lnTo>
+                  <a:cubicBezTo>
+                    <a:pt x="2132" y="2619"/>
+                    <a:pt x="2167" y="2691"/>
+                    <a:pt x="2167" y="2774"/>
+                  </a:cubicBezTo>
+                  <a:lnTo>
+                    <a:pt x="2167" y="4179"/>
+                  </a:lnTo>
+                  <a:cubicBezTo>
+                    <a:pt x="2167" y="4274"/>
+                    <a:pt x="2251" y="4346"/>
+                    <a:pt x="2334" y="4346"/>
+                  </a:cubicBezTo>
+                  <a:cubicBezTo>
+                    <a:pt x="2417" y="4346"/>
+                    <a:pt x="2501" y="4274"/>
+                    <a:pt x="2501" y="4179"/>
+                  </a:cubicBezTo>
+                  <a:lnTo>
+                    <a:pt x="2501" y="2774"/>
+                  </a:lnTo>
+                  <a:cubicBezTo>
+                    <a:pt x="2513" y="2572"/>
+                    <a:pt x="2405" y="2381"/>
+                    <a:pt x="2215" y="2298"/>
+                  </a:cubicBezTo>
+                  <a:lnTo>
+                    <a:pt x="1786" y="2084"/>
+                  </a:lnTo>
+                  <a:lnTo>
+                    <a:pt x="1786" y="2072"/>
+                  </a:lnTo>
+                  <a:lnTo>
+                    <a:pt x="1786" y="1822"/>
+                  </a:lnTo>
+                  <a:cubicBezTo>
+                    <a:pt x="2013" y="1655"/>
+                    <a:pt x="2155" y="1381"/>
+                    <a:pt x="2155" y="1084"/>
+                  </a:cubicBezTo>
+                  <a:lnTo>
+                    <a:pt x="2155" y="715"/>
+                  </a:lnTo>
+                  <a:cubicBezTo>
+                    <a:pt x="2155" y="310"/>
+                    <a:pt x="1834" y="0"/>
+                    <a:pt x="1441" y="0"/>
+                  </a:cubicBezTo>
+                  <a:close/>
+                </a:path>
+              </a:pathLst>
+            </a:custGeom>
+            <a:solidFill>
+              <a:srgbClr val="657E93"/>
+            </a:solidFill>
+            <a:ln>
+              <a:noFill/>
+            </a:ln>
+          </p:spPr>
+          <p:txBody>
+            <a:bodyPr spcFirstLastPara="1" wrap="square" lIns="91425" tIns="91425" rIns="91425" bIns="91425" anchor="ctr" anchorCtr="0">
+              <a:noAutofit/>
+            </a:bodyPr>
+            <a:lstStyle/>
+            <a:p>
+              <a:pPr marL="0" lvl="0" indent="0" algn="l" rtl="0">
+                <a:spcBef>
+                  <a:spcPts val="0"/>
+                </a:spcBef>
+                <a:spcAft>
+                  <a:spcPts val="0"/>
+                </a:spcAft>
+                <a:buNone/>
+              </a:pPr>
+              <a:endParaRPr/>
+            </a:p>
+          </p:txBody>
+        </p:sp>
+        <p:sp>
+          <p:nvSpPr>
+            <p:cNvPr id="24" name="Google Shape;12647;p65"/>
+            <p:cNvSpPr/>
+            <p:nvPr/>
+          </p:nvSpPr>
+          <p:spPr>
+            <a:xfrm>
+              <a:off x="7555923" y="2906139"/>
+              <a:ext cx="289949" cy="219833"/>
+            </a:xfrm>
+            <a:custGeom>
+              <a:avLst/>
+              <a:gdLst/>
+              <a:ahLst/>
+              <a:cxnLst/>
+              <a:rect l="l" t="t" r="r" b="b"/>
+              <a:pathLst>
+                <a:path w="9110" h="6907" extrusionOk="0">
+                  <a:moveTo>
+                    <a:pt x="4561" y="1"/>
+                  </a:moveTo>
+                  <a:cubicBezTo>
+                    <a:pt x="4501" y="1"/>
+                    <a:pt x="4442" y="36"/>
+                    <a:pt x="4406" y="96"/>
+                  </a:cubicBezTo>
+                  <a:lnTo>
+                    <a:pt x="3859" y="1191"/>
+                  </a:lnTo>
+                  <a:cubicBezTo>
+                    <a:pt x="3811" y="1287"/>
+                    <a:pt x="3847" y="1382"/>
+                    <a:pt x="3930" y="1418"/>
+                  </a:cubicBezTo>
+                  <a:cubicBezTo>
+                    <a:pt x="3959" y="1432"/>
+                    <a:pt x="3988" y="1439"/>
+                    <a:pt x="4016" y="1439"/>
+                  </a:cubicBezTo>
+                  <a:cubicBezTo>
+                    <a:pt x="4078" y="1439"/>
+                    <a:pt x="4131" y="1404"/>
+                    <a:pt x="4156" y="1346"/>
+                  </a:cubicBezTo>
+                  <a:lnTo>
+                    <a:pt x="4382" y="894"/>
+                  </a:lnTo>
+                  <a:lnTo>
+                    <a:pt x="4382" y="4204"/>
+                  </a:lnTo>
+                  <a:lnTo>
+                    <a:pt x="715" y="4204"/>
+                  </a:lnTo>
+                  <a:cubicBezTo>
+                    <a:pt x="310" y="4204"/>
+                    <a:pt x="1" y="4525"/>
+                    <a:pt x="1" y="4918"/>
+                  </a:cubicBezTo>
+                  <a:lnTo>
+                    <a:pt x="1" y="6752"/>
+                  </a:lnTo>
+                  <a:cubicBezTo>
+                    <a:pt x="1" y="6835"/>
+                    <a:pt x="72" y="6906"/>
+                    <a:pt x="168" y="6906"/>
+                  </a:cubicBezTo>
+                  <a:cubicBezTo>
+                    <a:pt x="251" y="6906"/>
+                    <a:pt x="334" y="6835"/>
+                    <a:pt x="334" y="6752"/>
+                  </a:cubicBezTo>
+                  <a:lnTo>
+                    <a:pt x="334" y="4918"/>
+                  </a:lnTo>
+                  <a:cubicBezTo>
+                    <a:pt x="334" y="4704"/>
+                    <a:pt x="489" y="4549"/>
+                    <a:pt x="703" y="4549"/>
+                  </a:cubicBezTo>
+                  <a:lnTo>
+                    <a:pt x="2906" y="4549"/>
+                  </a:lnTo>
+                  <a:lnTo>
+                    <a:pt x="2906" y="6752"/>
+                  </a:lnTo>
+                  <a:cubicBezTo>
+                    <a:pt x="2906" y="6835"/>
+                    <a:pt x="2977" y="6906"/>
+                    <a:pt x="3061" y="6906"/>
+                  </a:cubicBezTo>
+                  <a:cubicBezTo>
+                    <a:pt x="3156" y="6906"/>
+                    <a:pt x="3227" y="6835"/>
+                    <a:pt x="3227" y="6752"/>
+                  </a:cubicBezTo>
+                  <a:lnTo>
+                    <a:pt x="3227" y="4549"/>
+                  </a:lnTo>
+                  <a:lnTo>
+                    <a:pt x="5823" y="4549"/>
+                  </a:lnTo>
+                  <a:lnTo>
+                    <a:pt x="5823" y="6752"/>
+                  </a:lnTo>
+                  <a:cubicBezTo>
+                    <a:pt x="5823" y="6835"/>
+                    <a:pt x="5894" y="6906"/>
+                    <a:pt x="5978" y="6906"/>
+                  </a:cubicBezTo>
+                  <a:cubicBezTo>
+                    <a:pt x="6073" y="6906"/>
+                    <a:pt x="6145" y="6835"/>
+                    <a:pt x="6145" y="6752"/>
+                  </a:cubicBezTo>
+                  <a:lnTo>
+                    <a:pt x="6145" y="4549"/>
+                  </a:lnTo>
+                  <a:lnTo>
+                    <a:pt x="8347" y="4549"/>
+                  </a:lnTo>
+                  <a:cubicBezTo>
+                    <a:pt x="8561" y="4549"/>
+                    <a:pt x="8716" y="4704"/>
+                    <a:pt x="8716" y="4918"/>
+                  </a:cubicBezTo>
+                  <a:lnTo>
+                    <a:pt x="8716" y="6752"/>
+                  </a:lnTo>
+                  <a:cubicBezTo>
+                    <a:pt x="8716" y="6835"/>
+                    <a:pt x="8800" y="6906"/>
+                    <a:pt x="8883" y="6906"/>
+                  </a:cubicBezTo>
+                  <a:cubicBezTo>
+                    <a:pt x="8978" y="6906"/>
+                    <a:pt x="9050" y="6835"/>
+                    <a:pt x="9050" y="6752"/>
+                  </a:cubicBezTo>
+                  <a:lnTo>
+                    <a:pt x="9050" y="4918"/>
+                  </a:lnTo>
+                  <a:cubicBezTo>
+                    <a:pt x="9109" y="4525"/>
+                    <a:pt x="8788" y="4204"/>
+                    <a:pt x="8395" y="4204"/>
+                  </a:cubicBezTo>
+                  <a:lnTo>
+                    <a:pt x="4740" y="4204"/>
+                  </a:lnTo>
+                  <a:lnTo>
+                    <a:pt x="4740" y="894"/>
+                  </a:lnTo>
+                  <a:lnTo>
+                    <a:pt x="4954" y="1346"/>
+                  </a:lnTo>
+                  <a:cubicBezTo>
+                    <a:pt x="4990" y="1406"/>
+                    <a:pt x="5049" y="1429"/>
+                    <a:pt x="5109" y="1429"/>
+                  </a:cubicBezTo>
+                  <a:cubicBezTo>
+                    <a:pt x="5132" y="1429"/>
+                    <a:pt x="5156" y="1429"/>
+                    <a:pt x="5180" y="1418"/>
+                  </a:cubicBezTo>
+                  <a:cubicBezTo>
+                    <a:pt x="5275" y="1370"/>
+                    <a:pt x="5299" y="1263"/>
+                    <a:pt x="5252" y="1191"/>
+                  </a:cubicBezTo>
+                  <a:lnTo>
+                    <a:pt x="4704" y="96"/>
+                  </a:lnTo>
+                  <a:cubicBezTo>
+                    <a:pt x="4680" y="36"/>
+                    <a:pt x="4621" y="1"/>
+                    <a:pt x="4561" y="1"/>
+                  </a:cubicBezTo>
+                  <a:close/>
+                </a:path>
+              </a:pathLst>
+            </a:custGeom>
+            <a:solidFill>
+              <a:srgbClr val="657E93"/>
+            </a:solidFill>
+            <a:ln>
+              <a:noFill/>
+            </a:ln>
+          </p:spPr>
+          <p:txBody>
+            <a:bodyPr spcFirstLastPara="1" wrap="square" lIns="91425" tIns="91425" rIns="91425" bIns="91425" anchor="ctr" anchorCtr="0">
+              <a:noAutofit/>
+            </a:bodyPr>
+            <a:lstStyle/>
+            <a:p>
+              <a:pPr marL="0" lvl="0" indent="0" algn="l" rtl="0">
+                <a:spcBef>
+                  <a:spcPts val="0"/>
+                </a:spcBef>
+                <a:spcAft>
+                  <a:spcPts val="0"/>
+                </a:spcAft>
+                <a:buNone/>
+              </a:pPr>
+              <a:endParaRPr/>
+            </a:p>
+          </p:txBody>
+        </p:sp>
+      </p:grpSp>
+    </p:spTree>
+  </p:cSld>
+  <p:clrMapOvr>
+    <a:masterClrMapping/>
+  </p:clrMapOvr>
+  <p:transition>
+    <p:zoom/>
+  </p:transition>
+  <p:timing>
+    <p:tnLst>
+      <p:par>
+        <p:cTn id="1" dur="indefinite" restart="never" nodeType="tmRoot"/>
+      </p:par>
+    </p:tnLst>
+  </p:timing>
+</p:sld>
+</file>
+
+<file path=ppt/slides/slide4.xml><?xml version="1.0" encoding="utf-8"?>
+<p:sld xmlns:a="http://schemas.openxmlformats.org/drawingml/2006/main" xmlns:r="http://schemas.openxmlformats.org/officeDocument/2006/relationships" xmlns:p="http://schemas.openxmlformats.org/presentationml/2006/main">
+  <p:cSld>
+    <p:spTree>
+      <p:nvGrpSpPr>
+        <p:cNvPr id="1" name="Shape 457"/>
+        <p:cNvGrpSpPr/>
+        <p:nvPr/>
+      </p:nvGrpSpPr>
+      <p:grpSpPr>
+        <a:xfrm>
+          <a:off x="0" y="0"/>
+          <a:ext cx="0" cy="0"/>
+          <a:chOff x="0" y="0"/>
+          <a:chExt cx="0" cy="0"/>
+        </a:xfrm>
+      </p:grpSpPr>
+      <p:sp>
+        <p:nvSpPr>
+          <p:cNvPr id="458" name="Google Shape;458;p27"/>
+          <p:cNvSpPr txBox="1">
+            <a:spLocks noGrp="1"/>
+          </p:cNvSpPr>
+          <p:nvPr>
+            <p:ph type="ctrTitle"/>
+          </p:nvPr>
+        </p:nvSpPr>
+        <p:spPr>
+          <a:xfrm>
+            <a:off x="971600" y="771550"/>
+            <a:ext cx="4598635" cy="517500"/>
+          </a:xfrm>
+          <a:prstGeom prst="rect">
+            <a:avLst/>
+          </a:prstGeom>
+        </p:spPr>
+        <p:txBody>
+          <a:bodyPr spcFirstLastPara="1" wrap="square" lIns="91425" tIns="91425" rIns="91425" bIns="91425" anchor="ctr" anchorCtr="0">
+            <a:noAutofit/>
+          </a:bodyPr>
+          <a:lstStyle/>
+          <a:p>
+            <a:pPr lvl="0"/>
+            <a:r>
+              <a:rPr lang="ru-RU" sz="2800" dirty="0" smtClean="0"/>
+              <a:t>Как выглядит игра</a:t>
+            </a:r>
+            <a:r>
+              <a:rPr lang="en" sz="2800" dirty="0" smtClean="0">
+                <a:solidFill>
+                  <a:schemeClr val="accent6"/>
+                </a:solidFill>
+              </a:rPr>
+              <a:t>{</a:t>
+            </a:r>
+            <a:endParaRPr sz="2800" dirty="0">
+              <a:solidFill>
+                <a:schemeClr val="accent3"/>
+              </a:solidFill>
+            </a:endParaRPr>
+          </a:p>
+        </p:txBody>
+      </p:sp>
+      <p:grpSp>
+        <p:nvGrpSpPr>
+          <p:cNvPr id="2" name="Google Shape;462;p27"/>
+          <p:cNvGrpSpPr/>
+          <p:nvPr/>
+        </p:nvGrpSpPr>
+        <p:grpSpPr>
+          <a:xfrm>
+            <a:off x="1403648" y="1347614"/>
+            <a:ext cx="506100" cy="2841277"/>
+            <a:chOff x="1403648" y="1759900"/>
+            <a:chExt cx="506100" cy="2431274"/>
+          </a:xfrm>
+        </p:grpSpPr>
+        <p:cxnSp>
+          <p:nvCxnSpPr>
+            <p:cNvPr id="463" name="Google Shape;463;p27"/>
+            <p:cNvCxnSpPr/>
+            <p:nvPr/>
+          </p:nvCxnSpPr>
+          <p:spPr>
+            <a:xfrm>
+              <a:off x="1552225" y="1759900"/>
+              <a:ext cx="0" cy="1763400"/>
+            </a:xfrm>
+            <a:prstGeom prst="straightConnector1">
+              <a:avLst/>
+            </a:prstGeom>
+            <a:noFill/>
+            <a:ln w="9525" cap="flat" cmpd="sng">
+              <a:solidFill>
+                <a:schemeClr val="accent4"/>
+              </a:solidFill>
+              <a:prstDash val="solid"/>
+              <a:round/>
+              <a:headEnd type="none" w="med" len="med"/>
+              <a:tailEnd type="none" w="med" len="med"/>
+            </a:ln>
+          </p:spPr>
+        </p:cxnSp>
+        <p:sp>
+          <p:nvSpPr>
+            <p:cNvPr id="464" name="Google Shape;464;p27"/>
+            <p:cNvSpPr txBox="1"/>
+            <p:nvPr/>
+          </p:nvSpPr>
+          <p:spPr>
+            <a:xfrm>
+              <a:off x="1403648" y="3575651"/>
+              <a:ext cx="506100" cy="615523"/>
+            </a:xfrm>
+            <a:prstGeom prst="rect">
+              <a:avLst/>
+            </a:prstGeom>
+            <a:noFill/>
+            <a:ln>
+              <a:noFill/>
+            </a:ln>
+          </p:spPr>
+          <p:txBody>
+            <a:bodyPr spcFirstLastPara="1" wrap="square" lIns="91425" tIns="91425" rIns="91425" bIns="91425" anchor="t" anchorCtr="0">
+              <a:spAutoFit/>
+            </a:bodyPr>
+            <a:lstStyle/>
+            <a:p>
+              <a:pPr marL="0" lvl="0" indent="0" algn="l" rtl="0">
+                <a:spcBef>
+                  <a:spcPts val="0"/>
+                </a:spcBef>
+                <a:spcAft>
+                  <a:spcPts val="0"/>
+                </a:spcAft>
+                <a:buNone/>
+              </a:pPr>
+              <a:r>
+                <a:rPr lang="en" sz="2800" dirty="0">
+                  <a:solidFill>
+                    <a:schemeClr val="accent3"/>
+                  </a:solidFill>
+                  <a:latin typeface="Fira Code"/>
+                  <a:ea typeface="Fira Code"/>
+                  <a:cs typeface="Fira Code"/>
+                  <a:sym typeface="Fira Code"/>
+                </a:rPr>
+                <a:t>}</a:t>
+              </a:r>
+              <a:endParaRPr sz="2800" dirty="0">
+                <a:solidFill>
+                  <a:schemeClr val="accent3"/>
+                </a:solidFill>
+                <a:latin typeface="Fira Code"/>
+                <a:ea typeface="Fira Code"/>
+                <a:cs typeface="Fira Code"/>
+                <a:sym typeface="Fira Code"/>
+              </a:endParaRPr>
+            </a:p>
+          </p:txBody>
+        </p:sp>
+      </p:grpSp>
+      <p:sp>
+        <p:nvSpPr>
+          <p:cNvPr id="465" name="Google Shape;465;p27"/>
+          <p:cNvSpPr txBox="1">
+            <a:spLocks noGrp="1"/>
+          </p:cNvSpPr>
+          <p:nvPr>
+            <p:ph type="subTitle" idx="1"/>
+          </p:nvPr>
+        </p:nvSpPr>
+        <p:spPr>
+          <a:xfrm>
+            <a:off x="-5975" y="91525"/>
+            <a:ext cx="4572000" cy="357300"/>
+          </a:xfrm>
+          <a:prstGeom prst="rect">
+            <a:avLst/>
+          </a:prstGeom>
+        </p:spPr>
+        <p:txBody>
+          <a:bodyPr spcFirstLastPara="1" wrap="square" lIns="91425" tIns="91425" rIns="91425" bIns="91425" anchor="ctr" anchorCtr="0">
+            <a:noAutofit/>
+          </a:bodyPr>
+          <a:lstStyle/>
+          <a:p>
+            <a:pPr marL="0" lvl="0" indent="0" algn="ctr" rtl="0">
+              <a:spcBef>
+                <a:spcPts val="0"/>
+              </a:spcBef>
+              <a:spcAft>
+                <a:spcPts val="0"/>
+              </a:spcAft>
+              <a:buNone/>
+            </a:pPr>
+            <a:r>
+              <a:rPr lang="en-US" sz="1400" dirty="0" smtClean="0"/>
+              <a:t>server</a:t>
+            </a:r>
+            <a:r>
+              <a:rPr lang="en" sz="1400" dirty="0" smtClean="0">
+                <a:solidFill>
+                  <a:schemeClr val="accent3"/>
+                </a:solidFill>
+              </a:rPr>
+              <a:t>.cpp</a:t>
+            </a:r>
+            <a:endParaRPr sz="1400" dirty="0">
+              <a:solidFill>
+                <a:schemeClr val="accent3"/>
+              </a:solidFill>
+            </a:endParaRPr>
+          </a:p>
+        </p:txBody>
+      </p:sp>
+      <p:sp>
+        <p:nvSpPr>
+          <p:cNvPr id="466" name="Google Shape;466;p27"/>
+          <p:cNvSpPr txBox="1">
+            <a:spLocks noGrp="1"/>
+          </p:cNvSpPr>
+          <p:nvPr>
+            <p:ph type="subTitle" idx="1"/>
+          </p:nvPr>
+        </p:nvSpPr>
+        <p:spPr>
+          <a:xfrm>
+            <a:off x="4572000" y="91525"/>
+            <a:ext cx="4572000" cy="357300"/>
+          </a:xfrm>
+          <a:prstGeom prst="rect">
+            <a:avLst/>
+          </a:prstGeom>
+        </p:spPr>
+        <p:txBody>
+          <a:bodyPr spcFirstLastPara="1" wrap="square" lIns="91425" tIns="91425" rIns="91425" bIns="91425" anchor="ctr" anchorCtr="0">
+            <a:noAutofit/>
+          </a:bodyPr>
+          <a:lstStyle/>
+          <a:p>
+            <a:pPr marL="0" lvl="0" indent="0" algn="ctr"/>
+            <a:r>
+              <a:rPr lang="en-US" sz="1400" dirty="0" smtClean="0"/>
+              <a:t>client.cpp</a:t>
+            </a:r>
+            <a:endParaRPr lang="en-US" sz="1400" dirty="0"/>
+          </a:p>
+        </p:txBody>
+      </p:sp>
+      <p:sp>
+        <p:nvSpPr>
+          <p:cNvPr id="2050" name="AutoShape 2" descr="blob:https://web.telegram.org/4e9ce96d-8ac1-4b9b-a271-bb41966aabb1"/>
+          <p:cNvSpPr>
+            <a:spLocks noChangeAspect="1" noChangeArrowheads="1"/>
+          </p:cNvSpPr>
+          <p:nvPr/>
+        </p:nvSpPr>
+        <p:spPr bwMode="auto">
+          <a:xfrm>
+            <a:off x="155575" y="-144463"/>
+            <a:ext cx="304800" cy="304801"/>
+          </a:xfrm>
+          <a:prstGeom prst="rect">
+            <a:avLst/>
+          </a:prstGeom>
+          <a:noFill/>
+        </p:spPr>
+        <p:txBody>
+          <a:bodyPr vert="horz" wrap="square" lIns="91440" tIns="45720" rIns="91440" bIns="45720" numCol="1" anchor="t" anchorCtr="0" compatLnSpc="1">
+            <a:prstTxWarp prst="textNoShape">
+              <a:avLst/>
+            </a:prstTxWarp>
+          </a:bodyPr>
+          <a:lstStyle/>
+          <a:p>
+            <a:endParaRPr lang="ru-RU"/>
+          </a:p>
+        </p:txBody>
+      </p:sp>
+      <p:sp>
+        <p:nvSpPr>
+          <p:cNvPr id="2052" name="AutoShape 4" descr="blob:https://web.telegram.org/4e9ce96d-8ac1-4b9b-a271-bb41966aabb1"/>
+          <p:cNvSpPr>
+            <a:spLocks noChangeAspect="1" noChangeArrowheads="1"/>
+          </p:cNvSpPr>
+          <p:nvPr/>
+        </p:nvSpPr>
+        <p:spPr bwMode="auto">
+          <a:xfrm>
+            <a:off x="155575" y="-144463"/>
+            <a:ext cx="304800" cy="304801"/>
+          </a:xfrm>
+          <a:prstGeom prst="rect">
+            <a:avLst/>
+          </a:prstGeom>
+          <a:noFill/>
+        </p:spPr>
+        <p:txBody>
+          <a:bodyPr vert="horz" wrap="square" lIns="91440" tIns="45720" rIns="91440" bIns="45720" numCol="1" anchor="t" anchorCtr="0" compatLnSpc="1">
+            <a:prstTxWarp prst="textNoShape">
+              <a:avLst/>
+            </a:prstTxWarp>
+          </a:bodyPr>
+          <a:lstStyle/>
+          <a:p>
+            <a:endParaRPr lang="ru-RU"/>
+          </a:p>
+        </p:txBody>
+      </p:sp>
+      <p:pic>
+        <p:nvPicPr>
+          <p:cNvPr id="2053" name="Picture 5" descr="D:\ЗАГРУЗКИ\photo_5298542171025774947_x.jpg"/>
+          <p:cNvPicPr>
+            <a:picLocks noChangeAspect="1" noChangeArrowheads="1"/>
+          </p:cNvPicPr>
+          <p:nvPr/>
+        </p:nvPicPr>
+        <p:blipFill>
+          <a:blip r:embed="rId3"/>
+          <a:srcRect/>
+          <a:stretch>
+            <a:fillRect/>
+          </a:stretch>
+        </p:blipFill>
+        <p:spPr bwMode="auto">
+          <a:xfrm>
+            <a:off x="1691680" y="1275606"/>
+            <a:ext cx="7038975" cy="2305050"/>
+          </a:xfrm>
+          <a:prstGeom prst="rect">
+            <a:avLst/>
+          </a:prstGeom>
+          <a:noFill/>
+        </p:spPr>
+      </p:pic>
+    </p:spTree>
+  </p:cSld>
+  <p:clrMapOvr>
+    <a:masterClrMapping/>
+  </p:clrMapOvr>
+  <p:transition>
+    <p:randomBar/>
+  </p:transition>
+  <p:timing>
+    <p:tnLst>
+      <p:par>
+        <p:cTn id="1" dur="indefinite" restart="never" nodeType="tmRoot"/>
+      </p:par>
+    </p:tnLst>
+  </p:timing>
+</p:sld>
+</file>
+
+<file path=ppt/slides/slide5.xml><?xml version="1.0" encoding="utf-8"?>
+<p:sld xmlns:a="http://schemas.openxmlformats.org/drawingml/2006/main" xmlns:r="http://schemas.openxmlformats.org/officeDocument/2006/relationships" xmlns:p="http://schemas.openxmlformats.org/presentationml/2006/main">
+  <p:cSld>
+    <p:spTree>
+      <p:nvGrpSpPr>
+        <p:cNvPr id="1" name="Shape 851"/>
+        <p:cNvGrpSpPr/>
+        <p:nvPr/>
+      </p:nvGrpSpPr>
+      <p:grpSpPr>
+        <a:xfrm>
+          <a:off x="0" y="0"/>
+          <a:ext cx="0" cy="0"/>
+          <a:chOff x="0" y="0"/>
+          <a:chExt cx="0" cy="0"/>
+        </a:xfrm>
+      </p:grpSpPr>
+      <p:sp>
+        <p:nvSpPr>
+          <p:cNvPr id="852" name="Google Shape;852;p42"/>
+          <p:cNvSpPr txBox="1">
+            <a:spLocks noGrp="1"/>
+          </p:cNvSpPr>
+          <p:nvPr>
+            <p:ph type="title"/>
+          </p:nvPr>
+        </p:nvSpPr>
+        <p:spPr>
+          <a:xfrm>
+            <a:off x="1043608" y="140138"/>
+            <a:ext cx="4680520" cy="1423500"/>
+          </a:xfrm>
+          <a:prstGeom prst="rect">
+            <a:avLst/>
+          </a:prstGeom>
+        </p:spPr>
+        <p:txBody>
+          <a:bodyPr spcFirstLastPara="1" wrap="square" lIns="91425" tIns="91425" rIns="91425" bIns="91425" anchor="ctr" anchorCtr="0">
+            <a:noAutofit/>
+          </a:bodyPr>
+          <a:lstStyle/>
+          <a:p>
+            <a:pPr lvl="0"/>
+            <a:r>
+              <a:rPr lang="ru-RU" dirty="0" smtClean="0">
+                <a:solidFill>
+                  <a:srgbClr val="FF5858"/>
+                </a:solidFill>
+              </a:rPr>
+              <a:t>Как выглядит игра</a:t>
+            </a:r>
+            <a:r>
+              <a:rPr lang="en" dirty="0" smtClean="0">
+                <a:solidFill>
+                  <a:schemeClr val="accent6"/>
+                </a:solidFill>
+              </a:rPr>
+              <a:t>{</a:t>
+            </a:r>
+            <a:endParaRPr dirty="0">
+              <a:solidFill>
+                <a:schemeClr val="accent6"/>
+              </a:solidFill>
+            </a:endParaRPr>
+          </a:p>
+        </p:txBody>
+      </p:sp>
+      <p:sp>
+        <p:nvSpPr>
+          <p:cNvPr id="855" name="Google Shape;855;p42"/>
+          <p:cNvSpPr txBox="1">
+            <a:spLocks noGrp="1"/>
+          </p:cNvSpPr>
+          <p:nvPr>
+            <p:ph type="subTitle" idx="4294967295"/>
+          </p:nvPr>
+        </p:nvSpPr>
+        <p:spPr>
+          <a:xfrm>
+            <a:off x="-5975" y="91525"/>
+            <a:ext cx="4572000" cy="357300"/>
+          </a:xfrm>
+          <a:prstGeom prst="rect">
+            <a:avLst/>
+          </a:prstGeom>
+        </p:spPr>
+        <p:txBody>
+          <a:bodyPr spcFirstLastPara="1" wrap="square" lIns="91425" tIns="91425" rIns="91425" bIns="91425" anchor="ctr" anchorCtr="0">
+            <a:noAutofit/>
+          </a:bodyPr>
+          <a:lstStyle/>
+          <a:p>
+            <a:pPr marL="0" lvl="0" indent="0" algn="ctr" rtl="0">
+              <a:spcBef>
+                <a:spcPts val="0"/>
+              </a:spcBef>
+              <a:spcAft>
+                <a:spcPts val="0"/>
+              </a:spcAft>
+              <a:buNone/>
+            </a:pPr>
+            <a:r>
+              <a:rPr lang="en" sz="1400" dirty="0" smtClean="0">
+                <a:solidFill>
+                  <a:schemeClr val="accent3"/>
+                </a:solidFill>
+              </a:rPr>
+              <a:t>server.cpp</a:t>
+            </a:r>
+            <a:endParaRPr sz="1400" dirty="0">
+              <a:solidFill>
+                <a:schemeClr val="accent3"/>
+              </a:solidFill>
+            </a:endParaRPr>
+          </a:p>
+        </p:txBody>
+      </p:sp>
+      <p:sp>
+        <p:nvSpPr>
+          <p:cNvPr id="856" name="Google Shape;856;p42"/>
+          <p:cNvSpPr txBox="1">
+            <a:spLocks noGrp="1"/>
+          </p:cNvSpPr>
+          <p:nvPr>
+            <p:ph type="subTitle" idx="4294967295"/>
+          </p:nvPr>
+        </p:nvSpPr>
+        <p:spPr>
+          <a:xfrm>
+            <a:off x="4572000" y="91525"/>
+            <a:ext cx="4572000" cy="357300"/>
+          </a:xfrm>
+          <a:prstGeom prst="rect">
+            <a:avLst/>
+          </a:prstGeom>
+        </p:spPr>
+        <p:txBody>
+          <a:bodyPr spcFirstLastPara="1" wrap="square" lIns="91425" tIns="91425" rIns="91425" bIns="91425" anchor="ctr" anchorCtr="0">
+            <a:noAutofit/>
+          </a:bodyPr>
+          <a:lstStyle/>
+          <a:p>
+            <a:pPr marL="0" lvl="0" indent="0" algn="ctr" rtl="0">
+              <a:spcBef>
+                <a:spcPts val="0"/>
+              </a:spcBef>
+              <a:spcAft>
+                <a:spcPts val="0"/>
+              </a:spcAft>
+              <a:buNone/>
+            </a:pPr>
+            <a:r>
+              <a:rPr lang="en" sz="1400" dirty="0" smtClean="0">
+                <a:solidFill>
+                  <a:schemeClr val="accent3"/>
+                </a:solidFill>
+              </a:rPr>
+              <a:t>client.cpp</a:t>
+            </a:r>
+            <a:endParaRPr sz="1400" dirty="0">
+              <a:solidFill>
+                <a:schemeClr val="accent3"/>
+              </a:solidFill>
+            </a:endParaRPr>
+          </a:p>
+        </p:txBody>
+      </p:sp>
+      <p:grpSp>
+        <p:nvGrpSpPr>
+          <p:cNvPr id="2" name="Google Shape;858;p42"/>
+          <p:cNvGrpSpPr/>
+          <p:nvPr/>
+        </p:nvGrpSpPr>
+        <p:grpSpPr>
+          <a:xfrm>
+            <a:off x="1084825" y="1059582"/>
+            <a:ext cx="506100" cy="3528392"/>
+            <a:chOff x="1084825" y="2556550"/>
+            <a:chExt cx="506100" cy="1750919"/>
+          </a:xfrm>
+        </p:grpSpPr>
+        <p:sp>
+          <p:nvSpPr>
+            <p:cNvPr id="859" name="Google Shape;859;p42"/>
+            <p:cNvSpPr txBox="1"/>
+            <p:nvPr/>
+          </p:nvSpPr>
+          <p:spPr>
+            <a:xfrm>
+              <a:off x="1084825" y="3954425"/>
+              <a:ext cx="506100" cy="353044"/>
+            </a:xfrm>
+            <a:prstGeom prst="rect">
+              <a:avLst/>
+            </a:prstGeom>
+            <a:noFill/>
+            <a:ln>
+              <a:noFill/>
+            </a:ln>
+          </p:spPr>
+          <p:txBody>
+            <a:bodyPr spcFirstLastPara="1" wrap="square" lIns="91425" tIns="91425" rIns="91425" bIns="91425" anchor="t" anchorCtr="0">
+              <a:spAutoFit/>
+            </a:bodyPr>
+            <a:lstStyle/>
+            <a:p>
+              <a:pPr marL="0" lvl="0" indent="0" algn="ctr" rtl="0">
+                <a:spcBef>
+                  <a:spcPts val="0"/>
+                </a:spcBef>
+                <a:spcAft>
+                  <a:spcPts val="0"/>
+                </a:spcAft>
+                <a:buNone/>
+              </a:pPr>
+              <a:r>
+                <a:rPr lang="en" sz="2800" dirty="0">
+                  <a:solidFill>
+                    <a:schemeClr val="accent6"/>
+                  </a:solidFill>
+                  <a:latin typeface="Fira Code"/>
+                  <a:ea typeface="Fira Code"/>
+                  <a:cs typeface="Fira Code"/>
+                  <a:sym typeface="Fira Code"/>
+                </a:rPr>
+                <a:t>}</a:t>
+              </a:r>
+              <a:endParaRPr sz="2800" dirty="0">
+                <a:solidFill>
+                  <a:schemeClr val="accent6"/>
+                </a:solidFill>
+                <a:latin typeface="Fira Code"/>
+                <a:ea typeface="Fira Code"/>
+                <a:cs typeface="Fira Code"/>
+                <a:sym typeface="Fira Code"/>
+              </a:endParaRPr>
+            </a:p>
+          </p:txBody>
+        </p:sp>
+        <p:cxnSp>
+          <p:nvCxnSpPr>
+            <p:cNvPr id="860" name="Google Shape;860;p42"/>
+            <p:cNvCxnSpPr/>
+            <p:nvPr/>
+          </p:nvCxnSpPr>
+          <p:spPr>
+            <a:xfrm>
+              <a:off x="1337875" y="2556550"/>
+              <a:ext cx="0" cy="1377000"/>
+            </a:xfrm>
+            <a:prstGeom prst="straightConnector1">
+              <a:avLst/>
+            </a:prstGeom>
+            <a:noFill/>
+            <a:ln w="9525" cap="flat" cmpd="sng">
+              <a:solidFill>
+                <a:schemeClr val="accent4"/>
+              </a:solidFill>
+              <a:prstDash val="solid"/>
+              <a:round/>
+              <a:headEnd type="none" w="med" len="med"/>
+              <a:tailEnd type="none" w="med" len="med"/>
+            </a:ln>
+          </p:spPr>
+        </p:cxnSp>
+      </p:grpSp>
+      <p:pic>
+        <p:nvPicPr>
+          <p:cNvPr id="30722" name="Picture 2" descr="D:\ЗАГРУЗКИ\photo_5298542171025774950_y.jpg"/>
+          <p:cNvPicPr>
+            <a:picLocks noChangeAspect="1" noChangeArrowheads="1"/>
+          </p:cNvPicPr>
+          <p:nvPr/>
+        </p:nvPicPr>
+        <p:blipFill>
+          <a:blip r:embed="rId3"/>
+          <a:srcRect/>
+          <a:stretch>
+            <a:fillRect/>
+          </a:stretch>
+        </p:blipFill>
+        <p:spPr bwMode="auto">
+          <a:xfrm>
+            <a:off x="1619672" y="1059582"/>
+            <a:ext cx="6356350" cy="2724150"/>
+          </a:xfrm>
+          <a:prstGeom prst="rect">
+            <a:avLst/>
+          </a:prstGeom>
+          <a:noFill/>
+        </p:spPr>
+      </p:pic>
+    </p:spTree>
+  </p:cSld>
+  <p:clrMapOvr>
+    <a:masterClrMapping/>
+  </p:clrMapOvr>
+  <p:transition>
+    <p:randomBar dir="vert"/>
+  </p:transition>
+  <p:timing>
+    <p:tnLst>
+      <p:par>
+        <p:cTn id="1" dur="indefinite" restart="never" nodeType="tmRoot"/>
+      </p:par>
+    </p:tnLst>
+  </p:timing>
+</p:sld>
+</file>
+
+<file path=ppt/slides/slide6.xml><?xml version="1.0" encoding="utf-8"?>
+<p:sld xmlns:a="http://schemas.openxmlformats.org/drawingml/2006/main" xmlns:r="http://schemas.openxmlformats.org/officeDocument/2006/relationships" xmlns:p="http://schemas.openxmlformats.org/presentationml/2006/main">
+  <p:cSld>
+    <p:spTree>
+      <p:nvGrpSpPr>
+        <p:cNvPr id="1" name="Shape 457"/>
+        <p:cNvGrpSpPr/>
+        <p:nvPr/>
+      </p:nvGrpSpPr>
+      <p:grpSpPr>
+        <a:xfrm>
+          <a:off x="0" y="0"/>
+          <a:ext cx="0" cy="0"/>
+          <a:chOff x="0" y="0"/>
+          <a:chExt cx="0" cy="0"/>
+        </a:xfrm>
+      </p:grpSpPr>
+      <p:sp>
+        <p:nvSpPr>
+          <p:cNvPr id="458" name="Google Shape;458;p27"/>
+          <p:cNvSpPr txBox="1">
+            <a:spLocks noGrp="1"/>
+          </p:cNvSpPr>
+          <p:nvPr>
+            <p:ph type="ctrTitle"/>
+          </p:nvPr>
+        </p:nvSpPr>
+        <p:spPr>
+          <a:xfrm>
+            <a:off x="1115616" y="1131590"/>
+            <a:ext cx="4598635" cy="517500"/>
+          </a:xfrm>
+          <a:prstGeom prst="rect">
+            <a:avLst/>
+          </a:prstGeom>
+        </p:spPr>
+        <p:txBody>
+          <a:bodyPr spcFirstLastPara="1" wrap="square" lIns="91425" tIns="91425" rIns="91425" bIns="91425" anchor="ctr" anchorCtr="0">
+            <a:noAutofit/>
+          </a:bodyPr>
+          <a:lstStyle/>
+          <a:p>
+            <a:pPr lvl="0"/>
+            <a:r>
+              <a:rPr lang="ru-RU" sz="2800" dirty="0" smtClean="0"/>
+              <a:t>Как осуществить подключение </a:t>
+            </a:r>
+            <a:r>
+              <a:rPr lang="en" sz="2800" dirty="0" smtClean="0">
+                <a:solidFill>
+                  <a:schemeClr val="accent6"/>
+                </a:solidFill>
+              </a:rPr>
+              <a:t>{</a:t>
+            </a:r>
+            <a:endParaRPr sz="2800" dirty="0">
+              <a:solidFill>
+                <a:schemeClr val="accent3"/>
+              </a:solidFill>
+            </a:endParaRPr>
+          </a:p>
+        </p:txBody>
+      </p:sp>
+      <p:grpSp>
+        <p:nvGrpSpPr>
+          <p:cNvPr id="2" name="Google Shape;462;p27"/>
+          <p:cNvGrpSpPr/>
+          <p:nvPr/>
+        </p:nvGrpSpPr>
+        <p:grpSpPr>
+          <a:xfrm>
+            <a:off x="1403648" y="2067694"/>
+            <a:ext cx="506100" cy="2121197"/>
+            <a:chOff x="1403648" y="1759900"/>
+            <a:chExt cx="506100" cy="2431274"/>
+          </a:xfrm>
+        </p:grpSpPr>
+        <p:cxnSp>
+          <p:nvCxnSpPr>
+            <p:cNvPr id="463" name="Google Shape;463;p27"/>
+            <p:cNvCxnSpPr/>
+            <p:nvPr/>
+          </p:nvCxnSpPr>
+          <p:spPr>
+            <a:xfrm>
+              <a:off x="1552225" y="1759900"/>
+              <a:ext cx="0" cy="1763400"/>
+            </a:xfrm>
+            <a:prstGeom prst="straightConnector1">
+              <a:avLst/>
+            </a:prstGeom>
+            <a:noFill/>
+            <a:ln w="9525" cap="flat" cmpd="sng">
+              <a:solidFill>
+                <a:schemeClr val="accent4"/>
+              </a:solidFill>
+              <a:prstDash val="solid"/>
+              <a:round/>
+              <a:headEnd type="none" w="med" len="med"/>
+              <a:tailEnd type="none" w="med" len="med"/>
+            </a:ln>
+          </p:spPr>
+        </p:cxnSp>
+        <p:sp>
+          <p:nvSpPr>
+            <p:cNvPr id="464" name="Google Shape;464;p27"/>
+            <p:cNvSpPr txBox="1"/>
+            <p:nvPr/>
+          </p:nvSpPr>
+          <p:spPr>
+            <a:xfrm>
+              <a:off x="1403648" y="3575651"/>
+              <a:ext cx="506100" cy="615523"/>
+            </a:xfrm>
+            <a:prstGeom prst="rect">
+              <a:avLst/>
+            </a:prstGeom>
+            <a:noFill/>
+            <a:ln>
+              <a:noFill/>
+            </a:ln>
+          </p:spPr>
+          <p:txBody>
+            <a:bodyPr spcFirstLastPara="1" wrap="square" lIns="91425" tIns="91425" rIns="91425" bIns="91425" anchor="t" anchorCtr="0">
+              <a:spAutoFit/>
+            </a:bodyPr>
+            <a:lstStyle/>
+            <a:p>
+              <a:pPr marL="0" lvl="0" indent="0" algn="l" rtl="0">
+                <a:spcBef>
+                  <a:spcPts val="0"/>
+                </a:spcBef>
+                <a:spcAft>
+                  <a:spcPts val="0"/>
+                </a:spcAft>
+                <a:buNone/>
+              </a:pPr>
+              <a:r>
+                <a:rPr lang="en" sz="2800" dirty="0">
+                  <a:solidFill>
+                    <a:schemeClr val="accent3"/>
+                  </a:solidFill>
+                  <a:latin typeface="Fira Code"/>
+                  <a:ea typeface="Fira Code"/>
+                  <a:cs typeface="Fira Code"/>
+                  <a:sym typeface="Fira Code"/>
+                </a:rPr>
+                <a:t>}</a:t>
+              </a:r>
+              <a:endParaRPr sz="2800" dirty="0">
+                <a:solidFill>
+                  <a:schemeClr val="accent3"/>
+                </a:solidFill>
+                <a:latin typeface="Fira Code"/>
+                <a:ea typeface="Fira Code"/>
+                <a:cs typeface="Fira Code"/>
+                <a:sym typeface="Fira Code"/>
+              </a:endParaRPr>
+            </a:p>
+          </p:txBody>
+        </p:sp>
+      </p:grpSp>
+      <p:sp>
+        <p:nvSpPr>
+          <p:cNvPr id="465" name="Google Shape;465;p27"/>
+          <p:cNvSpPr txBox="1">
+            <a:spLocks noGrp="1"/>
+          </p:cNvSpPr>
+          <p:nvPr>
+            <p:ph type="subTitle" idx="1"/>
+          </p:nvPr>
+        </p:nvSpPr>
+        <p:spPr>
+          <a:xfrm>
+            <a:off x="-5975" y="91525"/>
+            <a:ext cx="4572000" cy="357300"/>
+          </a:xfrm>
+          <a:prstGeom prst="rect">
+            <a:avLst/>
+          </a:prstGeom>
+        </p:spPr>
+        <p:txBody>
+          <a:bodyPr spcFirstLastPara="1" wrap="square" lIns="91425" tIns="91425" rIns="91425" bIns="91425" anchor="ctr" anchorCtr="0">
+            <a:noAutofit/>
+          </a:bodyPr>
+          <a:lstStyle/>
+          <a:p>
+            <a:pPr marL="0" lvl="0" indent="0" algn="ctr" rtl="0">
+              <a:spcBef>
+                <a:spcPts val="0"/>
+              </a:spcBef>
+              <a:spcAft>
+                <a:spcPts val="0"/>
+              </a:spcAft>
+              <a:buNone/>
+            </a:pPr>
+            <a:r>
+              <a:rPr lang="en-US" sz="1400" dirty="0" smtClean="0"/>
+              <a:t>server</a:t>
+            </a:r>
+            <a:r>
+              <a:rPr lang="en" sz="1400" dirty="0" smtClean="0">
+                <a:solidFill>
+                  <a:schemeClr val="accent3"/>
+                </a:solidFill>
+              </a:rPr>
+              <a:t>.cpp</a:t>
+            </a:r>
+            <a:endParaRPr sz="1400" dirty="0">
+              <a:solidFill>
+                <a:schemeClr val="accent3"/>
+              </a:solidFill>
+            </a:endParaRPr>
+          </a:p>
+        </p:txBody>
+      </p:sp>
+      <p:sp>
+        <p:nvSpPr>
+          <p:cNvPr id="466" name="Google Shape;466;p27"/>
+          <p:cNvSpPr txBox="1">
+            <a:spLocks noGrp="1"/>
+          </p:cNvSpPr>
+          <p:nvPr>
+            <p:ph type="subTitle" idx="1"/>
+          </p:nvPr>
+        </p:nvSpPr>
+        <p:spPr>
+          <a:xfrm>
+            <a:off x="4572000" y="91525"/>
+            <a:ext cx="4572000" cy="357300"/>
+          </a:xfrm>
+          <a:prstGeom prst="rect">
+            <a:avLst/>
+          </a:prstGeom>
+        </p:spPr>
+        <p:txBody>
+          <a:bodyPr spcFirstLastPara="1" wrap="square" lIns="91425" tIns="91425" rIns="91425" bIns="91425" anchor="ctr" anchorCtr="0">
+            <a:noAutofit/>
+          </a:bodyPr>
+          <a:lstStyle/>
+          <a:p>
+            <a:pPr marL="0" lvl="0" indent="0" algn="ctr"/>
+            <a:r>
+              <a:rPr lang="en-US" sz="1400" dirty="0" smtClean="0"/>
+              <a:t>client.cpp</a:t>
+            </a:r>
+            <a:endParaRPr lang="en-US" sz="1400" dirty="0"/>
+          </a:p>
+        </p:txBody>
+      </p:sp>
+      <p:sp>
+        <p:nvSpPr>
+          <p:cNvPr id="22" name="Google Shape;853;p42"/>
+          <p:cNvSpPr txBox="1">
+            <a:spLocks noGrp="1"/>
+          </p:cNvSpPr>
+          <p:nvPr>
+            <p:ph type="subTitle" idx="1"/>
+          </p:nvPr>
+        </p:nvSpPr>
+        <p:spPr>
+          <a:xfrm>
+            <a:off x="1619672" y="1779662"/>
+            <a:ext cx="3240360" cy="2088232"/>
+          </a:xfrm>
+          <a:prstGeom prst="rect">
+            <a:avLst/>
+          </a:prstGeom>
+        </p:spPr>
+        <p:txBody>
+          <a:bodyPr spcFirstLastPara="1" wrap="square" lIns="91425" tIns="91425" rIns="91425" bIns="91425" anchor="ctr" anchorCtr="0">
+            <a:noAutofit/>
+          </a:bodyPr>
+          <a:lstStyle/>
+          <a:p>
+            <a:pPr marL="0" lvl="0" indent="0"/>
+            <a:r>
+              <a:rPr lang="en" sz="1400" dirty="0"/>
+              <a:t>&lt; </a:t>
+            </a:r>
+            <a:r>
+              <a:rPr lang="ru-RU" sz="1400" dirty="0" smtClean="0"/>
+              <a:t>Чтобы запустить программу на двух устройствах на одной </a:t>
+            </a:r>
+            <a:r>
+              <a:rPr lang="ru-RU" sz="1400" dirty="0" smtClean="0"/>
+              <a:t>сети, </a:t>
+            </a:r>
+            <a:r>
+              <a:rPr lang="ru-RU" sz="1400" dirty="0" smtClean="0"/>
+              <a:t>мы посмотрели в параметрах IpV4-адрес </a:t>
+            </a:r>
+            <a:r>
+              <a:rPr lang="en" sz="1400" dirty="0" smtClean="0"/>
+              <a:t>&gt;</a:t>
+            </a:r>
+            <a:endParaRPr sz="1400" dirty="0"/>
+          </a:p>
+        </p:txBody>
+      </p:sp>
+      <p:pic>
+        <p:nvPicPr>
+          <p:cNvPr id="31746" name="Picture 2" descr="D:\ЗАГРУЗКИ\photo_5298542171025774952_y.jpg"/>
+          <p:cNvPicPr>
+            <a:picLocks noChangeAspect="1" noChangeArrowheads="1"/>
+          </p:cNvPicPr>
+          <p:nvPr/>
+        </p:nvPicPr>
+        <p:blipFill>
+          <a:blip r:embed="rId3"/>
+          <a:srcRect/>
+          <a:stretch>
+            <a:fillRect/>
+          </a:stretch>
+        </p:blipFill>
+        <p:spPr bwMode="auto">
+          <a:xfrm>
+            <a:off x="4794555" y="843558"/>
+            <a:ext cx="4169933" cy="3456384"/>
+          </a:xfrm>
+          <a:prstGeom prst="rect">
+            <a:avLst/>
+          </a:prstGeom>
+          <a:noFill/>
+        </p:spPr>
+      </p:pic>
+    </p:spTree>
+  </p:cSld>
+  <p:clrMapOvr>
+    <a:masterClrMapping/>
+  </p:clrMapOvr>
+  <p:transition>
+    <p:pull/>
+  </p:transition>
+  <p:timing>
+    <p:tnLst>
+      <p:par>
+        <p:cTn id="1" dur="indefinite" restart="never" nodeType="tmRoot"/>
+      </p:par>
+    </p:tnLst>
+  </p:timing>
+</p:sld>
+</file>
+
+<file path=ppt/slides/slide7.xml><?xml version="1.0" encoding="utf-8"?>
+<p:sld xmlns:a="http://schemas.openxmlformats.org/drawingml/2006/main" xmlns:r="http://schemas.openxmlformats.org/officeDocument/2006/relationships" xmlns:p="http://schemas.openxmlformats.org/presentationml/2006/main">
+  <p:cSld>
+    <p:spTree>
+      <p:nvGrpSpPr>
+        <p:cNvPr id="1" name="Shape 457"/>
+        <p:cNvGrpSpPr/>
+        <p:nvPr/>
+      </p:nvGrpSpPr>
+      <p:grpSpPr>
+        <a:xfrm>
+          <a:off x="0" y="0"/>
+          <a:ext cx="0" cy="0"/>
+          <a:chOff x="0" y="0"/>
+          <a:chExt cx="0" cy="0"/>
+        </a:xfrm>
+      </p:grpSpPr>
+      <p:sp>
+        <p:nvSpPr>
+          <p:cNvPr id="458" name="Google Shape;458;p27"/>
+          <p:cNvSpPr txBox="1">
+            <a:spLocks noGrp="1"/>
+          </p:cNvSpPr>
+          <p:nvPr>
+            <p:ph type="ctrTitle"/>
+          </p:nvPr>
+        </p:nvSpPr>
+        <p:spPr>
+          <a:xfrm>
+            <a:off x="1115616" y="843558"/>
+            <a:ext cx="4598635" cy="517500"/>
+          </a:xfrm>
+          <a:prstGeom prst="rect">
+            <a:avLst/>
+          </a:prstGeom>
+        </p:spPr>
+        <p:txBody>
+          <a:bodyPr spcFirstLastPara="1" wrap="square" lIns="91425" tIns="91425" rIns="91425" bIns="91425" anchor="ctr" anchorCtr="0">
+            <a:noAutofit/>
+          </a:bodyPr>
+          <a:lstStyle/>
+          <a:p>
+            <a:pPr lvl="0"/>
+            <a:r>
+              <a:rPr lang="ru-RU" sz="2800" dirty="0" smtClean="0"/>
+              <a:t>Как осуществить подключение </a:t>
+            </a:r>
+            <a:r>
+              <a:rPr lang="en" sz="2800" dirty="0" smtClean="0">
+                <a:solidFill>
+                  <a:schemeClr val="accent6"/>
+                </a:solidFill>
+              </a:rPr>
+              <a:t>{</a:t>
+            </a:r>
+            <a:endParaRPr sz="2800" dirty="0">
+              <a:solidFill>
+                <a:schemeClr val="accent3"/>
+              </a:solidFill>
+            </a:endParaRPr>
+          </a:p>
+        </p:txBody>
+      </p:sp>
+      <p:grpSp>
+        <p:nvGrpSpPr>
+          <p:cNvPr id="2" name="Google Shape;462;p27"/>
+          <p:cNvGrpSpPr/>
+          <p:nvPr/>
+        </p:nvGrpSpPr>
+        <p:grpSpPr>
+          <a:xfrm>
+            <a:off x="1403648" y="1563638"/>
+            <a:ext cx="506100" cy="3384376"/>
+            <a:chOff x="1403648" y="1759900"/>
+            <a:chExt cx="506100" cy="2431274"/>
+          </a:xfrm>
+        </p:grpSpPr>
+        <p:cxnSp>
+          <p:nvCxnSpPr>
+            <p:cNvPr id="463" name="Google Shape;463;p27"/>
+            <p:cNvCxnSpPr/>
+            <p:nvPr/>
+          </p:nvCxnSpPr>
+          <p:spPr>
+            <a:xfrm>
+              <a:off x="1552225" y="1759900"/>
+              <a:ext cx="0" cy="1763400"/>
+            </a:xfrm>
+            <a:prstGeom prst="straightConnector1">
+              <a:avLst/>
+            </a:prstGeom>
+            <a:noFill/>
+            <a:ln w="9525" cap="flat" cmpd="sng">
+              <a:solidFill>
+                <a:schemeClr val="accent4"/>
+              </a:solidFill>
+              <a:prstDash val="solid"/>
+              <a:round/>
+              <a:headEnd type="none" w="med" len="med"/>
+              <a:tailEnd type="none" w="med" len="med"/>
+            </a:ln>
+          </p:spPr>
+        </p:cxnSp>
+        <p:sp>
+          <p:nvSpPr>
+            <p:cNvPr id="464" name="Google Shape;464;p27"/>
+            <p:cNvSpPr txBox="1"/>
+            <p:nvPr/>
+          </p:nvSpPr>
+          <p:spPr>
+            <a:xfrm>
+              <a:off x="1403648" y="3575651"/>
+              <a:ext cx="506100" cy="615523"/>
+            </a:xfrm>
+            <a:prstGeom prst="rect">
+              <a:avLst/>
+            </a:prstGeom>
+            <a:noFill/>
+            <a:ln>
+              <a:noFill/>
+            </a:ln>
+          </p:spPr>
+          <p:txBody>
+            <a:bodyPr spcFirstLastPara="1" wrap="square" lIns="91425" tIns="91425" rIns="91425" bIns="91425" anchor="t" anchorCtr="0">
+              <a:spAutoFit/>
+            </a:bodyPr>
+            <a:lstStyle/>
+            <a:p>
+              <a:pPr marL="0" lvl="0" indent="0" algn="l" rtl="0">
+                <a:spcBef>
+                  <a:spcPts val="0"/>
+                </a:spcBef>
+                <a:spcAft>
+                  <a:spcPts val="0"/>
+                </a:spcAft>
+                <a:buNone/>
+              </a:pPr>
+              <a:r>
+                <a:rPr lang="en" sz="2800" dirty="0">
+                  <a:solidFill>
+                    <a:schemeClr val="accent3"/>
+                  </a:solidFill>
+                  <a:latin typeface="Fira Code"/>
+                  <a:ea typeface="Fira Code"/>
+                  <a:cs typeface="Fira Code"/>
+                  <a:sym typeface="Fira Code"/>
+                </a:rPr>
+                <a:t>}</a:t>
+              </a:r>
+              <a:endParaRPr sz="2800" dirty="0">
+                <a:solidFill>
+                  <a:schemeClr val="accent3"/>
+                </a:solidFill>
+                <a:latin typeface="Fira Code"/>
+                <a:ea typeface="Fira Code"/>
+                <a:cs typeface="Fira Code"/>
+                <a:sym typeface="Fira Code"/>
+              </a:endParaRPr>
+            </a:p>
+          </p:txBody>
+        </p:sp>
+      </p:grpSp>
+      <p:sp>
+        <p:nvSpPr>
+          <p:cNvPr id="465" name="Google Shape;465;p27"/>
+          <p:cNvSpPr txBox="1">
+            <a:spLocks noGrp="1"/>
+          </p:cNvSpPr>
+          <p:nvPr>
+            <p:ph type="subTitle" idx="1"/>
+          </p:nvPr>
+        </p:nvSpPr>
+        <p:spPr>
+          <a:xfrm>
+            <a:off x="-5975" y="91525"/>
+            <a:ext cx="4572000" cy="357300"/>
+          </a:xfrm>
+          <a:prstGeom prst="rect">
+            <a:avLst/>
+          </a:prstGeom>
+        </p:spPr>
+        <p:txBody>
+          <a:bodyPr spcFirstLastPara="1" wrap="square" lIns="91425" tIns="91425" rIns="91425" bIns="91425" anchor="ctr" anchorCtr="0">
+            <a:noAutofit/>
+          </a:bodyPr>
+          <a:lstStyle/>
+          <a:p>
+            <a:pPr marL="0" lvl="0" indent="0" algn="ctr" rtl="0">
+              <a:spcBef>
+                <a:spcPts val="0"/>
+              </a:spcBef>
+              <a:spcAft>
+                <a:spcPts val="0"/>
+              </a:spcAft>
+              <a:buNone/>
+            </a:pPr>
+            <a:r>
+              <a:rPr lang="en-US" sz="1400" dirty="0" smtClean="0"/>
+              <a:t>server</a:t>
+            </a:r>
+            <a:r>
+              <a:rPr lang="en" sz="1400" dirty="0" smtClean="0">
+                <a:solidFill>
+                  <a:schemeClr val="accent3"/>
+                </a:solidFill>
+              </a:rPr>
+              <a:t>.cpp</a:t>
+            </a:r>
+            <a:endParaRPr sz="1400" dirty="0">
+              <a:solidFill>
+                <a:schemeClr val="accent3"/>
+              </a:solidFill>
+            </a:endParaRPr>
+          </a:p>
+        </p:txBody>
+      </p:sp>
+      <p:sp>
+        <p:nvSpPr>
+          <p:cNvPr id="466" name="Google Shape;466;p27"/>
+          <p:cNvSpPr txBox="1">
+            <a:spLocks noGrp="1"/>
+          </p:cNvSpPr>
+          <p:nvPr>
+            <p:ph type="subTitle" idx="1"/>
+          </p:nvPr>
+        </p:nvSpPr>
+        <p:spPr>
+          <a:xfrm>
+            <a:off x="4572000" y="91525"/>
+            <a:ext cx="4572000" cy="357300"/>
+          </a:xfrm>
+          <a:prstGeom prst="rect">
+            <a:avLst/>
+          </a:prstGeom>
+        </p:spPr>
+        <p:txBody>
+          <a:bodyPr spcFirstLastPara="1" wrap="square" lIns="91425" tIns="91425" rIns="91425" bIns="91425" anchor="ctr" anchorCtr="0">
+            <a:noAutofit/>
+          </a:bodyPr>
+          <a:lstStyle/>
+          <a:p>
+            <a:pPr marL="0" lvl="0" indent="0" algn="ctr"/>
+            <a:r>
+              <a:rPr lang="en-US" sz="1400" dirty="0" smtClean="0"/>
+              <a:t>client.cpp</a:t>
+            </a:r>
+            <a:endParaRPr lang="en-US" sz="1400" dirty="0"/>
+          </a:p>
+        </p:txBody>
+      </p:sp>
+      <p:sp>
+        <p:nvSpPr>
+          <p:cNvPr id="22" name="Google Shape;853;p42"/>
+          <p:cNvSpPr txBox="1">
+            <a:spLocks noGrp="1"/>
+          </p:cNvSpPr>
+          <p:nvPr>
+            <p:ph type="subTitle" idx="1"/>
+          </p:nvPr>
+        </p:nvSpPr>
+        <p:spPr>
+          <a:xfrm>
+            <a:off x="1691680" y="1563638"/>
+            <a:ext cx="3888432" cy="1152128"/>
+          </a:xfrm>
+          <a:prstGeom prst="rect">
+            <a:avLst/>
+          </a:prstGeom>
+        </p:spPr>
+        <p:txBody>
+          <a:bodyPr spcFirstLastPara="1" wrap="square" lIns="91425" tIns="91425" rIns="91425" bIns="91425" anchor="ctr" anchorCtr="0">
+            <a:noAutofit/>
+          </a:bodyPr>
+          <a:lstStyle/>
+          <a:p>
+            <a:pPr marL="0" lvl="0" indent="0"/>
+            <a:r>
+              <a:rPr lang="en" sz="1400" dirty="0"/>
+              <a:t>&lt; </a:t>
+            </a:r>
+            <a:r>
+              <a:rPr lang="ru-RU" sz="1400" dirty="0" smtClean="0"/>
+              <a:t>т</a:t>
+            </a:r>
+            <a:r>
+              <a:rPr lang="ru-RU" sz="1400" dirty="0" smtClean="0"/>
+              <a:t>ак </a:t>
+            </a:r>
+            <a:r>
+              <a:rPr lang="ru-RU" sz="1400" dirty="0" smtClean="0"/>
+              <a:t>как Windows Блокирует новые </a:t>
+            </a:r>
+            <a:r>
+              <a:rPr lang="ru-RU" sz="1400" dirty="0" smtClean="0"/>
+              <a:t>программы, пришлось </a:t>
+            </a:r>
+            <a:r>
+              <a:rPr lang="ru-RU" sz="1400" dirty="0" smtClean="0"/>
+              <a:t>на время выключить брандмауэр на обоих устройствах</a:t>
+            </a:r>
+            <a:r>
+              <a:rPr lang="ru-RU" sz="1400" dirty="0" smtClean="0"/>
+              <a:t> </a:t>
+            </a:r>
+            <a:r>
+              <a:rPr lang="en" sz="1400" dirty="0" smtClean="0"/>
+              <a:t>&gt;</a:t>
+            </a:r>
+            <a:endParaRPr sz="1400" dirty="0"/>
+          </a:p>
+        </p:txBody>
+      </p:sp>
+      <p:pic>
+        <p:nvPicPr>
+          <p:cNvPr id="32770" name="Picture 2" descr="D:\ЗАГРУЗКИ\photo_5298542171025774951_y.jpg"/>
+          <p:cNvPicPr>
+            <a:picLocks noChangeAspect="1" noChangeArrowheads="1"/>
+          </p:cNvPicPr>
+          <p:nvPr/>
+        </p:nvPicPr>
+        <p:blipFill>
+          <a:blip r:embed="rId3"/>
+          <a:srcRect/>
+          <a:stretch>
+            <a:fillRect/>
+          </a:stretch>
+        </p:blipFill>
+        <p:spPr bwMode="auto">
+          <a:xfrm>
+            <a:off x="1763688" y="2643758"/>
+            <a:ext cx="6408712" cy="1556401"/>
+          </a:xfrm>
+          <a:prstGeom prst="rect">
+            <a:avLst/>
+          </a:prstGeom>
+          <a:noFill/>
+        </p:spPr>
+      </p:pic>
+    </p:spTree>
+  </p:cSld>
+  <p:clrMapOvr>
+    <a:masterClrMapping/>
+  </p:clrMapOvr>
+  <p:transition>
+    <p:pull dir="r"/>
+  </p:transition>
+  <p:timing>
+    <p:tnLst>
+      <p:par>
+        <p:cTn id="1" dur="indefinite" restart="never" nodeType="tmRoot"/>
+      </p:par>
+    </p:tnLst>
+  </p:timing>
+</p:sld>
+</file>
+
+<file path=ppt/slides/slide8.xml><?xml version="1.0" encoding="utf-8"?>
+<p:sld xmlns:a="http://schemas.openxmlformats.org/drawingml/2006/main" xmlns:r="http://schemas.openxmlformats.org/officeDocument/2006/relationships" xmlns:p="http://schemas.openxmlformats.org/presentationml/2006/main">
+  <p:cSld>
+    <p:spTree>
+      <p:nvGrpSpPr>
+        <p:cNvPr id="1" name="Shape 457"/>
+        <p:cNvGrpSpPr/>
+        <p:nvPr/>
+      </p:nvGrpSpPr>
+      <p:grpSpPr>
+        <a:xfrm>
+          <a:off x="0" y="0"/>
+          <a:ext cx="0" cy="0"/>
+          <a:chOff x="0" y="0"/>
+          <a:chExt cx="0" cy="0"/>
+        </a:xfrm>
+      </p:grpSpPr>
+      <p:sp>
+        <p:nvSpPr>
+          <p:cNvPr id="458" name="Google Shape;458;p27"/>
+          <p:cNvSpPr txBox="1">
+            <a:spLocks noGrp="1"/>
+          </p:cNvSpPr>
+          <p:nvPr>
+            <p:ph type="ctrTitle"/>
+          </p:nvPr>
+        </p:nvSpPr>
+        <p:spPr>
+          <a:xfrm>
+            <a:off x="1115616" y="1131590"/>
+            <a:ext cx="4598635" cy="517500"/>
+          </a:xfrm>
+          <a:prstGeom prst="rect">
+            <a:avLst/>
+          </a:prstGeom>
+        </p:spPr>
+        <p:txBody>
+          <a:bodyPr spcFirstLastPara="1" wrap="square" lIns="91425" tIns="91425" rIns="91425" bIns="91425" anchor="ctr" anchorCtr="0">
+            <a:noAutofit/>
+          </a:bodyPr>
+          <a:lstStyle/>
+          <a:p>
+            <a:pPr lvl="0"/>
+            <a:r>
+              <a:rPr lang="ru-RU" sz="2800" dirty="0" smtClean="0"/>
+              <a:t>Работа</a:t>
+            </a:r>
+            <a:r>
+              <a:rPr lang="en" sz="2800" dirty="0" smtClean="0">
+                <a:solidFill>
+                  <a:schemeClr val="accent2"/>
+                </a:solidFill>
+              </a:rPr>
+              <a:t> ‘Server’ </a:t>
+            </a:r>
+            <a:r>
+              <a:rPr lang="en" sz="2800" dirty="0" smtClean="0">
+                <a:solidFill>
+                  <a:schemeClr val="accent6"/>
+                </a:solidFill>
+              </a:rPr>
+              <a:t>{</a:t>
+            </a:r>
+            <a:endParaRPr sz="2800" dirty="0">
+              <a:solidFill>
+                <a:schemeClr val="accent3"/>
+              </a:solidFill>
+            </a:endParaRPr>
+          </a:p>
+        </p:txBody>
+      </p:sp>
+      <p:grpSp>
+        <p:nvGrpSpPr>
+          <p:cNvPr id="2" name="Google Shape;462;p27"/>
+          <p:cNvGrpSpPr/>
+          <p:nvPr/>
+        </p:nvGrpSpPr>
+        <p:grpSpPr>
+          <a:xfrm>
+            <a:off x="1403648" y="2067694"/>
+            <a:ext cx="506100" cy="2121197"/>
+            <a:chOff x="1403648" y="1759900"/>
+            <a:chExt cx="506100" cy="2431274"/>
+          </a:xfrm>
+        </p:grpSpPr>
+        <p:cxnSp>
+          <p:nvCxnSpPr>
+            <p:cNvPr id="463" name="Google Shape;463;p27"/>
+            <p:cNvCxnSpPr/>
+            <p:nvPr/>
+          </p:nvCxnSpPr>
+          <p:spPr>
+            <a:xfrm>
+              <a:off x="1552225" y="1759900"/>
+              <a:ext cx="0" cy="1763400"/>
+            </a:xfrm>
+            <a:prstGeom prst="straightConnector1">
+              <a:avLst/>
+            </a:prstGeom>
+            <a:noFill/>
+            <a:ln w="9525" cap="flat" cmpd="sng">
+              <a:solidFill>
+                <a:schemeClr val="accent4"/>
+              </a:solidFill>
+              <a:prstDash val="solid"/>
+              <a:round/>
+              <a:headEnd type="none" w="med" len="med"/>
+              <a:tailEnd type="none" w="med" len="med"/>
+            </a:ln>
+          </p:spPr>
+        </p:cxnSp>
+        <p:sp>
+          <p:nvSpPr>
+            <p:cNvPr id="464" name="Google Shape;464;p27"/>
+            <p:cNvSpPr txBox="1"/>
+            <p:nvPr/>
+          </p:nvSpPr>
+          <p:spPr>
+            <a:xfrm>
+              <a:off x="1403648" y="3575651"/>
+              <a:ext cx="506100" cy="615523"/>
+            </a:xfrm>
+            <a:prstGeom prst="rect">
+              <a:avLst/>
+            </a:prstGeom>
+            <a:noFill/>
+            <a:ln>
+              <a:noFill/>
+            </a:ln>
+          </p:spPr>
+          <p:txBody>
+            <a:bodyPr spcFirstLastPara="1" wrap="square" lIns="91425" tIns="91425" rIns="91425" bIns="91425" anchor="t" anchorCtr="0">
+              <a:spAutoFit/>
+            </a:bodyPr>
+            <a:lstStyle/>
+            <a:p>
+              <a:pPr marL="0" lvl="0" indent="0" algn="l" rtl="0">
+                <a:spcBef>
+                  <a:spcPts val="0"/>
+                </a:spcBef>
+                <a:spcAft>
+                  <a:spcPts val="0"/>
+                </a:spcAft>
+                <a:buNone/>
+              </a:pPr>
+              <a:r>
+                <a:rPr lang="en" sz="2800" dirty="0">
+                  <a:solidFill>
+                    <a:schemeClr val="accent3"/>
+                  </a:solidFill>
+                  <a:latin typeface="Fira Code"/>
+                  <a:ea typeface="Fira Code"/>
+                  <a:cs typeface="Fira Code"/>
+                  <a:sym typeface="Fira Code"/>
+                </a:rPr>
+                <a:t>}</a:t>
+              </a:r>
+              <a:endParaRPr sz="2800" dirty="0">
+                <a:solidFill>
+                  <a:schemeClr val="accent3"/>
+                </a:solidFill>
+                <a:latin typeface="Fira Code"/>
+                <a:ea typeface="Fira Code"/>
+                <a:cs typeface="Fira Code"/>
+                <a:sym typeface="Fira Code"/>
+              </a:endParaRPr>
+            </a:p>
+          </p:txBody>
+        </p:sp>
+      </p:grpSp>
+      <p:sp>
+        <p:nvSpPr>
+          <p:cNvPr id="465" name="Google Shape;465;p27"/>
+          <p:cNvSpPr txBox="1">
+            <a:spLocks noGrp="1"/>
+          </p:cNvSpPr>
+          <p:nvPr>
+            <p:ph type="subTitle" idx="1"/>
+          </p:nvPr>
+        </p:nvSpPr>
+        <p:spPr>
+          <a:xfrm>
+            <a:off x="-5975" y="91525"/>
+            <a:ext cx="4572000" cy="357300"/>
+          </a:xfrm>
+          <a:prstGeom prst="rect">
+            <a:avLst/>
+          </a:prstGeom>
+        </p:spPr>
+        <p:txBody>
+          <a:bodyPr spcFirstLastPara="1" wrap="square" lIns="91425" tIns="91425" rIns="91425" bIns="91425" anchor="ctr" anchorCtr="0">
+            <a:noAutofit/>
+          </a:bodyPr>
+          <a:lstStyle/>
+          <a:p>
+            <a:pPr marL="0" lvl="0" indent="0" algn="ctr" rtl="0">
+              <a:spcBef>
+                <a:spcPts val="0"/>
+              </a:spcBef>
+              <a:spcAft>
+                <a:spcPts val="0"/>
+              </a:spcAft>
+              <a:buNone/>
+            </a:pPr>
+            <a:r>
+              <a:rPr lang="en-US" sz="1400" dirty="0" smtClean="0"/>
+              <a:t>server</a:t>
+            </a:r>
+            <a:r>
+              <a:rPr lang="en" sz="1400" dirty="0" smtClean="0">
+                <a:solidFill>
+                  <a:schemeClr val="accent3"/>
+                </a:solidFill>
+              </a:rPr>
+              <a:t>.cpp</a:t>
+            </a:r>
+            <a:endParaRPr sz="1400" dirty="0">
+              <a:solidFill>
+                <a:schemeClr val="accent3"/>
+              </a:solidFill>
+            </a:endParaRPr>
+          </a:p>
+        </p:txBody>
+      </p:sp>
+      <p:sp>
+        <p:nvSpPr>
+          <p:cNvPr id="466" name="Google Shape;466;p27"/>
+          <p:cNvSpPr txBox="1">
+            <a:spLocks noGrp="1"/>
+          </p:cNvSpPr>
+          <p:nvPr>
+            <p:ph type="subTitle" idx="1"/>
+          </p:nvPr>
+        </p:nvSpPr>
+        <p:spPr>
+          <a:xfrm>
+            <a:off x="4572000" y="91525"/>
+            <a:ext cx="4572000" cy="357300"/>
+          </a:xfrm>
+          <a:prstGeom prst="rect">
+            <a:avLst/>
+          </a:prstGeom>
+        </p:spPr>
+        <p:txBody>
+          <a:bodyPr spcFirstLastPara="1" wrap="square" lIns="91425" tIns="91425" rIns="91425" bIns="91425" anchor="ctr" anchorCtr="0">
+            <a:noAutofit/>
+          </a:bodyPr>
+          <a:lstStyle/>
+          <a:p>
+            <a:pPr marL="0" lvl="0" indent="0" algn="ctr"/>
+            <a:r>
+              <a:rPr lang="en-US" sz="1400" dirty="0" smtClean="0"/>
+              <a:t>client.cpp</a:t>
+            </a:r>
+            <a:endParaRPr lang="en-US" sz="1400" dirty="0"/>
+          </a:p>
+        </p:txBody>
+      </p:sp>
+      <p:sp>
+        <p:nvSpPr>
+          <p:cNvPr id="22" name="Google Shape;853;p42"/>
+          <p:cNvSpPr txBox="1">
+            <a:spLocks noGrp="1"/>
+          </p:cNvSpPr>
+          <p:nvPr>
+            <p:ph type="subTitle" idx="1"/>
+          </p:nvPr>
+        </p:nvSpPr>
+        <p:spPr>
+          <a:xfrm>
+            <a:off x="1619672" y="1779662"/>
+            <a:ext cx="3627600" cy="2088232"/>
+          </a:xfrm>
+          <a:prstGeom prst="rect">
+            <a:avLst/>
+          </a:prstGeom>
+        </p:spPr>
+        <p:txBody>
+          <a:bodyPr spcFirstLastPara="1" wrap="square" lIns="91425" tIns="91425" rIns="91425" bIns="91425" anchor="ctr" anchorCtr="0">
+            <a:noAutofit/>
+          </a:bodyPr>
+          <a:lstStyle/>
+          <a:p>
+            <a:pPr marL="0" lvl="0" indent="0"/>
+            <a:r>
+              <a:rPr lang="en" sz="1400" dirty="0"/>
+              <a:t>&lt; </a:t>
+            </a:r>
+            <a:r>
+              <a:rPr lang="ru-RU" sz="1400" dirty="0" smtClean="0"/>
+              <a:t>Давайте разберем работу функции </a:t>
+            </a:r>
+            <a:r>
+              <a:rPr lang="en-US" sz="1400" dirty="0" err="1" smtClean="0"/>
+              <a:t>handleClient</a:t>
+            </a:r>
+            <a:r>
+              <a:rPr lang="ru-RU" sz="1400" dirty="0" smtClean="0"/>
+              <a:t>. Функция принимает числа от клиента, сравнивает их с загаданным </a:t>
+            </a:r>
+            <a:r>
+              <a:rPr lang="ru-RU" sz="1400" dirty="0" err="1" smtClean="0"/>
+              <a:t>secretNumber</a:t>
+            </a:r>
+            <a:r>
+              <a:rPr lang="ru-RU" sz="1400" dirty="0" smtClean="0"/>
+              <a:t>, отправляет подсказки </a:t>
+            </a:r>
+            <a:r>
+              <a:rPr lang="ru-RU" sz="1400" b="1" dirty="0" smtClean="0"/>
+              <a:t>MORE/LESS</a:t>
+            </a:r>
+            <a:r>
+              <a:rPr lang="ru-RU" sz="1400" dirty="0" smtClean="0"/>
+              <a:t> или </a:t>
+            </a:r>
+            <a:r>
+              <a:rPr lang="ru-RU" sz="1400" b="1" dirty="0" smtClean="0"/>
+              <a:t>WIN</a:t>
+            </a:r>
+            <a:r>
+              <a:rPr lang="ru-RU" sz="1400" dirty="0" smtClean="0"/>
+              <a:t>, пока клиент не угадает или не отключится</a:t>
+            </a:r>
+            <a:r>
+              <a:rPr lang="en" sz="1400" dirty="0" smtClean="0"/>
+              <a:t> </a:t>
+            </a:r>
+            <a:r>
+              <a:rPr lang="en" sz="1400" dirty="0"/>
+              <a:t>&gt;</a:t>
+            </a:r>
+            <a:endParaRPr sz="1400" dirty="0"/>
+          </a:p>
+        </p:txBody>
+      </p:sp>
+      <p:pic>
+        <p:nvPicPr>
+          <p:cNvPr id="6145" name="Picture 1"/>
+          <p:cNvPicPr>
+            <a:picLocks noChangeAspect="1" noChangeArrowheads="1"/>
+          </p:cNvPicPr>
+          <p:nvPr/>
+        </p:nvPicPr>
+        <p:blipFill>
+          <a:blip r:embed="rId3"/>
+          <a:srcRect/>
+          <a:stretch>
+            <a:fillRect/>
+          </a:stretch>
+        </p:blipFill>
+        <p:spPr bwMode="auto">
+          <a:xfrm>
+            <a:off x="5148064" y="583307"/>
+            <a:ext cx="3957274" cy="4076675"/>
+          </a:xfrm>
+          <a:prstGeom prst="rect">
+            <a:avLst/>
+          </a:prstGeom>
+          <a:noFill/>
+          <a:ln w="9525">
+            <a:noFill/>
+            <a:miter lim="800000"/>
+            <a:headEnd/>
+            <a:tailEnd/>
+          </a:ln>
+        </p:spPr>
+      </p:pic>
+    </p:spTree>
+  </p:cSld>
+  <p:clrMapOvr>
+    <a:masterClrMapping/>
+  </p:clrMapOvr>
+  <p:transition>
+    <p:pull dir="d"/>
+  </p:transition>
+  <p:timing>
+    <p:tnLst>
+      <p:par>
+        <p:cTn id="1" dur="indefinite" restart="never" nodeType="tmRoot"/>
+      </p:par>
+    </p:tnLst>
+  </p:timing>
+</p:sld>
+</file>
+
+<file path=ppt/slides/slide9.xml><?xml version="1.0" encoding="utf-8"?>
+<p:sld xmlns:a="http://schemas.openxmlformats.org/drawingml/2006/main" xmlns:r="http://schemas.openxmlformats.org/officeDocument/2006/relationships" xmlns:p="http://schemas.openxmlformats.org/presentationml/2006/main">
+  <p:cSld>
+    <p:spTree>
+      <p:nvGrpSpPr>
+        <p:cNvPr id="1" name="Shape 457"/>
+        <p:cNvGrpSpPr/>
+        <p:nvPr/>
+      </p:nvGrpSpPr>
+      <p:grpSpPr>
+        <a:xfrm>
+          <a:off x="0" y="0"/>
+          <a:ext cx="0" cy="0"/>
+          <a:chOff x="0" y="0"/>
+          <a:chExt cx="0" cy="0"/>
+        </a:xfrm>
+      </p:grpSpPr>
+      <p:sp>
+        <p:nvSpPr>
+          <p:cNvPr id="458" name="Google Shape;458;p27"/>
+          <p:cNvSpPr txBox="1">
+            <a:spLocks noGrp="1"/>
+          </p:cNvSpPr>
+          <p:nvPr>
+            <p:ph type="ctrTitle"/>
+          </p:nvPr>
+        </p:nvSpPr>
+        <p:spPr>
+          <a:xfrm>
+            <a:off x="1413525" y="1144250"/>
+            <a:ext cx="4598635" cy="517500"/>
+          </a:xfrm>
+          <a:prstGeom prst="rect">
+            <a:avLst/>
+          </a:prstGeom>
+        </p:spPr>
+        <p:txBody>
+          <a:bodyPr spcFirstLastPara="1" wrap="square" lIns="91425" tIns="91425" rIns="91425" bIns="91425" anchor="ctr" anchorCtr="0">
+            <a:noAutofit/>
+          </a:bodyPr>
+          <a:lstStyle/>
+          <a:p>
+            <a:pPr lvl="0"/>
+            <a:r>
+              <a:rPr lang="ru-RU" sz="2800" dirty="0" smtClean="0"/>
+              <a:t>Работа</a:t>
+            </a:r>
+            <a:r>
+              <a:rPr lang="en" sz="2800" dirty="0" smtClean="0">
+                <a:solidFill>
+                  <a:schemeClr val="accent2"/>
+                </a:solidFill>
+              </a:rPr>
+              <a:t> ‘Server’</a:t>
+            </a:r>
+            <a:r>
+              <a:rPr lang="en" sz="2800" dirty="0" smtClean="0">
+                <a:solidFill>
+                  <a:schemeClr val="accent6"/>
+                </a:solidFill>
+              </a:rPr>
+              <a:t>{</a:t>
+            </a:r>
+            <a:endParaRPr sz="2800" dirty="0">
+              <a:solidFill>
+                <a:schemeClr val="accent3"/>
+              </a:solidFill>
+            </a:endParaRPr>
+          </a:p>
+        </p:txBody>
+      </p:sp>
+      <p:grpSp>
+        <p:nvGrpSpPr>
+          <p:cNvPr id="2" name="Google Shape;462;p27"/>
+          <p:cNvGrpSpPr/>
+          <p:nvPr/>
+        </p:nvGrpSpPr>
+        <p:grpSpPr>
+          <a:xfrm>
+            <a:off x="1413525" y="2067694"/>
+            <a:ext cx="506100" cy="2105579"/>
+            <a:chOff x="1413525" y="1759900"/>
+            <a:chExt cx="506100" cy="2413373"/>
+          </a:xfrm>
+        </p:grpSpPr>
+        <p:cxnSp>
+          <p:nvCxnSpPr>
+            <p:cNvPr id="463" name="Google Shape;463;p27"/>
+            <p:cNvCxnSpPr/>
+            <p:nvPr/>
+          </p:nvCxnSpPr>
+          <p:spPr>
+            <a:xfrm>
+              <a:off x="1552225" y="1759900"/>
+              <a:ext cx="0" cy="1763400"/>
+            </a:xfrm>
+            <a:prstGeom prst="straightConnector1">
+              <a:avLst/>
+            </a:prstGeom>
+            <a:noFill/>
+            <a:ln w="9525" cap="flat" cmpd="sng">
+              <a:solidFill>
+                <a:schemeClr val="accent4"/>
+              </a:solidFill>
+              <a:prstDash val="solid"/>
+              <a:round/>
+              <a:headEnd type="none" w="med" len="med"/>
+              <a:tailEnd type="none" w="med" len="med"/>
+            </a:ln>
+          </p:spPr>
+        </p:cxnSp>
+        <p:sp>
+          <p:nvSpPr>
+            <p:cNvPr id="464" name="Google Shape;464;p27"/>
+            <p:cNvSpPr txBox="1"/>
+            <p:nvPr/>
+          </p:nvSpPr>
+          <p:spPr>
+            <a:xfrm>
+              <a:off x="1413525" y="3557750"/>
+              <a:ext cx="506100" cy="615523"/>
+            </a:xfrm>
+            <a:prstGeom prst="rect">
+              <a:avLst/>
+            </a:prstGeom>
+            <a:noFill/>
+            <a:ln>
+              <a:noFill/>
+            </a:ln>
+          </p:spPr>
+          <p:txBody>
+            <a:bodyPr spcFirstLastPara="1" wrap="square" lIns="91425" tIns="91425" rIns="91425" bIns="91425" anchor="t" anchorCtr="0">
+              <a:spAutoFit/>
+            </a:bodyPr>
+            <a:lstStyle/>
+            <a:p>
+              <a:pPr marL="0" lvl="0" indent="0" algn="l" rtl="0">
+                <a:spcBef>
+                  <a:spcPts val="0"/>
+                </a:spcBef>
+                <a:spcAft>
+                  <a:spcPts val="0"/>
+                </a:spcAft>
+                <a:buNone/>
+              </a:pPr>
+              <a:r>
+                <a:rPr lang="en" sz="2800" dirty="0">
+                  <a:solidFill>
+                    <a:schemeClr val="accent3"/>
+                  </a:solidFill>
+                  <a:latin typeface="Fira Code"/>
+                  <a:ea typeface="Fira Code"/>
+                  <a:cs typeface="Fira Code"/>
+                  <a:sym typeface="Fira Code"/>
+                </a:rPr>
+                <a:t>}</a:t>
+              </a:r>
+              <a:endParaRPr sz="2800" dirty="0">
+                <a:solidFill>
+                  <a:schemeClr val="accent3"/>
+                </a:solidFill>
+                <a:latin typeface="Fira Code"/>
+                <a:ea typeface="Fira Code"/>
+                <a:cs typeface="Fira Code"/>
+                <a:sym typeface="Fira Code"/>
+              </a:endParaRPr>
+            </a:p>
+          </p:txBody>
+        </p:sp>
+      </p:grpSp>
+      <p:sp>
+        <p:nvSpPr>
+          <p:cNvPr id="465" name="Google Shape;465;p27"/>
+          <p:cNvSpPr txBox="1">
+            <a:spLocks noGrp="1"/>
+          </p:cNvSpPr>
+          <p:nvPr>
+            <p:ph type="subTitle" idx="1"/>
+          </p:nvPr>
+        </p:nvSpPr>
+        <p:spPr>
+          <a:xfrm>
+            <a:off x="-5975" y="91525"/>
+            <a:ext cx="4572000" cy="357300"/>
+          </a:xfrm>
+          <a:prstGeom prst="rect">
+            <a:avLst/>
+          </a:prstGeom>
+        </p:spPr>
+        <p:txBody>
+          <a:bodyPr spcFirstLastPara="1" wrap="square" lIns="91425" tIns="91425" rIns="91425" bIns="91425" anchor="ctr" anchorCtr="0">
+            <a:noAutofit/>
+          </a:bodyPr>
+          <a:lstStyle/>
+          <a:p>
+            <a:pPr marL="0" lvl="0" indent="0" algn="ctr" rtl="0">
+              <a:spcBef>
+                <a:spcPts val="0"/>
+              </a:spcBef>
+              <a:spcAft>
+                <a:spcPts val="0"/>
+              </a:spcAft>
+              <a:buNone/>
+            </a:pPr>
+            <a:r>
+              <a:rPr lang="en-US" sz="1400" dirty="0" smtClean="0"/>
+              <a:t>server</a:t>
+            </a:r>
+            <a:r>
+              <a:rPr lang="en" sz="1400" dirty="0" smtClean="0">
+                <a:solidFill>
+                  <a:schemeClr val="accent3"/>
+                </a:solidFill>
+              </a:rPr>
+              <a:t>.cpp</a:t>
+            </a:r>
+            <a:endParaRPr sz="1400" dirty="0">
+              <a:solidFill>
+                <a:schemeClr val="accent3"/>
+              </a:solidFill>
+            </a:endParaRPr>
+          </a:p>
+        </p:txBody>
+      </p:sp>
+      <p:sp>
+        <p:nvSpPr>
+          <p:cNvPr id="466" name="Google Shape;466;p27"/>
+          <p:cNvSpPr txBox="1">
+            <a:spLocks noGrp="1"/>
+          </p:cNvSpPr>
+          <p:nvPr>
+            <p:ph type="subTitle" idx="1"/>
+          </p:nvPr>
+        </p:nvSpPr>
+        <p:spPr>
+          <a:xfrm>
+            <a:off x="4572000" y="91525"/>
+            <a:ext cx="4572000" cy="357300"/>
+          </a:xfrm>
+          <a:prstGeom prst="rect">
+            <a:avLst/>
+          </a:prstGeom>
+        </p:spPr>
+        <p:txBody>
+          <a:bodyPr spcFirstLastPara="1" wrap="square" lIns="91425" tIns="91425" rIns="91425" bIns="91425" anchor="ctr" anchorCtr="0">
+            <a:noAutofit/>
+          </a:bodyPr>
+          <a:lstStyle/>
+          <a:p>
+            <a:pPr marL="0" lvl="0" indent="0" algn="ctr"/>
+            <a:r>
+              <a:rPr lang="en-US" sz="1400" dirty="0" smtClean="0"/>
+              <a:t>client.cpp</a:t>
+            </a:r>
+            <a:endParaRPr lang="en-US" sz="1400" dirty="0"/>
+          </a:p>
+        </p:txBody>
+      </p:sp>
+      <p:sp>
+        <p:nvSpPr>
+          <p:cNvPr id="22" name="Google Shape;853;p42"/>
+          <p:cNvSpPr txBox="1">
+            <a:spLocks noGrp="1"/>
+          </p:cNvSpPr>
+          <p:nvPr>
+            <p:ph type="subTitle" idx="1"/>
+          </p:nvPr>
+        </p:nvSpPr>
+        <p:spPr>
+          <a:xfrm>
+            <a:off x="1763688" y="1779662"/>
+            <a:ext cx="3627600" cy="2016224"/>
+          </a:xfrm>
+          <a:prstGeom prst="rect">
+            <a:avLst/>
+          </a:prstGeom>
+        </p:spPr>
+        <p:txBody>
+          <a:bodyPr spcFirstLastPara="1" wrap="square" lIns="91425" tIns="91425" rIns="91425" bIns="91425" anchor="ctr" anchorCtr="0">
+            <a:noAutofit/>
+          </a:bodyPr>
+          <a:lstStyle/>
+          <a:p>
+            <a:pPr marL="0" lvl="0" indent="0"/>
+            <a:r>
+              <a:rPr lang="en" sz="1400" dirty="0"/>
+              <a:t>&lt; </a:t>
+            </a:r>
+            <a:r>
+              <a:rPr lang="ru-RU" sz="1400" dirty="0" smtClean="0"/>
+              <a:t>Далее разберем суть работы функции </a:t>
+            </a:r>
+            <a:r>
+              <a:rPr lang="en-US" sz="1400" dirty="0" smtClean="0"/>
+              <a:t>main: </a:t>
+            </a:r>
+            <a:r>
+              <a:rPr lang="ru-RU" sz="1400" dirty="0" smtClean="0"/>
+              <a:t>Это </a:t>
+            </a:r>
+            <a:r>
+              <a:rPr lang="ru-RU" sz="1400" b="1" dirty="0" smtClean="0"/>
+              <a:t>точка входа сервера</a:t>
+            </a:r>
+            <a:r>
+              <a:rPr lang="ru-RU" sz="1400" dirty="0" smtClean="0"/>
+              <a:t>: инициализирует сеть, загадывает число и бесконечно принимает новых клиентов, запуская для каждого отдельный поток.</a:t>
+            </a:r>
+            <a:r>
+              <a:rPr lang="en-US" sz="1400" dirty="0" smtClean="0"/>
+              <a:t> </a:t>
+            </a:r>
+            <a:r>
+              <a:rPr lang="ru-RU" sz="1400" dirty="0" err="1" smtClean="0"/>
+              <a:t>secretNumber</a:t>
+            </a:r>
+            <a:r>
+              <a:rPr lang="ru-RU" sz="1400" dirty="0" smtClean="0"/>
+              <a:t> генерируется </a:t>
+            </a:r>
+            <a:r>
+              <a:rPr lang="ru-RU" sz="1400" b="1" dirty="0" smtClean="0"/>
+              <a:t>один раз при старте сервера</a:t>
+            </a:r>
+            <a:r>
+              <a:rPr lang="ru-RU" sz="1400" dirty="0" smtClean="0"/>
+              <a:t> — все клиенты угадывают одно и то же число.</a:t>
+            </a:r>
+            <a:r>
+              <a:rPr lang="en-US" sz="1400" dirty="0" smtClean="0"/>
+              <a:t> </a:t>
+            </a:r>
+            <a:r>
+              <a:rPr lang="en" sz="1400" dirty="0" smtClean="0"/>
+              <a:t>&gt;</a:t>
+            </a:r>
+            <a:endParaRPr sz="1400" dirty="0"/>
+          </a:p>
+        </p:txBody>
+      </p:sp>
+      <p:grpSp>
+        <p:nvGrpSpPr>
+          <p:cNvPr id="25" name="Google Shape;2531;p48"/>
+          <p:cNvGrpSpPr/>
+          <p:nvPr/>
+        </p:nvGrpSpPr>
+        <p:grpSpPr>
+          <a:xfrm>
+            <a:off x="5580112" y="948075"/>
+            <a:ext cx="3439196" cy="2775803"/>
+            <a:chOff x="4994678" y="1173377"/>
+            <a:chExt cx="3439196" cy="2775803"/>
+          </a:xfrm>
+        </p:grpSpPr>
+        <p:grpSp>
+          <p:nvGrpSpPr>
+            <p:cNvPr id="26" name="Google Shape;2532;p48"/>
+            <p:cNvGrpSpPr/>
+            <p:nvPr/>
+          </p:nvGrpSpPr>
+          <p:grpSpPr>
+            <a:xfrm>
+              <a:off x="4994678" y="1173377"/>
+              <a:ext cx="3439196" cy="2775803"/>
+              <a:chOff x="4572031" y="1415284"/>
+              <a:chExt cx="2875341" cy="2319354"/>
+            </a:xfrm>
+          </p:grpSpPr>
+          <p:grpSp>
+            <p:nvGrpSpPr>
+              <p:cNvPr id="28" name="Google Shape;2533;p48"/>
+              <p:cNvGrpSpPr/>
+              <p:nvPr/>
+            </p:nvGrpSpPr>
+            <p:grpSpPr>
+              <a:xfrm>
+                <a:off x="4572031" y="1415284"/>
+                <a:ext cx="2875341" cy="1993075"/>
+                <a:chOff x="3665860" y="822037"/>
+                <a:chExt cx="4758136" cy="3243937"/>
+              </a:xfrm>
+            </p:grpSpPr>
+            <p:grpSp>
+              <p:nvGrpSpPr>
+                <p:cNvPr id="30" name="Google Shape;2534;p48"/>
+                <p:cNvGrpSpPr/>
+                <p:nvPr/>
+              </p:nvGrpSpPr>
+              <p:grpSpPr>
+                <a:xfrm>
+                  <a:off x="3665860" y="822037"/>
+                  <a:ext cx="4758136" cy="3243937"/>
+                  <a:chOff x="518725" y="252435"/>
+                  <a:chExt cx="6524250" cy="4448015"/>
+                </a:xfrm>
+              </p:grpSpPr>
+              <p:sp>
+                <p:nvSpPr>
+                  <p:cNvPr id="32" name="Google Shape;2535;p48"/>
+                  <p:cNvSpPr/>
+                  <p:nvPr/>
+                </p:nvSpPr>
+                <p:spPr>
+                  <a:xfrm>
+                    <a:off x="518725" y="4131625"/>
+                    <a:ext cx="6524250" cy="568825"/>
+                  </a:xfrm>
+                  <a:custGeom>
+                    <a:avLst/>
+                    <a:gdLst/>
+                    <a:ahLst/>
+                    <a:cxnLst/>
+                    <a:rect l="l" t="t" r="r" b="b"/>
+                    <a:pathLst>
+                      <a:path w="260970" h="22753" extrusionOk="0">
+                        <a:moveTo>
+                          <a:pt x="0" y="14846"/>
+                        </a:moveTo>
+                        <a:cubicBezTo>
+                          <a:pt x="0" y="19169"/>
+                          <a:pt x="4039" y="22753"/>
+                          <a:pt x="8305" y="22753"/>
+                        </a:cubicBezTo>
+                        <a:lnTo>
+                          <a:pt x="253120" y="22753"/>
+                        </a:lnTo>
+                        <a:cubicBezTo>
+                          <a:pt x="257443" y="22696"/>
+                          <a:pt x="260913" y="19169"/>
+                          <a:pt x="260970" y="14846"/>
+                        </a:cubicBezTo>
+                        <a:lnTo>
+                          <a:pt x="260970" y="0"/>
+                        </a:lnTo>
+                        <a:lnTo>
+                          <a:pt x="0" y="0"/>
+                        </a:lnTo>
+                        <a:close/>
+                      </a:path>
+                    </a:pathLst>
+                  </a:custGeom>
+                  <a:solidFill>
+                    <a:schemeClr val="dk1"/>
+                  </a:solidFill>
+                  <a:ln w="9525" cap="flat" cmpd="sng">
+                    <a:solidFill>
+                      <a:schemeClr val="accent3"/>
+                    </a:solidFill>
+                    <a:prstDash val="solid"/>
+                    <a:round/>
+                    <a:headEnd type="none" w="sm" len="sm"/>
+                    <a:tailEnd type="none" w="sm" len="sm"/>
+                  </a:ln>
+                </p:spPr>
+                <p:txBody>
+                  <a:bodyPr spcFirstLastPara="1" wrap="square" lIns="91425" tIns="91425" rIns="91425" bIns="91425" anchor="ctr" anchorCtr="0">
+                    <a:noAutofit/>
+                  </a:bodyPr>
+                  <a:lstStyle/>
+                  <a:p>
+                    <a:pPr marL="0" lvl="0" indent="0" algn="l" rtl="0">
+                      <a:spcBef>
+                        <a:spcPts val="0"/>
+                      </a:spcBef>
+                      <a:spcAft>
+                        <a:spcPts val="0"/>
+                      </a:spcAft>
+                      <a:buNone/>
+                    </a:pPr>
+                    <a:endParaRPr>
+                      <a:solidFill>
+                        <a:schemeClr val="accent3"/>
+                      </a:solidFill>
+                    </a:endParaRPr>
+                  </a:p>
+                </p:txBody>
+              </p:sp>
+              <p:sp>
+                <p:nvSpPr>
+                  <p:cNvPr id="33" name="Google Shape;2536;p48"/>
+                  <p:cNvSpPr/>
+                  <p:nvPr/>
+                </p:nvSpPr>
+                <p:spPr>
+                  <a:xfrm>
+                    <a:off x="518725" y="252435"/>
+                    <a:ext cx="6524250" cy="3893525"/>
+                  </a:xfrm>
+                  <a:custGeom>
+                    <a:avLst/>
+                    <a:gdLst/>
+                    <a:ahLst/>
+                    <a:cxnLst/>
+                    <a:rect l="l" t="t" r="r" b="b"/>
+                    <a:pathLst>
+                      <a:path w="260970" h="155741" extrusionOk="0">
+                        <a:moveTo>
+                          <a:pt x="249594" y="9954"/>
+                        </a:moveTo>
+                        <a:lnTo>
+                          <a:pt x="249594" y="144364"/>
+                        </a:lnTo>
+                        <a:lnTo>
+                          <a:pt x="11376" y="144364"/>
+                        </a:lnTo>
+                        <a:lnTo>
+                          <a:pt x="11376" y="9954"/>
+                        </a:lnTo>
+                        <a:close/>
+                        <a:moveTo>
+                          <a:pt x="8305" y="0"/>
+                        </a:moveTo>
+                        <a:cubicBezTo>
+                          <a:pt x="4039" y="0"/>
+                          <a:pt x="0" y="2844"/>
+                          <a:pt x="0" y="7110"/>
+                        </a:cubicBezTo>
+                        <a:lnTo>
+                          <a:pt x="0" y="155740"/>
+                        </a:lnTo>
+                        <a:lnTo>
+                          <a:pt x="260970" y="155740"/>
+                        </a:lnTo>
+                        <a:lnTo>
+                          <a:pt x="260970" y="7110"/>
+                        </a:lnTo>
+                        <a:cubicBezTo>
+                          <a:pt x="260970" y="2844"/>
+                          <a:pt x="257386" y="0"/>
+                          <a:pt x="253120" y="0"/>
+                        </a:cubicBezTo>
+                        <a:close/>
+                      </a:path>
+                    </a:pathLst>
+                  </a:custGeom>
+                  <a:solidFill>
+                    <a:schemeClr val="dk1"/>
+                  </a:solidFill>
+                  <a:ln w="9525" cap="flat" cmpd="sng">
+                    <a:solidFill>
+                      <a:schemeClr val="accent3"/>
+                    </a:solidFill>
+                    <a:prstDash val="solid"/>
+                    <a:round/>
+                    <a:headEnd type="none" w="sm" len="sm"/>
+                    <a:tailEnd type="none" w="sm" len="sm"/>
+                  </a:ln>
+                </p:spPr>
+                <p:txBody>
+                  <a:bodyPr spcFirstLastPara="1" wrap="square" lIns="91425" tIns="91425" rIns="91425" bIns="91425" anchor="ctr" anchorCtr="0">
+                    <a:noAutofit/>
+                  </a:bodyPr>
+                  <a:lstStyle/>
+                  <a:p>
+                    <a:pPr marL="0" lvl="0" indent="0" algn="l" rtl="0">
+                      <a:spcBef>
+                        <a:spcPts val="0"/>
+                      </a:spcBef>
+                      <a:spcAft>
+                        <a:spcPts val="0"/>
+                      </a:spcAft>
+                      <a:buNone/>
+                    </a:pPr>
+                    <a:endParaRPr>
+                      <a:solidFill>
+                        <a:schemeClr val="accent3"/>
+                      </a:solidFill>
+                    </a:endParaRPr>
+                  </a:p>
+                </p:txBody>
+              </p:sp>
+            </p:grpSp>
+            <p:sp>
+              <p:nvSpPr>
+                <p:cNvPr id="31" name="Google Shape;2537;p48"/>
+                <p:cNvSpPr/>
+                <p:nvPr/>
+              </p:nvSpPr>
+              <p:spPr>
+                <a:xfrm>
+                  <a:off x="5947879" y="3778845"/>
+                  <a:ext cx="194076" cy="166189"/>
+                </a:xfrm>
+                <a:custGeom>
+                  <a:avLst/>
+                  <a:gdLst/>
+                  <a:ahLst/>
+                  <a:cxnLst/>
+                  <a:rect l="l" t="t" r="r" b="b"/>
+                  <a:pathLst>
+                    <a:path w="10627" h="9100" extrusionOk="0">
+                      <a:moveTo>
+                        <a:pt x="6092" y="0"/>
+                      </a:moveTo>
+                      <a:cubicBezTo>
+                        <a:pt x="2020" y="0"/>
+                        <a:pt x="0" y="4900"/>
+                        <a:pt x="2881" y="7747"/>
+                      </a:cubicBezTo>
+                      <a:cubicBezTo>
+                        <a:pt x="3804" y="8681"/>
+                        <a:pt x="4944" y="9100"/>
+                        <a:pt x="6063" y="9100"/>
+                      </a:cubicBezTo>
+                      <a:cubicBezTo>
+                        <a:pt x="8391" y="9100"/>
+                        <a:pt x="10627" y="7286"/>
+                        <a:pt x="10627" y="4536"/>
+                      </a:cubicBezTo>
+                      <a:cubicBezTo>
+                        <a:pt x="10627" y="2020"/>
+                        <a:pt x="8608" y="0"/>
+                        <a:pt x="6092" y="0"/>
+                      </a:cubicBezTo>
+                      <a:close/>
+                    </a:path>
+                  </a:pathLst>
+                </a:custGeom>
+                <a:noFill/>
+                <a:ln w="9525" cap="flat" cmpd="sng">
+                  <a:solidFill>
+                    <a:schemeClr val="accent3"/>
+                  </a:solidFill>
+                  <a:prstDash val="solid"/>
+                  <a:round/>
+                  <a:headEnd type="none" w="sm" len="sm"/>
+                  <a:tailEnd type="none" w="sm" len="sm"/>
+                </a:ln>
+              </p:spPr>
+              <p:txBody>
+                <a:bodyPr spcFirstLastPara="1" wrap="square" lIns="91425" tIns="91425" rIns="91425" bIns="91425" anchor="ctr" anchorCtr="0">
+                  <a:noAutofit/>
+                </a:bodyPr>
+                <a:lstStyle/>
+                <a:p>
+                  <a:pPr marL="0" lvl="0" indent="0" algn="l" rtl="0">
+                    <a:spcBef>
+                      <a:spcPts val="0"/>
+                    </a:spcBef>
+                    <a:spcAft>
+                      <a:spcPts val="0"/>
+                    </a:spcAft>
+                    <a:buNone/>
+                  </a:pPr>
+                  <a:endParaRPr>
+                    <a:solidFill>
+                      <a:schemeClr val="accent3"/>
+                    </a:solidFill>
+                  </a:endParaRPr>
+                </a:p>
+              </p:txBody>
+            </p:sp>
+          </p:grpSp>
+          <p:sp>
+            <p:nvSpPr>
+              <p:cNvPr id="29" name="Google Shape;2538;p48"/>
+              <p:cNvSpPr/>
+              <p:nvPr/>
+            </p:nvSpPr>
+            <p:spPr>
+              <a:xfrm>
+                <a:off x="5498909" y="3408365"/>
+                <a:ext cx="1040944" cy="326273"/>
+              </a:xfrm>
+              <a:custGeom>
+                <a:avLst/>
+                <a:gdLst/>
+                <a:ahLst/>
+                <a:cxnLst/>
+                <a:rect l="l" t="t" r="r" b="b"/>
+                <a:pathLst>
+                  <a:path w="94481" h="29125" extrusionOk="0">
+                    <a:moveTo>
+                      <a:pt x="79805" y="18317"/>
+                    </a:moveTo>
+                    <a:cubicBezTo>
+                      <a:pt x="74117" y="12515"/>
+                      <a:pt x="73889" y="1"/>
+                      <a:pt x="73889" y="1"/>
+                    </a:cubicBezTo>
+                    <a:lnTo>
+                      <a:pt x="20592" y="1"/>
+                    </a:lnTo>
+                    <a:cubicBezTo>
+                      <a:pt x="20592" y="1"/>
+                      <a:pt x="20364" y="12515"/>
+                      <a:pt x="14676" y="18317"/>
+                    </a:cubicBezTo>
+                    <a:cubicBezTo>
+                      <a:pt x="8931" y="24175"/>
+                      <a:pt x="1" y="29124"/>
+                      <a:pt x="15529" y="29124"/>
+                    </a:cubicBezTo>
+                    <a:lnTo>
+                      <a:pt x="78952" y="29124"/>
+                    </a:lnTo>
+                    <a:cubicBezTo>
+                      <a:pt x="94480" y="29124"/>
+                      <a:pt x="85493" y="24175"/>
+                      <a:pt x="79805" y="18317"/>
+                    </a:cubicBezTo>
+                    <a:close/>
+                  </a:path>
+                </a:pathLst>
+              </a:custGeom>
+              <a:solidFill>
+                <a:schemeClr val="dk1"/>
+              </a:solidFill>
+              <a:ln w="9525" cap="flat" cmpd="sng">
+                <a:solidFill>
+                  <a:schemeClr val="accent3"/>
+                </a:solidFill>
+                <a:prstDash val="solid"/>
+                <a:round/>
+                <a:headEnd type="none" w="sm" len="sm"/>
+                <a:tailEnd type="none" w="sm" len="sm"/>
+              </a:ln>
+            </p:spPr>
+            <p:txBody>
+              <a:bodyPr spcFirstLastPara="1" wrap="square" lIns="91425" tIns="91425" rIns="91425" bIns="91425" anchor="ctr" anchorCtr="0">
+                <a:noAutofit/>
+              </a:bodyPr>
+              <a:lstStyle/>
+              <a:p>
+                <a:pPr marL="0" lvl="0" indent="0" algn="l" rtl="0">
+                  <a:spcBef>
+                    <a:spcPts val="0"/>
+                  </a:spcBef>
+                  <a:spcAft>
+                    <a:spcPts val="0"/>
+                  </a:spcAft>
+                  <a:buNone/>
+                </a:pPr>
+                <a:endParaRPr>
+                  <a:solidFill>
+                    <a:schemeClr val="accent3"/>
+                  </a:solidFill>
+                </a:endParaRPr>
+              </a:p>
+            </p:txBody>
+          </p:sp>
+        </p:grpSp>
+        <p:cxnSp>
+          <p:nvCxnSpPr>
+            <p:cNvPr id="27" name="Google Shape;2539;p48"/>
+            <p:cNvCxnSpPr/>
+            <p:nvPr/>
+          </p:nvCxnSpPr>
+          <p:spPr>
+            <a:xfrm rot="10800000">
+              <a:off x="5370275" y="3949180"/>
+              <a:ext cx="2688000" cy="0"/>
+            </a:xfrm>
+            <a:prstGeom prst="straightConnector1">
+              <a:avLst/>
+            </a:prstGeom>
+            <a:noFill/>
+            <a:ln w="9525" cap="flat" cmpd="sng">
+              <a:solidFill>
+                <a:schemeClr val="accent3"/>
+              </a:solidFill>
+              <a:prstDash val="solid"/>
+              <a:round/>
+              <a:headEnd type="none" w="med" len="med"/>
+              <a:tailEnd type="none" w="med" len="med"/>
+            </a:ln>
+          </p:spPr>
+        </p:cxnSp>
+      </p:grpSp>
+      <p:pic>
+        <p:nvPicPr>
+          <p:cNvPr id="8194" name="Picture 2"/>
+          <p:cNvPicPr>
+            <a:picLocks noChangeAspect="1" noChangeArrowheads="1"/>
+          </p:cNvPicPr>
+          <p:nvPr/>
+        </p:nvPicPr>
+        <p:blipFill>
+          <a:blip r:embed="rId3"/>
+          <a:srcRect/>
+          <a:stretch>
+            <a:fillRect/>
+          </a:stretch>
+        </p:blipFill>
+        <p:spPr bwMode="auto">
+          <a:xfrm>
+            <a:off x="5868144" y="1131590"/>
+            <a:ext cx="2880320" cy="1728192"/>
+          </a:xfrm>
+          <a:prstGeom prst="rect">
+            <a:avLst/>
+          </a:prstGeom>
+          <a:noFill/>
+          <a:ln w="9525">
+            <a:noFill/>
+            <a:miter lim="800000"/>
+            <a:headEnd/>
+            <a:tailEnd/>
+          </a:ln>
+        </p:spPr>
+      </p:pic>
+    </p:spTree>
+  </p:cSld>
+  <p:clrMapOvr>
+    <a:masterClrMapping/>
+  </p:clrMapOvr>
+  <p:transition>
+    <p:pull dir="u"/>
   </p:transition>
   <p:timing>
     <p:tnLst>
